--- a/traffic-panel/数据中台演示-数据应用-崔雨.pptx
+++ b/traffic-panel/数据中台演示-数据应用-崔雨.pptx
@@ -74,7 +74,7 @@
         <a:latin typeface="+mj-lt"/>
         <a:ea typeface="+mj-ea"/>
         <a:cs typeface="+mj-cs"/>
-        <a:sym typeface="Helvetica Neue"/>
+        <a:sym typeface="Helvetica"/>
       </a:defRPr>
     </a:lvl1pPr>
     <a:lvl2pPr marL="0" marR="0" indent="0" algn="l" defTabSz="2438337" rtl="0" fontAlgn="auto" latinLnBrk="0" hangingPunct="0">
@@ -104,7 +104,7 @@
         <a:latin typeface="+mj-lt"/>
         <a:ea typeface="+mj-ea"/>
         <a:cs typeface="+mj-cs"/>
-        <a:sym typeface="Helvetica Neue"/>
+        <a:sym typeface="Helvetica"/>
       </a:defRPr>
     </a:lvl2pPr>
     <a:lvl3pPr marL="0" marR="0" indent="0" algn="l" defTabSz="2438337" rtl="0" fontAlgn="auto" latinLnBrk="0" hangingPunct="0">
@@ -134,7 +134,7 @@
         <a:latin typeface="+mj-lt"/>
         <a:ea typeface="+mj-ea"/>
         <a:cs typeface="+mj-cs"/>
-        <a:sym typeface="Helvetica Neue"/>
+        <a:sym typeface="Helvetica"/>
       </a:defRPr>
     </a:lvl3pPr>
     <a:lvl4pPr marL="0" marR="0" indent="0" algn="l" defTabSz="2438337" rtl="0" fontAlgn="auto" latinLnBrk="0" hangingPunct="0">
@@ -164,7 +164,7 @@
         <a:latin typeface="+mj-lt"/>
         <a:ea typeface="+mj-ea"/>
         <a:cs typeface="+mj-cs"/>
-        <a:sym typeface="Helvetica Neue"/>
+        <a:sym typeface="Helvetica"/>
       </a:defRPr>
     </a:lvl4pPr>
     <a:lvl5pPr marL="0" marR="0" indent="0" algn="l" defTabSz="2438337" rtl="0" fontAlgn="auto" latinLnBrk="0" hangingPunct="0">
@@ -194,7 +194,7 @@
         <a:latin typeface="+mj-lt"/>
         <a:ea typeface="+mj-ea"/>
         <a:cs typeface="+mj-cs"/>
-        <a:sym typeface="Helvetica Neue"/>
+        <a:sym typeface="Helvetica"/>
       </a:defRPr>
     </a:lvl5pPr>
     <a:lvl6pPr marL="0" marR="0" indent="0" algn="l" defTabSz="2438337" rtl="0" fontAlgn="auto" latinLnBrk="0" hangingPunct="0">
@@ -224,7 +224,7 @@
         <a:latin typeface="+mj-lt"/>
         <a:ea typeface="+mj-ea"/>
         <a:cs typeface="+mj-cs"/>
-        <a:sym typeface="Helvetica Neue"/>
+        <a:sym typeface="Helvetica"/>
       </a:defRPr>
     </a:lvl6pPr>
     <a:lvl7pPr marL="0" marR="0" indent="0" algn="l" defTabSz="2438337" rtl="0" fontAlgn="auto" latinLnBrk="0" hangingPunct="0">
@@ -254,7 +254,7 @@
         <a:latin typeface="+mj-lt"/>
         <a:ea typeface="+mj-ea"/>
         <a:cs typeface="+mj-cs"/>
-        <a:sym typeface="Helvetica Neue"/>
+        <a:sym typeface="Helvetica"/>
       </a:defRPr>
     </a:lvl7pPr>
     <a:lvl8pPr marL="0" marR="0" indent="0" algn="l" defTabSz="2438337" rtl="0" fontAlgn="auto" latinLnBrk="0" hangingPunct="0">
@@ -284,7 +284,7 @@
         <a:latin typeface="+mj-lt"/>
         <a:ea typeface="+mj-ea"/>
         <a:cs typeface="+mj-cs"/>
-        <a:sym typeface="Helvetica Neue"/>
+        <a:sym typeface="Helvetica"/>
       </a:defRPr>
     </a:lvl8pPr>
     <a:lvl9pPr marL="0" marR="0" indent="0" algn="l" defTabSz="2438337" rtl="0" fontAlgn="auto" latinLnBrk="0" hangingPunct="0">
@@ -314,7 +314,7 @@
         <a:latin typeface="+mj-lt"/>
         <a:ea typeface="+mj-ea"/>
         <a:cs typeface="+mj-cs"/>
-        <a:sym typeface="Helvetica Neue"/>
+        <a:sym typeface="Helvetica"/>
       </a:defRPr>
     </a:lvl9pPr>
   </p:defaultTextStyle>
@@ -401,9 +401,9 @@
         <a:spcPct val="117999"/>
       </a:lnSpc>
       <a:defRPr sz="2200">
-        <a:latin typeface="+mj-lt"/>
-        <a:ea typeface="+mj-ea"/>
-        <a:cs typeface="+mj-cs"/>
+        <a:latin typeface="+mn-lt"/>
+        <a:ea typeface="+mn-ea"/>
+        <a:cs typeface="+mn-cs"/>
         <a:sym typeface="Helvetica Neue"/>
       </a:defRPr>
     </a:lvl1pPr>
@@ -412,9 +412,9 @@
         <a:spcPct val="117999"/>
       </a:lnSpc>
       <a:defRPr sz="2200">
-        <a:latin typeface="+mj-lt"/>
-        <a:ea typeface="+mj-ea"/>
-        <a:cs typeface="+mj-cs"/>
+        <a:latin typeface="+mn-lt"/>
+        <a:ea typeface="+mn-ea"/>
+        <a:cs typeface="+mn-cs"/>
         <a:sym typeface="Helvetica Neue"/>
       </a:defRPr>
     </a:lvl2pPr>
@@ -423,9 +423,9 @@
         <a:spcPct val="117999"/>
       </a:lnSpc>
       <a:defRPr sz="2200">
-        <a:latin typeface="+mj-lt"/>
-        <a:ea typeface="+mj-ea"/>
-        <a:cs typeface="+mj-cs"/>
+        <a:latin typeface="+mn-lt"/>
+        <a:ea typeface="+mn-ea"/>
+        <a:cs typeface="+mn-cs"/>
         <a:sym typeface="Helvetica Neue"/>
       </a:defRPr>
     </a:lvl3pPr>
@@ -434,9 +434,9 @@
         <a:spcPct val="117999"/>
       </a:lnSpc>
       <a:defRPr sz="2200">
-        <a:latin typeface="+mj-lt"/>
-        <a:ea typeface="+mj-ea"/>
-        <a:cs typeface="+mj-cs"/>
+        <a:latin typeface="+mn-lt"/>
+        <a:ea typeface="+mn-ea"/>
+        <a:cs typeface="+mn-cs"/>
         <a:sym typeface="Helvetica Neue"/>
       </a:defRPr>
     </a:lvl4pPr>
@@ -445,9 +445,9 @@
         <a:spcPct val="117999"/>
       </a:lnSpc>
       <a:defRPr sz="2200">
-        <a:latin typeface="+mj-lt"/>
-        <a:ea typeface="+mj-ea"/>
-        <a:cs typeface="+mj-cs"/>
+        <a:latin typeface="+mn-lt"/>
+        <a:ea typeface="+mn-ea"/>
+        <a:cs typeface="+mn-cs"/>
         <a:sym typeface="Helvetica Neue"/>
       </a:defRPr>
     </a:lvl5pPr>
@@ -456,9 +456,9 @@
         <a:spcPct val="117999"/>
       </a:lnSpc>
       <a:defRPr sz="2200">
-        <a:latin typeface="+mj-lt"/>
-        <a:ea typeface="+mj-ea"/>
-        <a:cs typeface="+mj-cs"/>
+        <a:latin typeface="+mn-lt"/>
+        <a:ea typeface="+mn-ea"/>
+        <a:cs typeface="+mn-cs"/>
         <a:sym typeface="Helvetica Neue"/>
       </a:defRPr>
     </a:lvl6pPr>
@@ -467,9 +467,9 @@
         <a:spcPct val="117999"/>
       </a:lnSpc>
       <a:defRPr sz="2200">
-        <a:latin typeface="+mj-lt"/>
-        <a:ea typeface="+mj-ea"/>
-        <a:cs typeface="+mj-cs"/>
+        <a:latin typeface="+mn-lt"/>
+        <a:ea typeface="+mn-ea"/>
+        <a:cs typeface="+mn-cs"/>
         <a:sym typeface="Helvetica Neue"/>
       </a:defRPr>
     </a:lvl7pPr>
@@ -478,9 +478,9 @@
         <a:spcPct val="117999"/>
       </a:lnSpc>
       <a:defRPr sz="2200">
-        <a:latin typeface="+mj-lt"/>
-        <a:ea typeface="+mj-ea"/>
-        <a:cs typeface="+mj-cs"/>
+        <a:latin typeface="+mn-lt"/>
+        <a:ea typeface="+mn-ea"/>
+        <a:cs typeface="+mn-cs"/>
         <a:sym typeface="Helvetica Neue"/>
       </a:defRPr>
     </a:lvl8pPr>
@@ -489,9 +489,9 @@
         <a:spcPct val="117999"/>
       </a:lnSpc>
       <a:defRPr sz="2200">
-        <a:latin typeface="+mj-lt"/>
-        <a:ea typeface="+mj-ea"/>
-        <a:cs typeface="+mj-cs"/>
+        <a:latin typeface="+mn-lt"/>
+        <a:ea typeface="+mn-ea"/>
+        <a:cs typeface="+mn-cs"/>
         <a:sym typeface="Helvetica Neue"/>
       </a:defRPr>
     </a:lvl9pPr>
@@ -527,7 +527,7 @@
         <p:spPr>
           <a:xfrm>
             <a:off x="1201340" y="11859862"/>
-            <a:ext cx="21971005" cy="636981"/>
+            <a:ext cx="21971005" cy="636982"/>
           </a:xfrm>
           <a:prstGeom prst="rect">
             <a:avLst/>
@@ -627,7 +627,7 @@
         <p:spPr>
           <a:xfrm>
             <a:off x="1206496" y="2574991"/>
-            <a:ext cx="21971005" cy="4648203"/>
+            <a:ext cx="21971005" cy="4648204"/>
           </a:xfrm>
           <a:prstGeom prst="rect">
             <a:avLst/>
@@ -1515,8 +1515,8 @@
         </p:nvSpPr>
         <p:spPr>
           <a:xfrm>
-            <a:off x="2430023" y="10675453"/>
-            <a:ext cx="20200055" cy="636981"/>
+            <a:off x="2430022" y="10675453"/>
+            <a:ext cx="20200057" cy="636982"/>
           </a:xfrm>
           <a:prstGeom prst="rect">
             <a:avLst/>
@@ -1616,7 +1616,7 @@
         <p:spPr>
           <a:xfrm>
             <a:off x="1753923" y="4939860"/>
-            <a:ext cx="20876154" cy="3836282"/>
+            <a:ext cx="20876154" cy="3836283"/>
           </a:xfrm>
           <a:prstGeom prst="rect">
             <a:avLst/>
@@ -1625,7 +1625,7 @@
         <p:txBody>
           <a:bodyPr numCol="1" spcCol="38100"/>
           <a:lstStyle>
-            <a:lvl1pPr marL="300875" indent="-131851">
+            <a:lvl1pPr marL="131850" indent="37172">
               <a:spcBef>
                 <a:spcPts val="0"/>
               </a:spcBef>
@@ -1916,10 +1916,6 @@
           </p:nvPr>
         </p:nvSpPr>
         <p:spPr>
-          <a:xfrm>
-            <a:off x="12001500" y="13080999"/>
-            <a:ext cx="368504" cy="374600"/>
-          </a:xfrm>
           <a:prstGeom prst="rect">
             <a:avLst/>
           </a:prstGeom>
@@ -2029,7 +2025,7 @@
         <p:spPr>
           <a:xfrm>
             <a:off x="1207690" y="1106137"/>
-            <a:ext cx="21968621" cy="636981"/>
+            <a:ext cx="21968621" cy="636982"/>
           </a:xfrm>
           <a:prstGeom prst="rect">
             <a:avLst/>
@@ -2129,7 +2125,7 @@
         <p:spPr>
           <a:xfrm>
             <a:off x="1206500" y="11609909"/>
-            <a:ext cx="21971000" cy="1116954"/>
+            <a:ext cx="21971000" cy="1116955"/>
           </a:xfrm>
           <a:prstGeom prst="rect">
             <a:avLst/>
@@ -3588,7 +3584,12 @@
               <a:spcBef>
                 <a:spcPts val="0"/>
               </a:spcBef>
-              <a:defRPr sz="1800"/>
+              <a:defRPr sz="1800">
+                <a:latin typeface="+mn-lt"/>
+                <a:ea typeface="+mn-ea"/>
+                <a:cs typeface="+mn-cs"/>
+                <a:sym typeface="Helvetica Neue"/>
+              </a:defRPr>
             </a:lvl1pPr>
           </a:lstStyle>
           <a:p>
@@ -3642,9 +3643,9 @@
             <a:srgbClr val="000000"/>
           </a:solidFill>
           <a:uFillTx/>
-          <a:latin typeface="+mj-lt"/>
-          <a:ea typeface="+mj-ea"/>
-          <a:cs typeface="+mj-cs"/>
+          <a:latin typeface="+mn-lt"/>
+          <a:ea typeface="+mn-ea"/>
+          <a:cs typeface="+mn-cs"/>
           <a:sym typeface="Helvetica Neue"/>
         </a:defRPr>
       </a:lvl1pPr>
@@ -3668,9 +3669,9 @@
             <a:srgbClr val="000000"/>
           </a:solidFill>
           <a:uFillTx/>
-          <a:latin typeface="+mj-lt"/>
-          <a:ea typeface="+mj-ea"/>
-          <a:cs typeface="+mj-cs"/>
+          <a:latin typeface="+mn-lt"/>
+          <a:ea typeface="+mn-ea"/>
+          <a:cs typeface="+mn-cs"/>
           <a:sym typeface="Helvetica Neue"/>
         </a:defRPr>
       </a:lvl2pPr>
@@ -3694,9 +3695,9 @@
             <a:srgbClr val="000000"/>
           </a:solidFill>
           <a:uFillTx/>
-          <a:latin typeface="+mj-lt"/>
-          <a:ea typeface="+mj-ea"/>
-          <a:cs typeface="+mj-cs"/>
+          <a:latin typeface="+mn-lt"/>
+          <a:ea typeface="+mn-ea"/>
+          <a:cs typeface="+mn-cs"/>
           <a:sym typeface="Helvetica Neue"/>
         </a:defRPr>
       </a:lvl3pPr>
@@ -3720,9 +3721,9 @@
             <a:srgbClr val="000000"/>
           </a:solidFill>
           <a:uFillTx/>
-          <a:latin typeface="+mj-lt"/>
-          <a:ea typeface="+mj-ea"/>
-          <a:cs typeface="+mj-cs"/>
+          <a:latin typeface="+mn-lt"/>
+          <a:ea typeface="+mn-ea"/>
+          <a:cs typeface="+mn-cs"/>
           <a:sym typeface="Helvetica Neue"/>
         </a:defRPr>
       </a:lvl4pPr>
@@ -3746,9 +3747,9 @@
             <a:srgbClr val="000000"/>
           </a:solidFill>
           <a:uFillTx/>
-          <a:latin typeface="+mj-lt"/>
-          <a:ea typeface="+mj-ea"/>
-          <a:cs typeface="+mj-cs"/>
+          <a:latin typeface="+mn-lt"/>
+          <a:ea typeface="+mn-ea"/>
+          <a:cs typeface="+mn-cs"/>
           <a:sym typeface="Helvetica Neue"/>
         </a:defRPr>
       </a:lvl5pPr>
@@ -3772,9 +3773,9 @@
             <a:srgbClr val="000000"/>
           </a:solidFill>
           <a:uFillTx/>
-          <a:latin typeface="+mj-lt"/>
-          <a:ea typeface="+mj-ea"/>
-          <a:cs typeface="+mj-cs"/>
+          <a:latin typeface="+mn-lt"/>
+          <a:ea typeface="+mn-ea"/>
+          <a:cs typeface="+mn-cs"/>
           <a:sym typeface="Helvetica Neue"/>
         </a:defRPr>
       </a:lvl6pPr>
@@ -3798,9 +3799,9 @@
             <a:srgbClr val="000000"/>
           </a:solidFill>
           <a:uFillTx/>
-          <a:latin typeface="+mj-lt"/>
-          <a:ea typeface="+mj-ea"/>
-          <a:cs typeface="+mj-cs"/>
+          <a:latin typeface="+mn-lt"/>
+          <a:ea typeface="+mn-ea"/>
+          <a:cs typeface="+mn-cs"/>
           <a:sym typeface="Helvetica Neue"/>
         </a:defRPr>
       </a:lvl7pPr>
@@ -3824,9 +3825,9 @@
             <a:srgbClr val="000000"/>
           </a:solidFill>
           <a:uFillTx/>
-          <a:latin typeface="+mj-lt"/>
-          <a:ea typeface="+mj-ea"/>
-          <a:cs typeface="+mj-cs"/>
+          <a:latin typeface="+mn-lt"/>
+          <a:ea typeface="+mn-ea"/>
+          <a:cs typeface="+mn-cs"/>
           <a:sym typeface="Helvetica Neue"/>
         </a:defRPr>
       </a:lvl8pPr>
@@ -3850,9 +3851,9 @@
             <a:srgbClr val="000000"/>
           </a:solidFill>
           <a:uFillTx/>
-          <a:latin typeface="+mj-lt"/>
-          <a:ea typeface="+mj-ea"/>
-          <a:cs typeface="+mj-cs"/>
+          <a:latin typeface="+mn-lt"/>
+          <a:ea typeface="+mn-ea"/>
+          <a:cs typeface="+mn-cs"/>
           <a:sym typeface="Helvetica Neue"/>
         </a:defRPr>
       </a:lvl9pPr>
@@ -3878,9 +3879,9 @@
             <a:srgbClr val="000000"/>
           </a:solidFill>
           <a:uFillTx/>
-          <a:latin typeface="+mj-lt"/>
-          <a:ea typeface="+mj-ea"/>
-          <a:cs typeface="+mj-cs"/>
+          <a:latin typeface="+mn-lt"/>
+          <a:ea typeface="+mn-ea"/>
+          <a:cs typeface="+mn-cs"/>
           <a:sym typeface="Helvetica Neue"/>
         </a:defRPr>
       </a:lvl1pPr>
@@ -3904,9 +3905,9 @@
             <a:srgbClr val="000000"/>
           </a:solidFill>
           <a:uFillTx/>
-          <a:latin typeface="+mj-lt"/>
-          <a:ea typeface="+mj-ea"/>
-          <a:cs typeface="+mj-cs"/>
+          <a:latin typeface="+mn-lt"/>
+          <a:ea typeface="+mn-ea"/>
+          <a:cs typeface="+mn-cs"/>
           <a:sym typeface="Helvetica Neue"/>
         </a:defRPr>
       </a:lvl2pPr>
@@ -3930,9 +3931,9 @@
             <a:srgbClr val="000000"/>
           </a:solidFill>
           <a:uFillTx/>
-          <a:latin typeface="+mj-lt"/>
-          <a:ea typeface="+mj-ea"/>
-          <a:cs typeface="+mj-cs"/>
+          <a:latin typeface="+mn-lt"/>
+          <a:ea typeface="+mn-ea"/>
+          <a:cs typeface="+mn-cs"/>
           <a:sym typeface="Helvetica Neue"/>
         </a:defRPr>
       </a:lvl3pPr>
@@ -3956,9 +3957,9 @@
             <a:srgbClr val="000000"/>
           </a:solidFill>
           <a:uFillTx/>
-          <a:latin typeface="+mj-lt"/>
-          <a:ea typeface="+mj-ea"/>
-          <a:cs typeface="+mj-cs"/>
+          <a:latin typeface="+mn-lt"/>
+          <a:ea typeface="+mn-ea"/>
+          <a:cs typeface="+mn-cs"/>
           <a:sym typeface="Helvetica Neue"/>
         </a:defRPr>
       </a:lvl4pPr>
@@ -3982,9 +3983,9 @@
             <a:srgbClr val="000000"/>
           </a:solidFill>
           <a:uFillTx/>
-          <a:latin typeface="+mj-lt"/>
-          <a:ea typeface="+mj-ea"/>
-          <a:cs typeface="+mj-cs"/>
+          <a:latin typeface="+mn-lt"/>
+          <a:ea typeface="+mn-ea"/>
+          <a:cs typeface="+mn-cs"/>
           <a:sym typeface="Helvetica Neue"/>
         </a:defRPr>
       </a:lvl5pPr>
@@ -4008,9 +4009,9 @@
             <a:srgbClr val="000000"/>
           </a:solidFill>
           <a:uFillTx/>
-          <a:latin typeface="+mj-lt"/>
-          <a:ea typeface="+mj-ea"/>
-          <a:cs typeface="+mj-cs"/>
+          <a:latin typeface="+mn-lt"/>
+          <a:ea typeface="+mn-ea"/>
+          <a:cs typeface="+mn-cs"/>
           <a:sym typeface="Helvetica Neue"/>
         </a:defRPr>
       </a:lvl6pPr>
@@ -4034,9 +4035,9 @@
             <a:srgbClr val="000000"/>
           </a:solidFill>
           <a:uFillTx/>
-          <a:latin typeface="+mj-lt"/>
-          <a:ea typeface="+mj-ea"/>
-          <a:cs typeface="+mj-cs"/>
+          <a:latin typeface="+mn-lt"/>
+          <a:ea typeface="+mn-ea"/>
+          <a:cs typeface="+mn-cs"/>
           <a:sym typeface="Helvetica Neue"/>
         </a:defRPr>
       </a:lvl7pPr>
@@ -4060,9 +4061,9 @@
             <a:srgbClr val="000000"/>
           </a:solidFill>
           <a:uFillTx/>
-          <a:latin typeface="+mj-lt"/>
-          <a:ea typeface="+mj-ea"/>
-          <a:cs typeface="+mj-cs"/>
+          <a:latin typeface="+mn-lt"/>
+          <a:ea typeface="+mn-ea"/>
+          <a:cs typeface="+mn-cs"/>
           <a:sym typeface="Helvetica Neue"/>
         </a:defRPr>
       </a:lvl8pPr>
@@ -4086,9 +4087,9 @@
             <a:srgbClr val="000000"/>
           </a:solidFill>
           <a:uFillTx/>
-          <a:latin typeface="+mj-lt"/>
-          <a:ea typeface="+mj-ea"/>
-          <a:cs typeface="+mj-cs"/>
+          <a:latin typeface="+mn-lt"/>
+          <a:ea typeface="+mn-ea"/>
+          <a:cs typeface="+mn-cs"/>
           <a:sym typeface="Helvetica Neue"/>
         </a:defRPr>
       </a:lvl9pPr>
@@ -4410,7 +4411,7 @@
         <p:spPr>
           <a:xfrm>
             <a:off x="5795009" y="7072630"/>
-            <a:ext cx="13647422" cy="1473203"/>
+            <a:ext cx="13647422" cy="1473204"/>
           </a:xfrm>
           <a:prstGeom prst="rect">
             <a:avLst/>
@@ -4439,7 +4440,7 @@
         <p:spPr>
           <a:xfrm rot="10800000">
             <a:off x="1075688" y="11797030"/>
-            <a:ext cx="3407413" cy="754383"/>
+            <a:ext cx="3407413" cy="754384"/>
           </a:xfrm>
           <a:prstGeom prst="rect">
             <a:avLst/>
@@ -4458,7 +4459,7 @@
         <p:spPr>
           <a:xfrm>
             <a:off x="10999778" y="4634865"/>
-            <a:ext cx="3237887" cy="2578101"/>
+            <a:ext cx="3237888" cy="2578101"/>
           </a:xfrm>
           <a:prstGeom prst="rect">
             <a:avLst/>
@@ -4566,7 +4567,7 @@
         <p:spPr>
           <a:xfrm>
             <a:off x="18637093" y="12665132"/>
-            <a:ext cx="4127503" cy="3"/>
+            <a:ext cx="4127504" cy="4"/>
           </a:xfrm>
           <a:prstGeom prst="line">
             <a:avLst/>
@@ -4607,7 +4608,7 @@
         <p:spPr>
           <a:xfrm flipH="1" rot="10800000">
             <a:off x="1703070" y="1261110"/>
-            <a:ext cx="1524003" cy="152403"/>
+            <a:ext cx="1524004" cy="152404"/>
           </a:xfrm>
           <a:prstGeom prst="rect">
             <a:avLst/>
@@ -4637,7 +4638,7 @@
         <p:spPr>
           <a:xfrm flipH="1" rot="10800000">
             <a:off x="1703070" y="1522730"/>
-            <a:ext cx="1524003" cy="152403"/>
+            <a:ext cx="1524004" cy="152404"/>
           </a:xfrm>
           <a:prstGeom prst="rect">
             <a:avLst/>
@@ -4747,7 +4748,7 @@
         <p:spPr>
           <a:xfrm flipH="1">
             <a:off x="12209781" y="5028277"/>
-            <a:ext cx="3" cy="5156203"/>
+            <a:ext cx="4" cy="5156204"/>
           </a:xfrm>
           <a:prstGeom prst="line">
             <a:avLst/>
@@ -4777,7 +4778,7 @@
         <p:spPr>
           <a:xfrm>
             <a:off x="18699480" y="12743180"/>
-            <a:ext cx="4127503" cy="3"/>
+            <a:ext cx="4127504" cy="4"/>
           </a:xfrm>
           <a:prstGeom prst="line">
             <a:avLst/>
@@ -4818,7 +4819,7 @@
         <p:spPr>
           <a:xfrm flipH="1" rot="10800000">
             <a:off x="1765300" y="1338580"/>
-            <a:ext cx="1524000" cy="152403"/>
+            <a:ext cx="1524000" cy="152404"/>
           </a:xfrm>
           <a:prstGeom prst="rect">
             <a:avLst/>
@@ -4867,7 +4868,7 @@
         <p:spPr>
           <a:xfrm>
             <a:off x="5463540" y="4737100"/>
-            <a:ext cx="1756413" cy="1219200"/>
+            <a:ext cx="1756414" cy="1219200"/>
           </a:xfrm>
           <a:prstGeom prst="rect">
             <a:avLst/>
@@ -4920,7 +4921,7 @@
         </p:nvSpPr>
         <p:spPr>
           <a:xfrm>
-            <a:off x="1343660" y="6301102"/>
+            <a:off x="1343660" y="6301101"/>
             <a:ext cx="9996173" cy="711201"/>
           </a:xfrm>
           <a:prstGeom prst="rect">
@@ -5029,7 +5030,7 @@
         <p:spPr>
           <a:xfrm>
             <a:off x="17199610" y="4737100"/>
-            <a:ext cx="1756413" cy="1219200"/>
+            <a:ext cx="1756414" cy="1219200"/>
           </a:xfrm>
           <a:prstGeom prst="rect">
             <a:avLst/>
@@ -5082,8 +5083,8 @@
         </p:nvSpPr>
         <p:spPr>
           <a:xfrm>
-            <a:off x="13079730" y="6301102"/>
-            <a:ext cx="9996173" cy="711201"/>
+            <a:off x="13079730" y="6301101"/>
+            <a:ext cx="9996174" cy="711201"/>
           </a:xfrm>
           <a:prstGeom prst="rect">
             <a:avLst/>
@@ -5137,7 +5138,7 @@
         <p:spPr>
           <a:xfrm>
             <a:off x="13994764" y="7357109"/>
-            <a:ext cx="8166103" cy="2794001"/>
+            <a:ext cx="8166104" cy="2794001"/>
           </a:xfrm>
           <a:prstGeom prst="rect">
             <a:avLst/>
@@ -5193,7 +5194,7 @@
         <p:spPr>
           <a:xfrm>
             <a:off x="23164832" y="12861656"/>
-            <a:ext cx="449850" cy="728977"/>
+            <a:ext cx="449848" cy="728975"/>
           </a:xfrm>
           <a:prstGeom prst="rect">
             <a:avLst/>
@@ -5205,7 +5206,7 @@
           </a:extLst>
         </p:spPr>
         <p:txBody>
-          <a:bodyPr lIns="91437" tIns="91437" rIns="91437" bIns="91437" anchor="t"/>
+          <a:bodyPr lIns="91436" tIns="91436" rIns="91436" bIns="91436" anchor="t"/>
           <a:lstStyle>
             <a:lvl1pPr algn="l" defTabSz="1828800">
               <a:defRPr sz="3600">
@@ -5344,7 +5345,7 @@
         <p:spPr>
           <a:xfrm flipH="1" rot="10800000">
             <a:off x="1765300" y="1338580"/>
-            <a:ext cx="1524000" cy="152403"/>
+            <a:ext cx="1524000" cy="152404"/>
           </a:xfrm>
           <a:prstGeom prst="rect">
             <a:avLst/>
@@ -5395,7 +5396,7 @@
         <p:spPr>
           <a:xfrm>
             <a:off x="23164832" y="12861656"/>
-            <a:ext cx="449850" cy="728977"/>
+            <a:ext cx="449848" cy="728975"/>
           </a:xfrm>
           <a:prstGeom prst="rect">
             <a:avLst/>
@@ -5407,7 +5408,7 @@
           </a:extLst>
         </p:spPr>
         <p:txBody>
-          <a:bodyPr lIns="91437" tIns="91437" rIns="91437" bIns="91437" anchor="t"/>
+          <a:bodyPr lIns="91436" tIns="91436" rIns="91436" bIns="91436" anchor="t"/>
           <a:lstStyle>
             <a:lvl1pPr algn="l" defTabSz="1828800">
               <a:defRPr sz="3600">
@@ -5433,7 +5434,7 @@
         <p:spPr>
           <a:xfrm>
             <a:off x="1219168" y="3712929"/>
-            <a:ext cx="10782032" cy="1885953"/>
+            <a:ext cx="10782032" cy="1885954"/>
           </a:xfrm>
           <a:prstGeom prst="roundRect">
             <a:avLst>
@@ -5482,10 +5483,10 @@
         </p:nvGrpSpPr>
         <p:grpSpPr>
           <a:xfrm>
-            <a:off x="1543008" y="4132857"/>
-            <a:ext cx="533392" cy="417446"/>
-            <a:chOff x="0" y="0"/>
-            <a:chExt cx="533390" cy="417445"/>
+            <a:off x="1543007" y="4132856"/>
+            <a:ext cx="533394" cy="417449"/>
+            <a:chOff x="-1" y="0"/>
+            <a:chExt cx="533393" cy="417447"/>
           </a:xfrm>
         </p:grpSpPr>
         <p:sp>
@@ -5496,8 +5497,8 @@
           </p:nvSpPr>
           <p:spPr>
             <a:xfrm>
-              <a:off x="-1" y="-1"/>
-              <a:ext cx="533391" cy="417446"/>
+              <a:off x="-2" y="-1"/>
+              <a:ext cx="533395" cy="417447"/>
             </a:xfrm>
             <a:prstGeom prst="rect">
               <a:avLst/>
@@ -5552,8 +5553,8 @@
           </p:blipFill>
           <p:spPr>
             <a:xfrm>
-              <a:off x="-1" y="-1"/>
-              <a:ext cx="533391" cy="417447"/>
+              <a:off x="-2" y="-1"/>
+              <a:ext cx="533395" cy="417448"/>
             </a:xfrm>
             <a:prstGeom prst="rect">
               <a:avLst/>
@@ -5574,8 +5575,8 @@
         </p:nvSpPr>
         <p:spPr>
           <a:xfrm>
-            <a:off x="2367728" y="3706579"/>
-            <a:ext cx="2320911" cy="1248665"/>
+            <a:off x="2367727" y="3700102"/>
+            <a:ext cx="2712552" cy="1261619"/>
           </a:xfrm>
           <a:prstGeom prst="rect">
             <a:avLst/>
@@ -5624,7 +5625,7 @@
               <a:spcBef>
                 <a:spcPts val="0"/>
               </a:spcBef>
-              <a:defRPr sz="1600">
+              <a:defRPr sz="1900">
                 <a:solidFill>
                   <a:srgbClr val="0439E1"/>
                 </a:solidFill>
@@ -5672,8 +5673,8 @@
         </p:nvSpPr>
         <p:spPr>
           <a:xfrm>
-            <a:off x="5557120" y="3749998"/>
-            <a:ext cx="1387857" cy="1727710"/>
+            <a:off x="5557120" y="3739203"/>
+            <a:ext cx="1540257" cy="1749299"/>
           </a:xfrm>
           <a:prstGeom prst="rect">
             <a:avLst/>
@@ -5693,6 +5694,28 @@
           </a:bodyPr>
           <a:lstStyle/>
           <a:p>
+            <a:pPr marL="342899" indent="-342899" defTabSz="1828800">
+              <a:lnSpc>
+                <a:spcPts val="3000"/>
+              </a:lnSpc>
+              <a:spcBef>
+                <a:spcPts val="0"/>
+              </a:spcBef>
+              <a:buSzPct val="100000"/>
+              <a:buFont typeface="Arial"/>
+              <a:buChar char="•"/>
+              <a:defRPr b="1" sz="1900">
+                <a:latin typeface="微软雅黑"/>
+                <a:ea typeface="微软雅黑"/>
+                <a:cs typeface="微软雅黑"/>
+                <a:sym typeface="微软雅黑"/>
+              </a:defRPr>
+            </a:pPr>
+            <a:r>
+              <a:t>核心指标</a:t>
+            </a:r>
+          </a:p>
+          <a:p>
             <a:pPr marL="342900" indent="-342900" defTabSz="1828800">
               <a:lnSpc>
                 <a:spcPts val="3000"/>
@@ -5703,7 +5726,7 @@
               <a:buSzPct val="100000"/>
               <a:buFont typeface="Arial"/>
               <a:buChar char="•"/>
-              <a:defRPr b="1" sz="1600">
+              <a:defRPr sz="1900">
                 <a:latin typeface="微软雅黑"/>
                 <a:ea typeface="微软雅黑"/>
                 <a:cs typeface="微软雅黑"/>
@@ -5711,9 +5734,8 @@
               </a:defRPr>
             </a:pPr>
             <a:r>
-              <a:t>核心指标</a:t>
-            </a:r>
-            <a:endParaRPr sz="2400"/>
+              <a:t>活跃车辆</a:t>
+            </a:r>
           </a:p>
           <a:p>
             <a:pPr marL="342900" indent="-342900" defTabSz="1828800">
@@ -5726,7 +5748,7 @@
               <a:buSzPct val="100000"/>
               <a:buFont typeface="Arial"/>
               <a:buChar char="•"/>
-              <a:defRPr sz="1400">
+              <a:defRPr sz="1900">
                 <a:latin typeface="微软雅黑"/>
                 <a:ea typeface="微软雅黑"/>
                 <a:cs typeface="微软雅黑"/>
@@ -5734,9 +5756,8 @@
               </a:defRPr>
             </a:pPr>
             <a:r>
-              <a:t>活跃车辆</a:t>
-            </a:r>
-            <a:endParaRPr sz="2400"/>
+              <a:t>采样轨迹</a:t>
+            </a:r>
           </a:p>
           <a:p>
             <a:pPr marL="342900" indent="-342900" defTabSz="1828800">
@@ -5749,30 +5770,7 @@
               <a:buSzPct val="100000"/>
               <a:buFont typeface="Arial"/>
               <a:buChar char="•"/>
-              <a:defRPr sz="1400">
-                <a:latin typeface="微软雅黑"/>
-                <a:ea typeface="微软雅黑"/>
-                <a:cs typeface="微软雅黑"/>
-                <a:sym typeface="微软雅黑"/>
-              </a:defRPr>
-            </a:pPr>
-            <a:r>
-              <a:t>采样轨迹</a:t>
-            </a:r>
-            <a:endParaRPr sz="2400"/>
-          </a:p>
-          <a:p>
-            <a:pPr marL="342900" indent="-342900" defTabSz="1828800">
-              <a:lnSpc>
-                <a:spcPts val="3000"/>
-              </a:lnSpc>
-              <a:spcBef>
-                <a:spcPts val="0"/>
-              </a:spcBef>
-              <a:buSzPct val="100000"/>
-              <a:buFont typeface="Arial"/>
-              <a:buChar char="•"/>
-              <a:defRPr sz="1400">
+              <a:defRPr sz="1900">
                 <a:latin typeface="微软雅黑"/>
                 <a:ea typeface="微软雅黑"/>
                 <a:cs typeface="微软雅黑"/>
@@ -5793,8 +5791,8 @@
         </p:nvSpPr>
         <p:spPr>
           <a:xfrm>
-            <a:off x="8602350" y="3741858"/>
-            <a:ext cx="1387857" cy="1727709"/>
+            <a:off x="8602350" y="3731063"/>
+            <a:ext cx="1540257" cy="1749299"/>
           </a:xfrm>
           <a:prstGeom prst="rect">
             <a:avLst/>
@@ -5814,6 +5812,28 @@
           </a:bodyPr>
           <a:lstStyle/>
           <a:p>
+            <a:pPr marL="342899" indent="-342899" defTabSz="1828800">
+              <a:lnSpc>
+                <a:spcPts val="3000"/>
+              </a:lnSpc>
+              <a:spcBef>
+                <a:spcPts val="0"/>
+              </a:spcBef>
+              <a:buSzPct val="100000"/>
+              <a:buFont typeface="Arial"/>
+              <a:buChar char="•"/>
+              <a:defRPr b="1" sz="1900">
+                <a:latin typeface="微软雅黑"/>
+                <a:ea typeface="微软雅黑"/>
+                <a:cs typeface="微软雅黑"/>
+                <a:sym typeface="微软雅黑"/>
+              </a:defRPr>
+            </a:pPr>
+            <a:r>
+              <a:t>小时趋势</a:t>
+            </a:r>
+          </a:p>
+          <a:p>
             <a:pPr marL="342900" indent="-342900" defTabSz="1828800">
               <a:lnSpc>
                 <a:spcPts val="3000"/>
@@ -5824,7 +5844,7 @@
               <a:buSzPct val="100000"/>
               <a:buFont typeface="Arial"/>
               <a:buChar char="•"/>
-              <a:defRPr b="1" sz="1600">
+              <a:defRPr sz="1900">
                 <a:latin typeface="微软雅黑"/>
                 <a:ea typeface="微软雅黑"/>
                 <a:cs typeface="微软雅黑"/>
@@ -5832,9 +5852,8 @@
               </a:defRPr>
             </a:pPr>
             <a:r>
-              <a:t>小时趋势</a:t>
-            </a:r>
-            <a:endParaRPr sz="2400"/>
+              <a:t>平均速度</a:t>
+            </a:r>
           </a:p>
           <a:p>
             <a:pPr marL="342900" indent="-342900" defTabSz="1828800">
@@ -5847,7 +5866,7 @@
               <a:buSzPct val="100000"/>
               <a:buFont typeface="Arial"/>
               <a:buChar char="•"/>
-              <a:defRPr sz="1400">
+              <a:defRPr sz="1900">
                 <a:latin typeface="微软雅黑"/>
                 <a:ea typeface="微软雅黑"/>
                 <a:cs typeface="微软雅黑"/>
@@ -5855,9 +5874,8 @@
               </a:defRPr>
             </a:pPr>
             <a:r>
-              <a:t>平均速度</a:t>
-            </a:r>
-            <a:endParaRPr sz="2400"/>
+              <a:t>拥堵度</a:t>
+            </a:r>
           </a:p>
           <a:p>
             <a:pPr marL="342900" indent="-342900" defTabSz="1828800">
@@ -5870,30 +5888,7 @@
               <a:buSzPct val="100000"/>
               <a:buFont typeface="Arial"/>
               <a:buChar char="•"/>
-              <a:defRPr sz="1400">
-                <a:latin typeface="微软雅黑"/>
-                <a:ea typeface="微软雅黑"/>
-                <a:cs typeface="微软雅黑"/>
-                <a:sym typeface="微软雅黑"/>
-              </a:defRPr>
-            </a:pPr>
-            <a:r>
-              <a:t>拥堵度</a:t>
-            </a:r>
-            <a:endParaRPr sz="2400"/>
-          </a:p>
-          <a:p>
-            <a:pPr marL="342900" indent="-342900" defTabSz="1828800">
-              <a:lnSpc>
-                <a:spcPts val="3000"/>
-              </a:lnSpc>
-              <a:spcBef>
-                <a:spcPts val="0"/>
-              </a:spcBef>
-              <a:buSzPct val="100000"/>
-              <a:buFont typeface="Arial"/>
-              <a:buChar char="•"/>
-              <a:defRPr sz="1400">
+              <a:defRPr sz="1900">
                 <a:latin typeface="Microsoft YaHei"/>
                 <a:ea typeface="Microsoft YaHei"/>
                 <a:cs typeface="Microsoft YaHei"/>
@@ -5924,7 +5919,7 @@
         <p:spPr>
           <a:xfrm>
             <a:off x="1181683" y="5990242"/>
-            <a:ext cx="10819515" cy="1885953"/>
+            <a:ext cx="10819515" cy="1885954"/>
           </a:xfrm>
           <a:prstGeom prst="roundRect">
             <a:avLst>
@@ -5973,10 +5968,10 @@
         </p:nvGrpSpPr>
         <p:grpSpPr>
           <a:xfrm>
-            <a:off x="1543008" y="6429218"/>
-            <a:ext cx="533392" cy="417447"/>
-            <a:chOff x="0" y="0"/>
-            <a:chExt cx="533390" cy="417446"/>
+            <a:off x="1543007" y="6429217"/>
+            <a:ext cx="533394" cy="417450"/>
+            <a:chOff x="-1" y="0"/>
+            <a:chExt cx="533393" cy="417448"/>
           </a:xfrm>
         </p:grpSpPr>
         <p:sp>
@@ -5987,8 +5982,8 @@
           </p:nvSpPr>
           <p:spPr>
             <a:xfrm>
-              <a:off x="-1" y="-1"/>
-              <a:ext cx="533391" cy="417447"/>
+              <a:off x="-2" y="-1"/>
+              <a:ext cx="533395" cy="417448"/>
             </a:xfrm>
             <a:prstGeom prst="rect">
               <a:avLst/>
@@ -6043,8 +6038,8 @@
           </p:blipFill>
           <p:spPr>
             <a:xfrm>
-              <a:off x="-1" y="-1"/>
-              <a:ext cx="533391" cy="417448"/>
+              <a:off x="-2" y="-1"/>
+              <a:ext cx="533395" cy="417449"/>
             </a:xfrm>
             <a:prstGeom prst="rect">
               <a:avLst/>
@@ -6065,8 +6060,8 @@
         </p:nvSpPr>
         <p:spPr>
           <a:xfrm>
-            <a:off x="2299280" y="5848353"/>
-            <a:ext cx="1603757" cy="723901"/>
+            <a:off x="2299279" y="5846194"/>
+            <a:ext cx="1679957" cy="728219"/>
           </a:xfrm>
           <a:prstGeom prst="rect">
             <a:avLst/>
@@ -6092,7 +6087,7 @@
               <a:spcBef>
                 <a:spcPts val="0"/>
               </a:spcBef>
-              <a:defRPr b="1" sz="1800">
+              <a:defRPr b="1" sz="1900">
                 <a:solidFill>
                   <a:srgbClr val="0439E1"/>
                 </a:solidFill>
@@ -6119,8 +6114,8 @@
         </p:nvSpPr>
         <p:spPr>
           <a:xfrm>
-            <a:off x="2369131" y="6452708"/>
-            <a:ext cx="1464057" cy="1346709"/>
+            <a:off x="2369131" y="6441913"/>
+            <a:ext cx="1781557" cy="1368299"/>
           </a:xfrm>
           <a:prstGeom prst="rect">
             <a:avLst/>
@@ -6140,6 +6135,37 @@
           </a:bodyPr>
           <a:lstStyle/>
           <a:p>
+            <a:pPr marL="342899" indent="-342899" defTabSz="1828800">
+              <a:lnSpc>
+                <a:spcPts val="3000"/>
+              </a:lnSpc>
+              <a:spcBef>
+                <a:spcPts val="0"/>
+              </a:spcBef>
+              <a:buSzPct val="100000"/>
+              <a:buFont typeface="Arial"/>
+              <a:buChar char="•"/>
+              <a:defRPr b="1" sz="1900">
+                <a:latin typeface="微软雅黑"/>
+                <a:ea typeface="微软雅黑"/>
+                <a:cs typeface="微软雅黑"/>
+                <a:sym typeface="微软雅黑"/>
+              </a:defRPr>
+            </a:pPr>
+            <a:r>
+              <a:t>热点</a:t>
+            </a:r>
+            <a:r>
+              <a:rPr>
+                <a:latin typeface="Microsoft YaHei"/>
+                <a:ea typeface="Microsoft YaHei"/>
+                <a:cs typeface="Microsoft YaHei"/>
+                <a:sym typeface="Microsoft YaHei"/>
+              </a:rPr>
+              <a:t>Top5</a:t>
+            </a:r>
+          </a:p>
+          <a:p>
             <a:pPr marL="342900" indent="-342900" defTabSz="1828800">
               <a:lnSpc>
                 <a:spcPts val="3000"/>
@@ -6150,7 +6176,7 @@
               <a:buSzPct val="100000"/>
               <a:buFont typeface="Arial"/>
               <a:buChar char="•"/>
-              <a:defRPr b="1" sz="1600">
+              <a:defRPr sz="1900">
                 <a:latin typeface="微软雅黑"/>
                 <a:ea typeface="微软雅黑"/>
                 <a:cs typeface="微软雅黑"/>
@@ -6158,18 +6184,8 @@
               </a:defRPr>
             </a:pPr>
             <a:r>
-              <a:t>热点</a:t>
-            </a:r>
-            <a:r>
-              <a:rPr>
-                <a:latin typeface="Microsoft YaHei"/>
-                <a:ea typeface="Microsoft YaHei"/>
-                <a:cs typeface="Microsoft YaHei"/>
-                <a:sym typeface="Microsoft YaHei"/>
-              </a:rPr>
-              <a:t>Top5</a:t>
-            </a:r>
-            <a:endParaRPr sz="2400"/>
+              <a:t>通过次数</a:t>
+            </a:r>
           </a:p>
           <a:p>
             <a:pPr marL="342900" indent="-342900" defTabSz="1828800">
@@ -6182,30 +6198,7 @@
               <a:buSzPct val="100000"/>
               <a:buFont typeface="Arial"/>
               <a:buChar char="•"/>
-              <a:defRPr sz="1400">
-                <a:latin typeface="微软雅黑"/>
-                <a:ea typeface="微软雅黑"/>
-                <a:cs typeface="微软雅黑"/>
-                <a:sym typeface="微软雅黑"/>
-              </a:defRPr>
-            </a:pPr>
-            <a:r>
-              <a:t>通过次数</a:t>
-            </a:r>
-            <a:endParaRPr sz="2400"/>
-          </a:p>
-          <a:p>
-            <a:pPr marL="342900" indent="-342900" defTabSz="1828800">
-              <a:lnSpc>
-                <a:spcPts val="3000"/>
-              </a:lnSpc>
-              <a:spcBef>
-                <a:spcPts val="0"/>
-              </a:spcBef>
-              <a:buSzPct val="100000"/>
-              <a:buFont typeface="Arial"/>
-              <a:buChar char="•"/>
-              <a:defRPr sz="1400">
+              <a:defRPr sz="1900">
                 <a:latin typeface="微软雅黑"/>
                 <a:ea typeface="微软雅黑"/>
                 <a:cs typeface="微软雅黑"/>
@@ -6226,8 +6219,8 @@
         </p:nvSpPr>
         <p:spPr>
           <a:xfrm>
-            <a:off x="5548624" y="6452708"/>
-            <a:ext cx="1404849" cy="1346709"/>
+            <a:off x="5548624" y="6441913"/>
+            <a:ext cx="1701202" cy="1368299"/>
           </a:xfrm>
           <a:prstGeom prst="rect">
             <a:avLst/>
@@ -6247,6 +6240,28 @@
           </a:bodyPr>
           <a:lstStyle/>
           <a:p>
+            <a:pPr marL="342899" indent="-342899" defTabSz="1828800">
+              <a:lnSpc>
+                <a:spcPts val="3000"/>
+              </a:lnSpc>
+              <a:spcBef>
+                <a:spcPts val="0"/>
+              </a:spcBef>
+              <a:buSzPct val="100000"/>
+              <a:buFont typeface="Arial"/>
+              <a:buChar char="•"/>
+              <a:defRPr b="1" sz="1900">
+                <a:latin typeface="微软雅黑"/>
+                <a:ea typeface="微软雅黑"/>
+                <a:cs typeface="微软雅黑"/>
+                <a:sym typeface="微软雅黑"/>
+              </a:defRPr>
+            </a:pPr>
+            <a:r>
+              <a:t>拥堵路段</a:t>
+            </a:r>
+          </a:p>
+          <a:p>
             <a:pPr marL="342900" indent="-342900" defTabSz="1828800">
               <a:lnSpc>
                 <a:spcPts val="3000"/>
@@ -6257,7 +6272,7 @@
               <a:buSzPct val="100000"/>
               <a:buFont typeface="Arial"/>
               <a:buChar char="•"/>
-              <a:defRPr b="1" sz="1600">
+              <a:defRPr sz="1900">
                 <a:latin typeface="微软雅黑"/>
                 <a:ea typeface="微软雅黑"/>
                 <a:cs typeface="微软雅黑"/>
@@ -6265,9 +6280,32 @@
               </a:defRPr>
             </a:pPr>
             <a:r>
-              <a:t>拥堵路段</a:t>
-            </a:r>
-            <a:endParaRPr sz="2400"/>
+              <a:t>高 </a:t>
+            </a:r>
+            <a:r>
+              <a:rPr>
+                <a:latin typeface="Microsoft YaHei"/>
+                <a:ea typeface="Microsoft YaHei"/>
+                <a:cs typeface="Microsoft YaHei"/>
+                <a:sym typeface="Microsoft YaHei"/>
+              </a:rPr>
+              <a:t>/ </a:t>
+            </a:r>
+            <a:r>
+              <a:t>中 </a:t>
+            </a:r>
+            <a:r>
+              <a:rPr>
+                <a:latin typeface="Microsoft YaHei"/>
+                <a:ea typeface="Microsoft YaHei"/>
+                <a:cs typeface="Microsoft YaHei"/>
+                <a:sym typeface="Microsoft YaHei"/>
+              </a:rPr>
+              <a:t>/ </a:t>
+            </a:r>
+            <a:r>
+              <a:t>低</a:t>
+            </a:r>
           </a:p>
           <a:p>
             <a:pPr marL="342900" indent="-342900" defTabSz="1828800">
@@ -6280,54 +6318,7 @@
               <a:buSzPct val="100000"/>
               <a:buFont typeface="Arial"/>
               <a:buChar char="•"/>
-              <a:defRPr sz="1400">
-                <a:latin typeface="微软雅黑"/>
-                <a:ea typeface="微软雅黑"/>
-                <a:cs typeface="微软雅黑"/>
-                <a:sym typeface="微软雅黑"/>
-              </a:defRPr>
-            </a:pPr>
-            <a:r>
-              <a:t>高 </a:t>
-            </a:r>
-            <a:r>
-              <a:rPr>
-                <a:latin typeface="Microsoft YaHei"/>
-                <a:ea typeface="Microsoft YaHei"/>
-                <a:cs typeface="Microsoft YaHei"/>
-                <a:sym typeface="Microsoft YaHei"/>
-              </a:rPr>
-              <a:t>/ </a:t>
-            </a:r>
-            <a:r>
-              <a:t>中 </a:t>
-            </a:r>
-            <a:r>
-              <a:rPr>
-                <a:latin typeface="Microsoft YaHei"/>
-                <a:ea typeface="Microsoft YaHei"/>
-                <a:cs typeface="Microsoft YaHei"/>
-                <a:sym typeface="Microsoft YaHei"/>
-              </a:rPr>
-              <a:t>/ </a:t>
-            </a:r>
-            <a:r>
-              <a:t>低</a:t>
-            </a:r>
-            <a:endParaRPr sz="2400"/>
-          </a:p>
-          <a:p>
-            <a:pPr marL="342900" indent="-342900" defTabSz="1828800">
-              <a:lnSpc>
-                <a:spcPts val="3000"/>
-              </a:lnSpc>
-              <a:spcBef>
-                <a:spcPts val="0"/>
-              </a:spcBef>
-              <a:buSzPct val="100000"/>
-              <a:buFont typeface="Arial"/>
-              <a:buChar char="•"/>
-              <a:defRPr sz="1400">
+              <a:defRPr sz="1900">
                 <a:latin typeface="微软雅黑"/>
                 <a:ea typeface="微软雅黑"/>
                 <a:cs typeface="微软雅黑"/>
@@ -6348,8 +6339,8 @@
         </p:nvSpPr>
         <p:spPr>
           <a:xfrm>
-            <a:off x="8602350" y="6452708"/>
-            <a:ext cx="1387857" cy="1346709"/>
+            <a:off x="8602350" y="6441913"/>
+            <a:ext cx="1540257" cy="1368299"/>
           </a:xfrm>
           <a:prstGeom prst="rect">
             <a:avLst/>
@@ -6369,6 +6360,28 @@
           </a:bodyPr>
           <a:lstStyle/>
           <a:p>
+            <a:pPr marL="342899" indent="-342899" defTabSz="1828800">
+              <a:lnSpc>
+                <a:spcPts val="3000"/>
+              </a:lnSpc>
+              <a:spcBef>
+                <a:spcPts val="0"/>
+              </a:spcBef>
+              <a:buSzPct val="100000"/>
+              <a:buFont typeface="Arial"/>
+              <a:buChar char="•"/>
+              <a:defRPr b="1" sz="1900">
+                <a:latin typeface="微软雅黑"/>
+                <a:ea typeface="微软雅黑"/>
+                <a:cs typeface="微软雅黑"/>
+                <a:sym typeface="微软雅黑"/>
+              </a:defRPr>
+            </a:pPr>
+            <a:r>
+              <a:t>道路等级</a:t>
+            </a:r>
+          </a:p>
+          <a:p>
             <a:pPr marL="342900" indent="-342900" defTabSz="1828800">
               <a:lnSpc>
                 <a:spcPts val="3000"/>
@@ -6379,7 +6392,7 @@
               <a:buSzPct val="100000"/>
               <a:buFont typeface="Arial"/>
               <a:buChar char="•"/>
-              <a:defRPr b="1" sz="1600">
+              <a:defRPr sz="1900">
                 <a:latin typeface="微软雅黑"/>
                 <a:ea typeface="微软雅黑"/>
                 <a:cs typeface="微软雅黑"/>
@@ -6387,9 +6400,8 @@
               </a:defRPr>
             </a:pPr>
             <a:r>
-              <a:t>道路等级</a:t>
-            </a:r>
-            <a:endParaRPr sz="2400"/>
+              <a:t>路段数</a:t>
+            </a:r>
           </a:p>
           <a:p>
             <a:pPr marL="342900" indent="-342900" defTabSz="1828800">
@@ -6402,30 +6414,7 @@
               <a:buSzPct val="100000"/>
               <a:buFont typeface="Arial"/>
               <a:buChar char="•"/>
-              <a:defRPr sz="1400">
-                <a:latin typeface="微软雅黑"/>
-                <a:ea typeface="微软雅黑"/>
-                <a:cs typeface="微软雅黑"/>
-                <a:sym typeface="微软雅黑"/>
-              </a:defRPr>
-            </a:pPr>
-            <a:r>
-              <a:t>路段数</a:t>
-            </a:r>
-            <a:endParaRPr sz="2400"/>
-          </a:p>
-          <a:p>
-            <a:pPr marL="342900" indent="-342900" defTabSz="1828800">
-              <a:lnSpc>
-                <a:spcPts val="3000"/>
-              </a:lnSpc>
-              <a:spcBef>
-                <a:spcPts val="0"/>
-              </a:spcBef>
-              <a:buSzPct val="100000"/>
-              <a:buFont typeface="Arial"/>
-              <a:buChar char="•"/>
-              <a:defRPr sz="1400">
+              <a:defRPr sz="1900">
                 <a:latin typeface="微软雅黑"/>
                 <a:ea typeface="微软雅黑"/>
                 <a:cs typeface="微软雅黑"/>
@@ -6447,7 +6436,7 @@
         <p:spPr>
           <a:xfrm>
             <a:off x="1181683" y="8460378"/>
-            <a:ext cx="10782032" cy="1885953"/>
+            <a:ext cx="10782032" cy="1885954"/>
           </a:xfrm>
           <a:prstGeom prst="roundRect">
             <a:avLst>
@@ -6496,10 +6485,10 @@
         </p:nvGrpSpPr>
         <p:grpSpPr>
           <a:xfrm>
-            <a:off x="1505525" y="8839719"/>
-            <a:ext cx="533392" cy="498618"/>
-            <a:chOff x="0" y="0"/>
-            <a:chExt cx="533390" cy="498616"/>
+            <a:off x="1505523" y="8839718"/>
+            <a:ext cx="533394" cy="498621"/>
+            <a:chOff x="-1" y="-1"/>
+            <a:chExt cx="533393" cy="498620"/>
           </a:xfrm>
         </p:grpSpPr>
         <p:sp>
@@ -6510,8 +6499,8 @@
           </p:nvSpPr>
           <p:spPr>
             <a:xfrm>
-              <a:off x="-1" y="-1"/>
-              <a:ext cx="533391" cy="498618"/>
+              <a:off x="-2" y="-2"/>
+              <a:ext cx="533395" cy="498621"/>
             </a:xfrm>
             <a:prstGeom prst="rect">
               <a:avLst/>
@@ -6566,8 +6555,8 @@
           </p:blipFill>
           <p:spPr>
             <a:xfrm>
-              <a:off x="-1" y="-1"/>
-              <a:ext cx="533391" cy="498618"/>
+              <a:off x="-2" y="-2"/>
+              <a:ext cx="533395" cy="498622"/>
             </a:xfrm>
             <a:prstGeom prst="rect">
               <a:avLst/>
@@ -6588,8 +6577,8 @@
         </p:nvSpPr>
         <p:spPr>
           <a:xfrm>
-            <a:off x="2065045" y="8839720"/>
-            <a:ext cx="1805567" cy="1346709"/>
+            <a:off x="2449174" y="8960843"/>
+            <a:ext cx="2036289" cy="1368299"/>
           </a:xfrm>
           <a:prstGeom prst="rect">
             <a:avLst/>
@@ -6609,6 +6598,34 @@
           </a:bodyPr>
           <a:lstStyle/>
           <a:p>
+            <a:pPr marL="342899" indent="-342899" defTabSz="1828800">
+              <a:lnSpc>
+                <a:spcPts val="3000"/>
+              </a:lnSpc>
+              <a:spcBef>
+                <a:spcPts val="0"/>
+              </a:spcBef>
+              <a:buSzPct val="100000"/>
+              <a:buFont typeface="Arial"/>
+              <a:buChar char="•"/>
+              <a:defRPr b="1" sz="1900">
+                <a:latin typeface="Microsoft YaHei"/>
+                <a:ea typeface="Microsoft YaHei"/>
+                <a:cs typeface="Microsoft YaHei"/>
+                <a:sym typeface="Microsoft YaHei"/>
+              </a:defRPr>
+            </a:pPr>
+            <a:r>
+              <a:t>LINESTRING</a:t>
+            </a:r>
+            <a:endParaRPr>
+              <a:latin typeface="微软雅黑"/>
+              <a:ea typeface="微软雅黑"/>
+              <a:cs typeface="微软雅黑"/>
+              <a:sym typeface="微软雅黑"/>
+            </a:endParaRPr>
+          </a:p>
+          <a:p>
             <a:pPr marL="342900" indent="-342900" defTabSz="1828800">
               <a:lnSpc>
                 <a:spcPts val="3000"/>
@@ -6619,22 +6636,16 @@
               <a:buSzPct val="100000"/>
               <a:buFont typeface="Arial"/>
               <a:buChar char="•"/>
-              <a:defRPr b="1" sz="1600">
-                <a:latin typeface="Microsoft YaHei"/>
-                <a:ea typeface="Microsoft YaHei"/>
-                <a:cs typeface="Microsoft YaHei"/>
-                <a:sym typeface="Microsoft YaHei"/>
+              <a:defRPr sz="1900">
+                <a:latin typeface="微软雅黑"/>
+                <a:ea typeface="微软雅黑"/>
+                <a:cs typeface="微软雅黑"/>
+                <a:sym typeface="微软雅黑"/>
               </a:defRPr>
             </a:pPr>
             <a:r>
-              <a:t>LINESTRING</a:t>
-            </a:r>
-            <a:endParaRPr sz="2400">
-              <a:latin typeface="微软雅黑"/>
-              <a:ea typeface="微软雅黑"/>
-              <a:cs typeface="微软雅黑"/>
-              <a:sym typeface="微软雅黑"/>
-            </a:endParaRPr>
+              <a:t>里程计算</a:t>
+            </a:r>
           </a:p>
           <a:p>
             <a:pPr marL="342900" indent="-342900" defTabSz="1828800">
@@ -6647,30 +6658,7 @@
               <a:buSzPct val="100000"/>
               <a:buFont typeface="Arial"/>
               <a:buChar char="•"/>
-              <a:defRPr sz="1400">
-                <a:latin typeface="微软雅黑"/>
-                <a:ea typeface="微软雅黑"/>
-                <a:cs typeface="微软雅黑"/>
-                <a:sym typeface="微软雅黑"/>
-              </a:defRPr>
-            </a:pPr>
-            <a:r>
-              <a:t>里程计算</a:t>
-            </a:r>
-            <a:endParaRPr sz="2400"/>
-          </a:p>
-          <a:p>
-            <a:pPr marL="342900" indent="-342900" defTabSz="1828800">
-              <a:lnSpc>
-                <a:spcPts val="3000"/>
-              </a:lnSpc>
-              <a:spcBef>
-                <a:spcPts val="0"/>
-              </a:spcBef>
-              <a:buSzPct val="100000"/>
-              <a:buFont typeface="Arial"/>
-              <a:buChar char="•"/>
-              <a:defRPr sz="1400">
+              <a:defRPr sz="1900">
                 <a:latin typeface="微软雅黑"/>
                 <a:ea typeface="微软雅黑"/>
                 <a:cs typeface="微软雅黑"/>
@@ -6691,8 +6679,8 @@
         </p:nvSpPr>
         <p:spPr>
           <a:xfrm>
-            <a:off x="4895720" y="9196469"/>
-            <a:ext cx="1938248" cy="965709"/>
+            <a:off x="5327961" y="9271718"/>
+            <a:ext cx="2425103" cy="987299"/>
           </a:xfrm>
           <a:prstGeom prst="rect">
             <a:avLst/>
@@ -6715,6 +6703,28 @@
           </a:bodyPr>
           <a:lstStyle/>
           <a:p>
+            <a:pPr marL="342899" indent="-342899" defTabSz="1828800">
+              <a:lnSpc>
+                <a:spcPts val="3000"/>
+              </a:lnSpc>
+              <a:spcBef>
+                <a:spcPts val="0"/>
+              </a:spcBef>
+              <a:buSzPct val="100000"/>
+              <a:buFont typeface="Arial"/>
+              <a:buChar char="•"/>
+              <a:defRPr b="1" sz="1900">
+                <a:latin typeface="微软雅黑"/>
+                <a:ea typeface="微软雅黑"/>
+                <a:cs typeface="微软雅黑"/>
+                <a:sym typeface="微软雅黑"/>
+              </a:defRPr>
+            </a:pPr>
+            <a:r>
+              <a:t>速度等级</a:t>
+            </a:r>
+          </a:p>
+          <a:p>
             <a:pPr marL="342900" indent="-342900" defTabSz="1828800">
               <a:lnSpc>
                 <a:spcPts val="3000"/>
@@ -6725,30 +6735,7 @@
               <a:buSzPct val="100000"/>
               <a:buFont typeface="Arial"/>
               <a:buChar char="•"/>
-              <a:defRPr b="1" sz="1600">
-                <a:latin typeface="微软雅黑"/>
-                <a:ea typeface="微软雅黑"/>
-                <a:cs typeface="微软雅黑"/>
-                <a:sym typeface="微软雅黑"/>
-              </a:defRPr>
-            </a:pPr>
-            <a:r>
-              <a:t>速度等级</a:t>
-            </a:r>
-            <a:endParaRPr sz="2400"/>
-          </a:p>
-          <a:p>
-            <a:pPr marL="342900" indent="-342900" defTabSz="1828800">
-              <a:lnSpc>
-                <a:spcPts val="3000"/>
-              </a:lnSpc>
-              <a:spcBef>
-                <a:spcPts val="0"/>
-              </a:spcBef>
-              <a:buSzPct val="100000"/>
-              <a:buFont typeface="Arial"/>
-              <a:buChar char="•"/>
-              <a:defRPr sz="1400">
+              <a:defRPr sz="1900">
                 <a:latin typeface="微软雅黑"/>
                 <a:ea typeface="微软雅黑"/>
                 <a:cs typeface="微软雅黑"/>
@@ -6793,8 +6780,8 @@
         </p:nvSpPr>
         <p:spPr>
           <a:xfrm>
-            <a:off x="8595562" y="9321479"/>
-            <a:ext cx="1464057" cy="965709"/>
+            <a:off x="8602350" y="9316133"/>
+            <a:ext cx="1781557" cy="987299"/>
           </a:xfrm>
           <a:prstGeom prst="rect">
             <a:avLst/>
@@ -6817,6 +6804,28 @@
           </a:bodyPr>
           <a:lstStyle/>
           <a:p>
+            <a:pPr marL="342899" indent="-342899" defTabSz="1828800">
+              <a:lnSpc>
+                <a:spcPts val="3000"/>
+              </a:lnSpc>
+              <a:spcBef>
+                <a:spcPts val="0"/>
+              </a:spcBef>
+              <a:buSzPct val="100000"/>
+              <a:buFont typeface="Arial"/>
+              <a:buChar char="•"/>
+              <a:defRPr b="1" sz="1900">
+                <a:latin typeface="微软雅黑"/>
+                <a:ea typeface="微软雅黑"/>
+                <a:cs typeface="微软雅黑"/>
+                <a:sym typeface="微软雅黑"/>
+              </a:defRPr>
+            </a:pPr>
+            <a:r>
+              <a:t>单车明细</a:t>
+            </a:r>
+          </a:p>
+          <a:p>
             <a:pPr marL="342900" indent="-342900" defTabSz="1828800">
               <a:lnSpc>
                 <a:spcPts val="3000"/>
@@ -6827,30 +6836,7 @@
               <a:buSzPct val="100000"/>
               <a:buFont typeface="Arial"/>
               <a:buChar char="•"/>
-              <a:defRPr b="1" sz="1600">
-                <a:latin typeface="微软雅黑"/>
-                <a:ea typeface="微软雅黑"/>
-                <a:cs typeface="微软雅黑"/>
-                <a:sym typeface="微软雅黑"/>
-              </a:defRPr>
-            </a:pPr>
-            <a:r>
-              <a:t>单车明细</a:t>
-            </a:r>
-            <a:endParaRPr sz="2400"/>
-          </a:p>
-          <a:p>
-            <a:pPr marL="342900" indent="-342900" defTabSz="1828800">
-              <a:lnSpc>
-                <a:spcPts val="3000"/>
-              </a:lnSpc>
-              <a:spcBef>
-                <a:spcPts val="0"/>
-              </a:spcBef>
-              <a:buSzPct val="100000"/>
-              <a:buFont typeface="Arial"/>
-              <a:buChar char="•"/>
-              <a:defRPr sz="1400">
+              <a:defRPr sz="1900">
                 <a:latin typeface="微软雅黑"/>
                 <a:ea typeface="微软雅黑"/>
                 <a:cs typeface="微软雅黑"/>
@@ -6872,7 +6858,7 @@
         <p:spPr>
           <a:xfrm>
             <a:off x="1219168" y="10674356"/>
-            <a:ext cx="5276718" cy="2305052"/>
+            <a:ext cx="5276718" cy="2305053"/>
           </a:xfrm>
           <a:prstGeom prst="roundRect">
             <a:avLst>
@@ -6921,10 +6907,10 @@
         </p:nvGrpSpPr>
         <p:grpSpPr>
           <a:xfrm>
-            <a:off x="1543007" y="11088139"/>
-            <a:ext cx="495293" cy="391638"/>
+            <a:off x="1543005" y="11088137"/>
+            <a:ext cx="495296" cy="391641"/>
             <a:chOff x="-1" y="-1"/>
-            <a:chExt cx="495291" cy="391636"/>
+            <a:chExt cx="495295" cy="391639"/>
           </a:xfrm>
         </p:grpSpPr>
         <p:sp>
@@ -6936,7 +6922,7 @@
           <p:spPr>
             <a:xfrm>
               <a:off x="-2" y="-2"/>
-              <a:ext cx="495292" cy="391638"/>
+              <a:ext cx="495295" cy="391641"/>
             </a:xfrm>
             <a:prstGeom prst="rect">
               <a:avLst/>
@@ -6991,8 +6977,8 @@
           </p:blipFill>
           <p:spPr>
             <a:xfrm>
-              <a:off x="-2" y="0"/>
-              <a:ext cx="495293" cy="391636"/>
+              <a:off x="-1" y="1"/>
+              <a:ext cx="495296" cy="391638"/>
             </a:xfrm>
             <a:prstGeom prst="rect">
               <a:avLst/>
@@ -7013,8 +6999,8 @@
         </p:nvSpPr>
         <p:spPr>
           <a:xfrm>
-            <a:off x="2304993" y="10721529"/>
-            <a:ext cx="1349757" cy="700533"/>
+            <a:off x="2260306" y="10856211"/>
+            <a:ext cx="1197357" cy="687579"/>
           </a:xfrm>
           <a:prstGeom prst="rect">
             <a:avLst/>
@@ -7044,7 +7030,7 @@
               <a:spcBef>
                 <a:spcPts val="0"/>
               </a:spcBef>
-              <a:defRPr b="1" sz="2200">
+              <a:defRPr b="1" sz="1900">
                 <a:solidFill>
                   <a:srgbClr val="0439E1"/>
                 </a:solidFill>
@@ -7077,8 +7063,8 @@
         </p:nvSpPr>
         <p:spPr>
           <a:xfrm>
-            <a:off x="2262490" y="11479773"/>
-            <a:ext cx="1794257" cy="573025"/>
+            <a:off x="2262490" y="11479772"/>
+            <a:ext cx="1794257" cy="573026"/>
           </a:xfrm>
           <a:prstGeom prst="rect">
             <a:avLst/>
@@ -7134,8 +7120,8 @@
         </p:nvSpPr>
         <p:spPr>
           <a:xfrm>
-            <a:off x="2282373" y="11960043"/>
-            <a:ext cx="1794257" cy="573025"/>
+            <a:off x="2282373" y="11953566"/>
+            <a:ext cx="2022857" cy="585979"/>
           </a:xfrm>
           <a:prstGeom prst="rect">
             <a:avLst/>
@@ -7157,7 +7143,7 @@
             <a:spAutoFit/>
           </a:bodyPr>
           <a:lstStyle>
-            <a:lvl1pPr marL="342900" indent="-342900" defTabSz="1828800">
+            <a:lvl1pPr marL="342899" indent="-342899" defTabSz="1828800">
               <a:lnSpc>
                 <a:spcPts val="2800"/>
               </a:lnSpc>
@@ -7167,7 +7153,7 @@
               <a:buSzPct val="100000"/>
               <a:buFont typeface="Arial"/>
               <a:buChar char="•"/>
-              <a:defRPr b="1" sz="1600">
+              <a:defRPr b="1" sz="1900">
                 <a:latin typeface="微软雅黑"/>
                 <a:ea typeface="微软雅黑"/>
                 <a:cs typeface="微软雅黑"/>
@@ -7192,7 +7178,7 @@
         <p:spPr>
           <a:xfrm>
             <a:off x="6724480" y="10674356"/>
-            <a:ext cx="5276721" cy="2305052"/>
+            <a:ext cx="5276722" cy="2305053"/>
           </a:xfrm>
           <a:prstGeom prst="roundRect">
             <a:avLst>
@@ -7241,10 +7227,10 @@
         </p:nvGrpSpPr>
         <p:grpSpPr>
           <a:xfrm>
-            <a:off x="7048319" y="11108296"/>
-            <a:ext cx="495292" cy="351322"/>
-            <a:chOff x="-1" y="-1"/>
-            <a:chExt cx="495291" cy="351321"/>
+            <a:off x="7048317" y="11108295"/>
+            <a:ext cx="495295" cy="351325"/>
+            <a:chOff x="-1" y="0"/>
+            <a:chExt cx="495294" cy="351323"/>
           </a:xfrm>
         </p:grpSpPr>
         <p:sp>
@@ -7256,7 +7242,7 @@
           <p:spPr>
             <a:xfrm>
               <a:off x="-2" y="-1"/>
-              <a:ext cx="495292" cy="351321"/>
+              <a:ext cx="495295" cy="351324"/>
             </a:xfrm>
             <a:prstGeom prst="rect">
               <a:avLst/>
@@ -7311,8 +7297,8 @@
           </p:blipFill>
           <p:spPr>
             <a:xfrm>
-              <a:off x="-2" y="-2"/>
-              <a:ext cx="495293" cy="351323"/>
+              <a:off x="-1" y="-1"/>
+              <a:ext cx="495294" cy="351324"/>
             </a:xfrm>
             <a:prstGeom prst="rect">
               <a:avLst/>
@@ -7333,8 +7319,8 @@
         </p:nvSpPr>
         <p:spPr>
           <a:xfrm>
-            <a:off x="7238817" y="11654666"/>
-            <a:ext cx="2200657" cy="573026"/>
+            <a:off x="7637150" y="11584305"/>
+            <a:ext cx="2505457" cy="585980"/>
           </a:xfrm>
           <a:prstGeom prst="rect">
             <a:avLst/>
@@ -7356,7 +7342,7 @@
             <a:spAutoFit/>
           </a:bodyPr>
           <a:lstStyle>
-            <a:lvl1pPr marL="342900" indent="-342900" defTabSz="1828800">
+            <a:lvl1pPr marL="342899" indent="-342899" defTabSz="1828800">
               <a:lnSpc>
                 <a:spcPts val="2800"/>
               </a:lnSpc>
@@ -7366,7 +7352,7 @@
               <a:buSzPct val="100000"/>
               <a:buFont typeface="Arial"/>
               <a:buChar char="•"/>
-              <a:defRPr b="1" sz="1600">
+              <a:defRPr b="1" sz="1900">
                 <a:latin typeface="微软雅黑"/>
                 <a:ea typeface="微软雅黑"/>
                 <a:cs typeface="微软雅黑"/>
@@ -7391,7 +7377,7 @@
         <p:spPr>
           <a:xfrm>
             <a:off x="7048320" y="12182698"/>
-            <a:ext cx="641717" cy="545667"/>
+            <a:ext cx="641718" cy="545668"/>
           </a:xfrm>
           <a:prstGeom prst="rect">
             <a:avLst/>
@@ -7435,7 +7421,7 @@
         </p:nvSpPr>
         <p:spPr>
           <a:xfrm>
-            <a:off x="7238817" y="12169016"/>
+            <a:off x="7700578" y="12109872"/>
             <a:ext cx="1794257" cy="573026"/>
           </a:xfrm>
           <a:prstGeom prst="rect">
@@ -7492,8 +7478,8 @@
         </p:nvSpPr>
         <p:spPr>
           <a:xfrm>
-            <a:off x="2076393" y="8267997"/>
-            <a:ext cx="1603757" cy="723901"/>
+            <a:off x="2453823" y="8257870"/>
+            <a:ext cx="1679957" cy="728219"/>
           </a:xfrm>
           <a:prstGeom prst="rect">
             <a:avLst/>
@@ -7519,7 +7505,7 @@
               <a:spcBef>
                 <a:spcPts val="0"/>
               </a:spcBef>
-              <a:defRPr b="1" sz="1800">
+              <a:defRPr b="1" sz="1900">
                 <a:solidFill>
                   <a:srgbClr val="0439E1"/>
                 </a:solidFill>
@@ -7546,8 +7532,8 @@
         </p:nvSpPr>
         <p:spPr>
           <a:xfrm>
-            <a:off x="7641645" y="10877836"/>
-            <a:ext cx="1349757" cy="700533"/>
+            <a:off x="7718155" y="10862863"/>
+            <a:ext cx="1197357" cy="687579"/>
           </a:xfrm>
           <a:prstGeom prst="rect">
             <a:avLst/>
@@ -7577,7 +7563,7 @@
               <a:spcBef>
                 <a:spcPts val="0"/>
               </a:spcBef>
-              <a:defRPr b="1" sz="2200">
+              <a:defRPr b="1" sz="1900">
                 <a:solidFill>
                   <a:srgbClr val="0439E1"/>
                 </a:solidFill>
@@ -7620,8 +7606,8 @@
         </p:blipFill>
         <p:spPr>
           <a:xfrm>
-            <a:off x="14594749" y="3045481"/>
-            <a:ext cx="7290303" cy="10134281"/>
+            <a:off x="14594749" y="3045480"/>
+            <a:ext cx="7290304" cy="10134282"/>
           </a:xfrm>
           <a:prstGeom prst="rect">
             <a:avLst/>
@@ -7746,7 +7732,7 @@
         <p:spPr>
           <a:xfrm>
             <a:off x="1163318" y="1506218"/>
-            <a:ext cx="20958814" cy="419101"/>
+            <a:ext cx="20958814" cy="774701"/>
           </a:xfrm>
           <a:prstGeom prst="rect">
             <a:avLst/>
@@ -7772,7 +7758,7 @@
               <a:spcBef>
                 <a:spcPts val="0"/>
               </a:spcBef>
-              <a:defRPr b="1" sz="2400">
+              <a:defRPr b="1" sz="4300">
                 <a:solidFill>
                   <a:srgbClr val="0D0D0D"/>
                 </a:solidFill>
@@ -7786,7 +7772,7 @@
           <a:p>
             <a:pPr/>
             <a:r>
-              <a:t>当前大盘数据项与业务意义</a:t>
+              <a:t>数据项与业务意义</a:t>
             </a:r>
           </a:p>
         </p:txBody>
@@ -7811,7 +7797,7 @@
         <p:spPr>
           <a:xfrm flipH="1" rot="10800000">
             <a:off x="21503639" y="1998977"/>
-            <a:ext cx="1524003" cy="152403"/>
+            <a:ext cx="1524004" cy="152404"/>
           </a:xfrm>
           <a:prstGeom prst="rect">
             <a:avLst/>
@@ -7841,7 +7827,7 @@
         <p:spPr>
           <a:xfrm flipH="1" rot="10800000">
             <a:off x="21503639" y="2260600"/>
-            <a:ext cx="1524003" cy="152400"/>
+            <a:ext cx="1524004" cy="152400"/>
           </a:xfrm>
           <a:prstGeom prst="rect">
             <a:avLst/>
@@ -7859,8 +7845,8 @@
         </p:nvSpPr>
         <p:spPr>
           <a:xfrm>
-            <a:off x="1163319" y="4241800"/>
-            <a:ext cx="10350501" cy="317500"/>
+            <a:off x="1163319" y="3723124"/>
+            <a:ext cx="10350501" cy="419101"/>
           </a:xfrm>
           <a:prstGeom prst="rect">
             <a:avLst/>
@@ -7886,7 +7872,7 @@
               <a:spcBef>
                 <a:spcPts val="0"/>
               </a:spcBef>
-              <a:defRPr b="1" sz="1800">
+              <a:defRPr b="1" sz="2400">
                 <a:solidFill>
                   <a:srgbClr val="0439E1"/>
                 </a:solidFill>
@@ -7913,8 +7899,8 @@
         </p:nvSpPr>
         <p:spPr>
           <a:xfrm>
-            <a:off x="1163319" y="4975859"/>
-            <a:ext cx="10351773" cy="279401"/>
+            <a:off x="1162683" y="4585196"/>
+            <a:ext cx="10351773" cy="3130551"/>
           </a:xfrm>
           <a:prstGeom prst="rect">
             <a:avLst/>
@@ -7941,7 +7927,7 @@
               <a:spcBef>
                 <a:spcPts val="0"/>
               </a:spcBef>
-              <a:defRPr b="1" sz="1600">
+              <a:defRPr b="1" sz="2100">
                 <a:solidFill>
                   <a:srgbClr val="262626"/>
                 </a:solidFill>
@@ -7963,6 +7949,31 @@
               </a:rPr>
               <a:t>/ </a:t>
             </a:r>
+            <a:endParaRPr>
+              <a:latin typeface="Microsoft YaHei"/>
+              <a:ea typeface="Microsoft YaHei"/>
+              <a:cs typeface="Microsoft YaHei"/>
+              <a:sym typeface="Microsoft YaHei"/>
+            </a:endParaRPr>
+          </a:p>
+          <a:p>
+            <a:pPr algn="just" defTabSz="1828800">
+              <a:lnSpc>
+                <a:spcPct val="150000"/>
+              </a:lnSpc>
+              <a:spcBef>
+                <a:spcPts val="0"/>
+              </a:spcBef>
+              <a:defRPr b="1" sz="2100">
+                <a:solidFill>
+                  <a:srgbClr val="262626"/>
+                </a:solidFill>
+                <a:latin typeface="微软雅黑"/>
+                <a:ea typeface="微软雅黑"/>
+                <a:cs typeface="微软雅黑"/>
+                <a:sym typeface="微软雅黑"/>
+              </a:defRPr>
+            </a:pPr>
             <a:r>
               <a:t>趋势图 </a:t>
             </a:r>
@@ -7975,6 +7986,31 @@
               </a:rPr>
               <a:t>/ </a:t>
             </a:r>
+            <a:endParaRPr>
+              <a:latin typeface="Microsoft YaHei"/>
+              <a:ea typeface="Microsoft YaHei"/>
+              <a:cs typeface="Microsoft YaHei"/>
+              <a:sym typeface="Microsoft YaHei"/>
+            </a:endParaRPr>
+          </a:p>
+          <a:p>
+            <a:pPr algn="just" defTabSz="1828800">
+              <a:lnSpc>
+                <a:spcPct val="150000"/>
+              </a:lnSpc>
+              <a:spcBef>
+                <a:spcPts val="0"/>
+              </a:spcBef>
+              <a:defRPr b="1" sz="2100">
+                <a:solidFill>
+                  <a:srgbClr val="262626"/>
+                </a:solidFill>
+                <a:latin typeface="微软雅黑"/>
+                <a:ea typeface="微软雅黑"/>
+                <a:cs typeface="微软雅黑"/>
+                <a:sym typeface="微软雅黑"/>
+              </a:defRPr>
+            </a:pPr>
             <a:r>
               <a:t>地图 </a:t>
             </a:r>
@@ -7987,6 +8023,31 @@
               </a:rPr>
               <a:t>/ </a:t>
             </a:r>
+            <a:endParaRPr>
+              <a:latin typeface="Microsoft YaHei"/>
+              <a:ea typeface="Microsoft YaHei"/>
+              <a:cs typeface="Microsoft YaHei"/>
+              <a:sym typeface="Microsoft YaHei"/>
+            </a:endParaRPr>
+          </a:p>
+          <a:p>
+            <a:pPr algn="just" defTabSz="1828800">
+              <a:lnSpc>
+                <a:spcPct val="150000"/>
+              </a:lnSpc>
+              <a:spcBef>
+                <a:spcPts val="0"/>
+              </a:spcBef>
+              <a:defRPr b="1" sz="2100">
+                <a:solidFill>
+                  <a:srgbClr val="262626"/>
+                </a:solidFill>
+                <a:latin typeface="微软雅黑"/>
+                <a:ea typeface="微软雅黑"/>
+                <a:cs typeface="微软雅黑"/>
+                <a:sym typeface="微软雅黑"/>
+              </a:defRPr>
+            </a:pPr>
             <a:r>
               <a:t>热点 </a:t>
             </a:r>
@@ -7999,6 +8060,31 @@
               </a:rPr>
               <a:t>/ </a:t>
             </a:r>
+            <a:endParaRPr>
+              <a:latin typeface="Microsoft YaHei"/>
+              <a:ea typeface="Microsoft YaHei"/>
+              <a:cs typeface="Microsoft YaHei"/>
+              <a:sym typeface="Microsoft YaHei"/>
+            </a:endParaRPr>
+          </a:p>
+          <a:p>
+            <a:pPr algn="just" defTabSz="1828800">
+              <a:lnSpc>
+                <a:spcPct val="150000"/>
+              </a:lnSpc>
+              <a:spcBef>
+                <a:spcPts val="0"/>
+              </a:spcBef>
+              <a:defRPr b="1" sz="2100">
+                <a:solidFill>
+                  <a:srgbClr val="262626"/>
+                </a:solidFill>
+                <a:latin typeface="微软雅黑"/>
+                <a:ea typeface="微软雅黑"/>
+                <a:cs typeface="微软雅黑"/>
+                <a:sym typeface="微软雅黑"/>
+              </a:defRPr>
+            </a:pPr>
             <a:r>
               <a:t>拥堵 </a:t>
             </a:r>
@@ -8011,6 +8097,31 @@
               </a:rPr>
               <a:t>/ </a:t>
             </a:r>
+            <a:endParaRPr>
+              <a:latin typeface="Microsoft YaHei"/>
+              <a:ea typeface="Microsoft YaHei"/>
+              <a:cs typeface="Microsoft YaHei"/>
+              <a:sym typeface="Microsoft YaHei"/>
+            </a:endParaRPr>
+          </a:p>
+          <a:p>
+            <a:pPr algn="just" defTabSz="1828800">
+              <a:lnSpc>
+                <a:spcPct val="150000"/>
+              </a:lnSpc>
+              <a:spcBef>
+                <a:spcPts val="0"/>
+              </a:spcBef>
+              <a:defRPr b="1" sz="2100">
+                <a:solidFill>
+                  <a:srgbClr val="262626"/>
+                </a:solidFill>
+                <a:latin typeface="微软雅黑"/>
+                <a:ea typeface="微软雅黑"/>
+                <a:cs typeface="微软雅黑"/>
+                <a:sym typeface="微软雅黑"/>
+              </a:defRPr>
+            </a:pPr>
             <a:r>
               <a:t>轨迹复盘</a:t>
             </a:r>
@@ -8026,7 +8137,7 @@
         <p:spPr>
           <a:xfrm>
             <a:off x="1163319" y="8281668"/>
-            <a:ext cx="10350501" cy="317501"/>
+            <a:ext cx="10350501" cy="419101"/>
           </a:xfrm>
           <a:prstGeom prst="rect">
             <a:avLst/>
@@ -8052,7 +8163,7 @@
               <a:spcBef>
                 <a:spcPts val="0"/>
               </a:spcBef>
-              <a:defRPr b="1" sz="1800">
+              <a:defRPr b="1" sz="2400">
                 <a:solidFill>
                   <a:srgbClr val="0439E1"/>
                 </a:solidFill>
@@ -8080,7 +8191,7 @@
         <p:spPr>
           <a:xfrm>
             <a:off x="1163319" y="8992868"/>
-            <a:ext cx="10351773" cy="241301"/>
+            <a:ext cx="10351773" cy="1816101"/>
           </a:xfrm>
           <a:prstGeom prst="rect">
             <a:avLst/>
@@ -8098,15 +8209,16 @@
           <a:bodyPr lIns="0" tIns="0" rIns="0" bIns="0">
             <a:spAutoFit/>
           </a:bodyPr>
-          <a:lstStyle>
-            <a:lvl1pPr algn="just" defTabSz="1828800">
+          <a:lstStyle/>
+          <a:p>
+            <a:pPr algn="just" defTabSz="1828800">
               <a:lnSpc>
                 <a:spcPct val="150000"/>
               </a:lnSpc>
               <a:spcBef>
                 <a:spcPts val="0"/>
               </a:spcBef>
-              <a:defRPr b="1" sz="1600">
+              <a:defRPr b="1" sz="2200">
                 <a:solidFill>
                   <a:srgbClr val="262626"/>
                 </a:solidFill>
@@ -8115,12 +8227,75 @@
                 <a:cs typeface="Microsoft YaHei"/>
                 <a:sym typeface="Microsoft YaHei"/>
               </a:defRPr>
-            </a:lvl1pPr>
-          </a:lstStyle>
-          <a:p>
-            <a:pPr/>
-            <a:r>
-              <a:t>overview / road_traffic / hotspot_analysis / dwd_taxi_trip</a:t>
+            </a:pPr>
+            <a:r>
+              <a:t>overview / </a:t>
+            </a:r>
+          </a:p>
+          <a:p>
+            <a:pPr algn="just" defTabSz="1828800">
+              <a:lnSpc>
+                <a:spcPct val="150000"/>
+              </a:lnSpc>
+              <a:spcBef>
+                <a:spcPts val="0"/>
+              </a:spcBef>
+              <a:defRPr b="1" sz="2200">
+                <a:solidFill>
+                  <a:srgbClr val="262626"/>
+                </a:solidFill>
+                <a:latin typeface="Microsoft YaHei"/>
+                <a:ea typeface="Microsoft YaHei"/>
+                <a:cs typeface="Microsoft YaHei"/>
+                <a:sym typeface="Microsoft YaHei"/>
+              </a:defRPr>
+            </a:pPr>
+            <a:r>
+              <a:t>road_traffic / </a:t>
+            </a:r>
+          </a:p>
+          <a:p>
+            <a:pPr algn="just" defTabSz="1828800">
+              <a:lnSpc>
+                <a:spcPct val="150000"/>
+              </a:lnSpc>
+              <a:spcBef>
+                <a:spcPts val="0"/>
+              </a:spcBef>
+              <a:defRPr b="1" sz="2200">
+                <a:solidFill>
+                  <a:srgbClr val="262626"/>
+                </a:solidFill>
+                <a:latin typeface="Microsoft YaHei"/>
+                <a:ea typeface="Microsoft YaHei"/>
+                <a:cs typeface="Microsoft YaHei"/>
+                <a:sym typeface="Microsoft YaHei"/>
+              </a:defRPr>
+            </a:pPr>
+            <a:r>
+              <a:t>hotspot_analysis / </a:t>
+            </a:r>
+          </a:p>
+          <a:p>
+            <a:pPr algn="just" defTabSz="1828800">
+              <a:lnSpc>
+                <a:spcPct val="150000"/>
+              </a:lnSpc>
+              <a:spcBef>
+                <a:spcPts val="0"/>
+              </a:spcBef>
+              <a:defRPr b="1" sz="2200">
+                <a:solidFill>
+                  <a:srgbClr val="262626"/>
+                </a:solidFill>
+                <a:latin typeface="Microsoft YaHei"/>
+                <a:ea typeface="Microsoft YaHei"/>
+                <a:cs typeface="Microsoft YaHei"/>
+                <a:sym typeface="Microsoft YaHei"/>
+              </a:defRPr>
+            </a:pPr>
+            <a:r>
+              <a:t>dwd_taxi_trip</a:t>
             </a:r>
           </a:p>
         </p:txBody>
@@ -8133,8 +8308,8 @@
         </p:nvSpPr>
         <p:spPr>
           <a:xfrm>
-            <a:off x="13067030" y="4241800"/>
-            <a:ext cx="10350503" cy="317500"/>
+            <a:off x="13067030" y="4033262"/>
+            <a:ext cx="10350504" cy="571501"/>
           </a:xfrm>
           <a:prstGeom prst="rect">
             <a:avLst/>
@@ -8160,7 +8335,7 @@
               <a:spcBef>
                 <a:spcPts val="0"/>
               </a:spcBef>
-              <a:defRPr b="1" sz="1800">
+              <a:defRPr b="1" sz="3200">
                 <a:solidFill>
                   <a:srgbClr val="FFFFFF"/>
                 </a:solidFill>
@@ -8187,8 +8362,8 @@
         </p:nvSpPr>
         <p:spPr>
           <a:xfrm>
-            <a:off x="13067030" y="4975859"/>
-            <a:ext cx="10353043" cy="1054101"/>
+            <a:off x="13067030" y="4932043"/>
+            <a:ext cx="10353044" cy="1676401"/>
           </a:xfrm>
           <a:prstGeom prst="rect">
             <a:avLst/>
@@ -8215,7 +8390,7 @@
               <a:spcBef>
                 <a:spcPts val="0"/>
               </a:spcBef>
-              <a:defRPr b="1" sz="1600">
+              <a:defRPr b="1" sz="2400">
                 <a:solidFill>
                   <a:srgbClr val="FFFFFF"/>
                 </a:solidFill>
@@ -8249,7 +8424,6 @@
               </a:rPr>
               <a:t>×1.45</a:t>
             </a:r>
-            <a:endParaRPr sz="2800"/>
           </a:p>
           <a:p>
             <a:pPr algn="just" defTabSz="1828800">
@@ -8259,7 +8433,7 @@
               <a:spcBef>
                 <a:spcPts val="0"/>
               </a:spcBef>
-              <a:defRPr sz="1400">
+              <a:defRPr sz="2400">
                 <a:solidFill>
                   <a:srgbClr val="FFFFFF"/>
                 </a:solidFill>
@@ -8281,7 +8455,6 @@
               </a:rPr>
               <a:t>=log10(pass_count)</a:t>
             </a:r>
-            <a:endParaRPr sz="2800"/>
           </a:p>
           <a:p>
             <a:pPr algn="just" defTabSz="1828800">
@@ -8291,7 +8464,7 @@
               <a:spcBef>
                 <a:spcPts val="0"/>
               </a:spcBef>
-              <a:defRPr sz="1400">
+              <a:defRPr sz="2400">
                 <a:solidFill>
                   <a:srgbClr val="FFFFFF"/>
                 </a:solidFill>
@@ -8351,8 +8524,8 @@
         </p:nvSpPr>
         <p:spPr>
           <a:xfrm>
-            <a:off x="13067030" y="8281668"/>
-            <a:ext cx="10350503" cy="317501"/>
+            <a:off x="13068300" y="8088026"/>
+            <a:ext cx="10350504" cy="533401"/>
           </a:xfrm>
           <a:prstGeom prst="rect">
             <a:avLst/>
@@ -8378,7 +8551,7 @@
               <a:spcBef>
                 <a:spcPts val="0"/>
               </a:spcBef>
-              <a:defRPr b="1" sz="1800">
+              <a:defRPr b="1" sz="3000">
                 <a:solidFill>
                   <a:srgbClr val="FFFFFF"/>
                 </a:solidFill>
@@ -8406,7 +8579,7 @@
         <p:spPr>
           <a:xfrm>
             <a:off x="13067030" y="8992868"/>
-            <a:ext cx="10353043" cy="1054101"/>
+            <a:ext cx="10353044" cy="1676401"/>
           </a:xfrm>
           <a:prstGeom prst="rect">
             <a:avLst/>
@@ -8433,7 +8606,7 @@
               <a:spcBef>
                 <a:spcPts val="0"/>
               </a:spcBef>
-              <a:defRPr b="1" sz="1600">
+              <a:defRPr b="1" sz="2400">
                 <a:solidFill>
                   <a:srgbClr val="FFFFFF"/>
                 </a:solidFill>
@@ -8458,7 +8631,6 @@
             <a:r>
               <a:t>秒刷新</a:t>
             </a:r>
-            <a:endParaRPr sz="2800"/>
           </a:p>
           <a:p>
             <a:pPr algn="just" defTabSz="1828800">
@@ -8468,7 +8640,7 @@
               <a:spcBef>
                 <a:spcPts val="0"/>
               </a:spcBef>
-              <a:defRPr sz="1400">
+              <a:defRPr sz="2400">
                 <a:solidFill>
                   <a:srgbClr val="FFFFFF"/>
                 </a:solidFill>
@@ -8493,7 +8665,6 @@
             <a:r>
               <a:t>秒</a:t>
             </a:r>
-            <a:endParaRPr sz="2800"/>
           </a:p>
           <a:p>
             <a:pPr algn="just" defTabSz="1828800">
@@ -8503,7 +8674,7 @@
               <a:spcBef>
                 <a:spcPts val="0"/>
               </a:spcBef>
-              <a:defRPr sz="1400">
+              <a:defRPr sz="2400">
                 <a:solidFill>
                   <a:srgbClr val="FFFFFF"/>
                 </a:solidFill>
@@ -8530,7 +8701,7 @@
         <p:spPr>
           <a:xfrm>
             <a:off x="23164832" y="12861656"/>
-            <a:ext cx="449850" cy="728977"/>
+            <a:ext cx="449848" cy="728975"/>
           </a:xfrm>
           <a:prstGeom prst="rect">
             <a:avLst/>
@@ -8542,7 +8713,7 @@
           </a:extLst>
         </p:spPr>
         <p:txBody>
-          <a:bodyPr lIns="91437" tIns="91437" rIns="91437" bIns="91437" anchor="t"/>
+          <a:bodyPr lIns="91436" tIns="91436" rIns="91436" bIns="91436" anchor="t"/>
           <a:lstStyle>
             <a:lvl1pPr algn="l" defTabSz="1828800">
               <a:defRPr sz="3600">
@@ -8559,6 +8730,35 @@
           </a:p>
         </p:txBody>
       </p:sp>
+      <p:pic>
+        <p:nvPicPr>
+          <p:cNvPr id="251" name="图像" descr="图像"/>
+          <p:cNvPicPr>
+            <a:picLocks noChangeAspect="1"/>
+          </p:cNvPicPr>
+          <p:nvPr/>
+        </p:nvPicPr>
+        <p:blipFill>
+          <a:blip r:embed="rId6">
+            <a:extLst/>
+          </a:blip>
+          <a:stretch>
+            <a:fillRect/>
+          </a:stretch>
+        </p:blipFill>
+        <p:spPr>
+          <a:xfrm>
+            <a:off x="3678219" y="4174557"/>
+            <a:ext cx="7950465" cy="3815012"/>
+          </a:xfrm>
+          <a:prstGeom prst="rect">
+            <a:avLst/>
+          </a:prstGeom>
+          <a:ln w="12700">
+            <a:miter lim="400000"/>
+          </a:ln>
+        </p:spPr>
+      </p:pic>
     </p:spTree>
   </p:cSld>
   <p:clrMapOvr>
@@ -8598,7 +8798,7 @@
       </p:grpSpPr>
       <p:sp>
         <p:nvSpPr>
-          <p:cNvPr id="252" name="Rectangle 1"/>
+          <p:cNvPr id="253" name="Rectangle 1"/>
           <p:cNvSpPr/>
           <p:nvPr/>
         </p:nvSpPr>
@@ -8626,6 +8826,10 @@
                 <a:solidFill>
                   <a:srgbClr val="FFFFFF"/>
                 </a:solidFill>
+                <a:latin typeface="+mn-lt"/>
+                <a:ea typeface="+mn-ea"/>
+                <a:cs typeface="+mn-cs"/>
+                <a:sym typeface="Helvetica Neue"/>
               </a:defRPr>
             </a:pPr>
           </a:p>
@@ -8633,7 +8837,7 @@
       </p:sp>
       <p:sp>
         <p:nvSpPr>
-          <p:cNvPr id="253" name="Rectangle 2"/>
+          <p:cNvPr id="254" name="Rectangle 2"/>
           <p:cNvSpPr/>
           <p:nvPr/>
         </p:nvSpPr>
@@ -8661,6 +8865,10 @@
                 <a:solidFill>
                   <a:srgbClr val="FFFFFF"/>
                 </a:solidFill>
+                <a:latin typeface="+mn-lt"/>
+                <a:ea typeface="+mn-ea"/>
+                <a:cs typeface="+mn-cs"/>
+                <a:sym typeface="Helvetica Neue"/>
               </a:defRPr>
             </a:pPr>
           </a:p>
@@ -8668,14 +8876,14 @@
       </p:sp>
       <p:sp>
         <p:nvSpPr>
-          <p:cNvPr id="254" name="Rectangle 3"/>
+          <p:cNvPr id="255" name="Rectangle 3"/>
           <p:cNvSpPr/>
           <p:nvPr/>
         </p:nvSpPr>
         <p:spPr>
           <a:xfrm>
             <a:off x="0" y="1325880"/>
-            <a:ext cx="24384000" cy="73153"/>
+            <a:ext cx="24384000" cy="73154"/>
           </a:xfrm>
           <a:prstGeom prst="rect">
             <a:avLst/>
@@ -8696,6 +8904,10 @@
                 <a:solidFill>
                   <a:srgbClr val="FFFFFF"/>
                 </a:solidFill>
+                <a:latin typeface="+mn-lt"/>
+                <a:ea typeface="+mn-ea"/>
+                <a:cs typeface="+mn-cs"/>
+                <a:sym typeface="Helvetica Neue"/>
               </a:defRPr>
             </a:pPr>
           </a:p>
@@ -8703,13 +8915,13 @@
       </p:sp>
       <p:sp>
         <p:nvSpPr>
-          <p:cNvPr id="255" name="TextBox 4"/>
+          <p:cNvPr id="256" name="TextBox 4"/>
           <p:cNvSpPr txBox="1"/>
           <p:nvPr/>
         </p:nvSpPr>
         <p:spPr>
           <a:xfrm>
-            <a:off x="914400" y="256031"/>
+            <a:off x="914399" y="256030"/>
             <a:ext cx="4521513" cy="533401"/>
           </a:xfrm>
           <a:prstGeom prst="rect">
@@ -8735,31 +8947,25 @@
                 <a:solidFill>
                   <a:srgbClr val="FFFFFF"/>
                 </a:solidFill>
+                <a:latin typeface="+mn-lt"/>
+                <a:ea typeface="+mn-ea"/>
+                <a:cs typeface="+mn-cs"/>
+                <a:sym typeface="Helvetica Neue"/>
+              </a:defRPr>
+            </a:pPr>
+            <a:r>
+              <a:t>计算口径 </a:t>
+            </a:r>
+            <a:r>
+              <a:rPr>
                 <a:latin typeface="Microsoft YaHei"/>
                 <a:ea typeface="Microsoft YaHei"/>
                 <a:cs typeface="Microsoft YaHei"/>
                 <a:sym typeface="Microsoft YaHei"/>
-              </a:defRPr>
-            </a:pPr>
-            <a:r>
-              <a:rPr>
-                <a:latin typeface="+mj-lt"/>
-                <a:ea typeface="+mj-ea"/>
-                <a:cs typeface="+mj-cs"/>
-                <a:sym typeface="Helvetica Neue"/>
               </a:rPr>
-              <a:t>计算口径 </a:t>
-            </a:r>
-            <a:r>
               <a:t>1</a:t>
             </a:r>
             <a:r>
-              <a:rPr>
-                <a:latin typeface="+mj-lt"/>
-                <a:ea typeface="+mj-ea"/>
-                <a:cs typeface="+mj-cs"/>
-                <a:sym typeface="Helvetica Neue"/>
-              </a:rPr>
               <a:t>：核心总览指标</a:t>
             </a:r>
           </a:p>
@@ -8767,14 +8973,14 @@
       </p:sp>
       <p:sp>
         <p:nvSpPr>
-          <p:cNvPr id="256" name="TextBox 5"/>
+          <p:cNvPr id="257" name="TextBox 5"/>
           <p:cNvSpPr txBox="1"/>
           <p:nvPr/>
         </p:nvSpPr>
         <p:spPr>
           <a:xfrm>
-            <a:off x="22149550" y="347472"/>
-            <a:ext cx="1030491" cy="320041"/>
+            <a:off x="22149550" y="347473"/>
+            <a:ext cx="1030489" cy="320039"/>
           </a:xfrm>
           <a:prstGeom prst="rect">
             <a:avLst/>
@@ -8789,7 +8995,7 @@
           </a:extLst>
         </p:spPr>
         <p:txBody>
-          <a:bodyPr wrap="none" lIns="45719" rIns="45719">
+          <a:bodyPr wrap="none" lIns="45718" tIns="45718" rIns="45718" bIns="45718">
             <a:spAutoFit/>
           </a:bodyPr>
           <a:lstStyle/>
@@ -8810,9 +9016,9 @@
             </a:r>
             <a:r>
               <a:rPr>
-                <a:latin typeface="+mj-lt"/>
-                <a:ea typeface="+mj-ea"/>
-                <a:cs typeface="+mj-cs"/>
+                <a:latin typeface="+mn-lt"/>
+                <a:ea typeface="+mn-ea"/>
+                <a:cs typeface="+mn-cs"/>
                 <a:sym typeface="Helvetica Neue"/>
               </a:rPr>
               <a:t>总览表</a:t>
@@ -8822,13 +9028,13 @@
       </p:sp>
       <p:graphicFrame>
         <p:nvGraphicFramePr>
-          <p:cNvPr id="257" name="Table 6"/>
+          <p:cNvPr id="258" name="Table 6"/>
           <p:cNvGraphicFramePr/>
           <p:nvPr/>
         </p:nvGraphicFramePr>
         <p:xfrm>
-          <a:off x="822960" y="1874518"/>
-          <a:ext cx="22722840" cy="10698482"/>
+          <a:off x="822960" y="1874517"/>
+          <a:ext cx="22722840" cy="10698483"/>
         </p:xfrm>
         <a:graphic xmlns:a="http://schemas.openxmlformats.org/drawingml/2006/main">
           <a:graphicData uri="http://schemas.openxmlformats.org/drawingml/2006/table">
@@ -8848,22 +9054,17 @@
                     <a:lstStyle/>
                     <a:p>
                       <a:pPr>
-                        <a:defRPr sz="2200">
+                        <a:defRPr b="0">
+                          <a:solidFill>
+                            <a:srgbClr val="000000"/>
+                          </a:solidFill>
+                        </a:defRPr>
+                      </a:pPr>
+                      <a:r>
+                        <a:rPr b="1" sz="2200">
                           <a:solidFill>
                             <a:srgbClr val="16314E"/>
                           </a:solidFill>
-                          <a:latin typeface="Microsoft YaHei"/>
-                          <a:ea typeface="Microsoft YaHei"/>
-                          <a:cs typeface="Microsoft YaHei"/>
-                          <a:sym typeface="Microsoft YaHei"/>
-                        </a:defRPr>
-                      </a:pPr>
-                      <a:r>
-                        <a:rPr>
-                          <a:latin typeface="+mj-lt"/>
-                          <a:ea typeface="+mj-ea"/>
-                          <a:cs typeface="+mj-cs"/>
-                          <a:sym typeface="Helvetica Neue"/>
                         </a:rPr>
                         <a:t>数据项</a:t>
                       </a:r>
@@ -8885,31 +9086,21 @@
                           <a:solidFill>
                             <a:srgbClr val="16314E"/>
                           </a:solidFill>
+                        </a:defRPr>
+                      </a:pPr>
+                      <a:r>
+                        <a:t>来源字段 </a:t>
+                      </a:r>
+                      <a:r>
+                        <a:rPr>
                           <a:latin typeface="Microsoft YaHei"/>
                           <a:ea typeface="Microsoft YaHei"/>
                           <a:cs typeface="Microsoft YaHei"/>
                           <a:sym typeface="Microsoft YaHei"/>
-                        </a:defRPr>
-                      </a:pPr>
-                      <a:r>
-                        <a:rPr>
-                          <a:latin typeface="+mj-lt"/>
-                          <a:ea typeface="+mj-ea"/>
-                          <a:cs typeface="+mj-cs"/>
-                          <a:sym typeface="Helvetica Neue"/>
                         </a:rPr>
-                        <a:t>来源字段 </a:t>
-                      </a:r>
-                      <a:r>
                         <a:t>/ </a:t>
                       </a:r>
                       <a:r>
-                        <a:rPr>
-                          <a:latin typeface="+mj-lt"/>
-                          <a:ea typeface="+mj-ea"/>
-                          <a:cs typeface="+mj-cs"/>
-                          <a:sym typeface="Helvetica Neue"/>
-                        </a:rPr>
                         <a:t>数据表</a:t>
                       </a:r>
                     </a:p>
@@ -8930,31 +9121,21 @@
                           <a:solidFill>
                             <a:srgbClr val="16314E"/>
                           </a:solidFill>
+                        </a:defRPr>
+                      </a:pPr>
+                      <a:r>
+                        <a:t>计算方式 </a:t>
+                      </a:r>
+                      <a:r>
+                        <a:rPr>
                           <a:latin typeface="Microsoft YaHei"/>
                           <a:ea typeface="Microsoft YaHei"/>
                           <a:cs typeface="Microsoft YaHei"/>
                           <a:sym typeface="Microsoft YaHei"/>
-                        </a:defRPr>
-                      </a:pPr>
-                      <a:r>
-                        <a:rPr>
-                          <a:latin typeface="+mj-lt"/>
-                          <a:ea typeface="+mj-ea"/>
-                          <a:cs typeface="+mj-cs"/>
-                          <a:sym typeface="Helvetica Neue"/>
                         </a:rPr>
-                        <a:t>计算方式 </a:t>
-                      </a:r>
-                      <a:r>
                         <a:t>/ </a:t>
                       </a:r>
                       <a:r>
-                        <a:rPr>
-                          <a:latin typeface="+mj-lt"/>
-                          <a:ea typeface="+mj-ea"/>
-                          <a:cs typeface="+mj-cs"/>
-                          <a:sym typeface="Helvetica Neue"/>
-                        </a:rPr>
                         <a:t>口径说明</a:t>
                       </a:r>
                     </a:p>
@@ -8972,23 +9153,12 @@
                     <a:bodyPr/>
                     <a:lstStyle/>
                     <a:p>
-                      <a:pPr>
-                        <a:defRPr b="1" sz="2200">
+                      <a:pPr/>
+                      <a:r>
+                        <a:rPr b="1" sz="2200">
                           <a:solidFill>
                             <a:srgbClr val="1F2937"/>
                           </a:solidFill>
-                          <a:latin typeface="Microsoft YaHei"/>
-                          <a:ea typeface="Microsoft YaHei"/>
-                          <a:cs typeface="Microsoft YaHei"/>
-                          <a:sym typeface="Microsoft YaHei"/>
-                        </a:defRPr>
-                      </a:pPr>
-                      <a:r>
-                        <a:rPr>
-                          <a:latin typeface="+mj-lt"/>
-                          <a:ea typeface="+mj-ea"/>
-                          <a:cs typeface="+mj-cs"/>
-                          <a:sym typeface="Helvetica Neue"/>
                         </a:rPr>
                         <a:t>活跃车辆数</a:t>
                       </a:r>
@@ -9026,6 +9196,116 @@
                           <a:solidFill>
                             <a:srgbClr val="586577"/>
                           </a:solidFill>
+                        </a:defRPr>
+                      </a:pPr>
+                      <a:r>
+                        <a:t>最新 </a:t>
+                      </a:r>
+                      <a:r>
+                        <a:rPr>
+                          <a:latin typeface="Microsoft YaHei"/>
+                          <a:ea typeface="Microsoft YaHei"/>
+                          <a:cs typeface="Microsoft YaHei"/>
+                          <a:sym typeface="Microsoft YaHei"/>
+                        </a:rPr>
+                        <a:t>stat_date</a:t>
+                      </a:r>
+                    </a:p>
+                  </a:txBody>
+                  <a:tcPr marL="64008" marR="64008" marT="64008" marB="64008" anchor="ctr" anchorCtr="0" horzOverflow="overflow">
+                    <a:solidFill>
+                      <a:srgbClr val="FFFFFF"/>
+                    </a:solidFill>
+                  </a:tcPr>
+                </a:tc>
+                <a:tc>
+                  <a:txBody>
+                    <a:bodyPr/>
+                    <a:lstStyle/>
+                    <a:p>
+                      <a:pPr>
+                        <a:defRPr sz="2200">
+                          <a:solidFill>
+                            <a:srgbClr val="1F2937"/>
+                          </a:solidFill>
+                        </a:defRPr>
+                      </a:pPr>
+                      <a:r>
+                        <a:t>直接读取最新统计日期的 </a:t>
+                      </a:r>
+                      <a:r>
+                        <a:rPr>
+                          <a:latin typeface="Microsoft YaHei"/>
+                          <a:ea typeface="Microsoft YaHei"/>
+                          <a:cs typeface="Microsoft YaHei"/>
+                          <a:sym typeface="Microsoft YaHei"/>
+                        </a:rPr>
+                        <a:t>active_taxis</a:t>
+                      </a:r>
+                      <a:r>
+                        <a:t>；空值或 </a:t>
+                      </a:r>
+                      <a:r>
+                        <a:rPr>
+                          <a:latin typeface="Microsoft YaHei"/>
+                          <a:ea typeface="Microsoft YaHei"/>
+                          <a:cs typeface="Microsoft YaHei"/>
+                          <a:sym typeface="Microsoft YaHei"/>
+                        </a:rPr>
+                        <a:t>0 </a:t>
+                      </a:r>
+                      <a:r>
+                        <a:t>时使用 </a:t>
+                      </a:r>
+                      <a:r>
+                        <a:rPr>
+                          <a:latin typeface="Microsoft YaHei"/>
+                          <a:ea typeface="Microsoft YaHei"/>
+                          <a:cs typeface="Microsoft YaHei"/>
+                          <a:sym typeface="Microsoft YaHei"/>
+                        </a:rPr>
+                        <a:t>fallback </a:t>
+                      </a:r>
+                      <a:r>
+                        <a:t>数据。</a:t>
+                      </a:r>
+                    </a:p>
+                  </a:txBody>
+                  <a:tcPr marL="64008" marR="64008" marT="64008" marB="64008" anchor="ctr" anchorCtr="0" horzOverflow="overflow">
+                    <a:solidFill>
+                      <a:srgbClr val="FFFFFF"/>
+                    </a:solidFill>
+                  </a:tcPr>
+                </a:tc>
+              </a:tr>
+              <a:tr h="1337310">
+                <a:tc>
+                  <a:txBody>
+                    <a:bodyPr/>
+                    <a:lstStyle/>
+                    <a:p>
+                      <a:pPr/>
+                      <a:r>
+                        <a:t>总采样轨迹</a:t>
+                      </a:r>
+                    </a:p>
+                  </a:txBody>
+                  <a:tcPr marL="64008" marR="64008" marT="64008" marB="64008" anchor="ctr" anchorCtr="0" horzOverflow="overflow">
+                    <a:solidFill>
+                      <a:srgbClr val="FAFCFE"/>
+                    </a:solidFill>
+                  </a:tcPr>
+                </a:tc>
+                <a:tc>
+                  <a:txBody>
+                    <a:bodyPr/>
+                    <a:lstStyle/>
+                    <a:p>
+                      <a:pPr>
+                        <a:defRPr sz="2200">
+                          <a:solidFill>
+                            <a:srgbClr val="586577"/>
+                          </a:solidFill>
                           <a:latin typeface="Microsoft YaHei"/>
                           <a:ea typeface="Microsoft YaHei"/>
                           <a:cs typeface="Microsoft YaHei"/>
@@ -9033,15 +9313,146 @@
                         </a:defRPr>
                       </a:pPr>
                       <a:r>
+                        <a:t>dws_taxi_overview.total_trips</a:t>
+                      </a:r>
+                    </a:p>
+                    <a:p>
+                      <a:pPr>
+                        <a:defRPr sz="2200">
+                          <a:solidFill>
+                            <a:srgbClr val="586577"/>
+                          </a:solidFill>
+                        </a:defRPr>
+                      </a:pPr>
+                      <a:r>
+                        <a:t>最新 </a:t>
+                      </a:r>
+                      <a:r>
                         <a:rPr>
-                          <a:latin typeface="+mj-lt"/>
-                          <a:ea typeface="+mj-ea"/>
-                          <a:cs typeface="+mj-cs"/>
-                          <a:sym typeface="Helvetica Neue"/>
+                          <a:latin typeface="Microsoft YaHei"/>
+                          <a:ea typeface="Microsoft YaHei"/>
+                          <a:cs typeface="Microsoft YaHei"/>
+                          <a:sym typeface="Microsoft YaHei"/>
                         </a:rPr>
+                        <a:t>stat_date</a:t>
+                      </a:r>
+                    </a:p>
+                  </a:txBody>
+                  <a:tcPr marL="64008" marR="64008" marT="64008" marB="64008" anchor="ctr" anchorCtr="0" horzOverflow="overflow">
+                    <a:solidFill>
+                      <a:srgbClr val="FAFCFE"/>
+                    </a:solidFill>
+                  </a:tcPr>
+                </a:tc>
+                <a:tc>
+                  <a:txBody>
+                    <a:bodyPr/>
+                    <a:lstStyle/>
+                    <a:p>
+                      <a:pPr>
+                        <a:defRPr sz="2200">
+                          <a:solidFill>
+                            <a:srgbClr val="1F2937"/>
+                          </a:solidFill>
+                        </a:defRPr>
+                      </a:pPr>
+                      <a:r>
+                        <a:t>直接读取 </a:t>
+                      </a:r>
+                      <a:r>
+                        <a:rPr>
+                          <a:latin typeface="Microsoft YaHei"/>
+                          <a:ea typeface="Microsoft YaHei"/>
+                          <a:cs typeface="Microsoft YaHei"/>
+                          <a:sym typeface="Microsoft YaHei"/>
+                        </a:rPr>
+                        <a:t>total_trips</a:t>
+                      </a:r>
+                      <a:r>
+                        <a:t>，表示当前总览口径下的轨迹</a:t>
+                      </a:r>
+                      <a:r>
+                        <a:rPr>
+                          <a:latin typeface="Microsoft YaHei"/>
+                          <a:ea typeface="Microsoft YaHei"/>
+                          <a:cs typeface="Microsoft YaHei"/>
+                          <a:sym typeface="Microsoft YaHei"/>
+                        </a:rPr>
+                        <a:t>/</a:t>
+                      </a:r>
+                      <a:r>
+                        <a:t>行程采样数量。</a:t>
+                      </a:r>
+                    </a:p>
+                  </a:txBody>
+                  <a:tcPr marL="64008" marR="64008" marT="64008" marB="64008" anchor="ctr" anchorCtr="0" horzOverflow="overflow">
+                    <a:solidFill>
+                      <a:srgbClr val="FAFCFE"/>
+                    </a:solidFill>
+                  </a:tcPr>
+                </a:tc>
+              </a:tr>
+              <a:tr h="1337310">
+                <a:tc>
+                  <a:txBody>
+                    <a:bodyPr/>
+                    <a:lstStyle/>
+                    <a:p>
+                      <a:pPr/>
+                      <a:r>
+                        <a:rPr b="1" sz="2200">
+                          <a:solidFill>
+                            <a:srgbClr val="1F2937"/>
+                          </a:solidFill>
+                        </a:rPr>
+                        <a:t>估算总里程</a:t>
+                      </a:r>
+                    </a:p>
+                  </a:txBody>
+                  <a:tcPr marL="64008" marR="64008" marT="64008" marB="64008" anchor="ctr" anchorCtr="0" horzOverflow="overflow">
+                    <a:solidFill>
+                      <a:srgbClr val="FFFFFF"/>
+                    </a:solidFill>
+                  </a:tcPr>
+                </a:tc>
+                <a:tc>
+                  <a:txBody>
+                    <a:bodyPr/>
+                    <a:lstStyle/>
+                    <a:p>
+                      <a:pPr>
+                        <a:defRPr sz="2200">
+                          <a:solidFill>
+                            <a:srgbClr val="586577"/>
+                          </a:solidFill>
+                          <a:latin typeface="Microsoft YaHei"/>
+                          <a:ea typeface="Microsoft YaHei"/>
+                          <a:cs typeface="Microsoft YaHei"/>
+                          <a:sym typeface="Microsoft YaHei"/>
+                        </a:defRPr>
+                      </a:pPr>
+                      <a:r>
+                        <a:t>dws_taxi_overview.total_distance_km</a:t>
+                      </a:r>
+                    </a:p>
+                    <a:p>
+                      <a:pPr>
+                        <a:defRPr sz="2200">
+                          <a:solidFill>
+                            <a:srgbClr val="586577"/>
+                          </a:solidFill>
+                        </a:defRPr>
+                      </a:pPr>
+                      <a:r>
                         <a:t>最新 </a:t>
                       </a:r>
                       <a:r>
+                        <a:rPr>
+                          <a:latin typeface="Microsoft YaHei"/>
+                          <a:ea typeface="Microsoft YaHei"/>
+                          <a:cs typeface="Microsoft YaHei"/>
+                          <a:sym typeface="Microsoft YaHei"/>
+                        </a:rPr>
                         <a:t>stat_date</a:t>
                       </a:r>
                     </a:p>
@@ -9069,49 +9480,40 @@
                         </a:defRPr>
                       </a:pPr>
                       <a:r>
+                        <a:t>total_distance_km </a:t>
+                      </a:r>
+                      <a:r>
                         <a:rPr>
-                          <a:latin typeface="+mj-lt"/>
-                          <a:ea typeface="+mj-ea"/>
-                          <a:cs typeface="+mj-cs"/>
+                          <a:latin typeface="+mn-lt"/>
+                          <a:ea typeface="+mn-ea"/>
+                          <a:cs typeface="+mn-cs"/>
                           <a:sym typeface="Helvetica Neue"/>
                         </a:rPr>
-                        <a:t>直接读取最新统计日期的 </a:t>
-                      </a:r>
-                      <a:r>
-                        <a:t>active_taxis</a:t>
+                        <a:t>四舍五入保留 </a:t>
+                      </a:r>
+                      <a:r>
+                        <a:t>2 </a:t>
                       </a:r>
                       <a:r>
                         <a:rPr>
-                          <a:latin typeface="+mj-lt"/>
-                          <a:ea typeface="+mj-ea"/>
-                          <a:cs typeface="+mj-cs"/>
+                          <a:latin typeface="+mn-lt"/>
+                          <a:ea typeface="+mn-ea"/>
+                          <a:cs typeface="+mn-cs"/>
                           <a:sym typeface="Helvetica Neue"/>
                         </a:rPr>
-                        <a:t>；空值或 </a:t>
-                      </a:r>
-                      <a:r>
-                        <a:t>0 </a:t>
+                        <a:t>位小数，单位 </a:t>
+                      </a:r>
+                      <a:r>
+                        <a:t>km</a:t>
                       </a:r>
                       <a:r>
                         <a:rPr>
-                          <a:latin typeface="+mj-lt"/>
-                          <a:ea typeface="+mj-ea"/>
-                          <a:cs typeface="+mj-cs"/>
+                          <a:latin typeface="+mn-lt"/>
+                          <a:ea typeface="+mn-ea"/>
+                          <a:cs typeface="+mn-cs"/>
                           <a:sym typeface="Helvetica Neue"/>
                         </a:rPr>
-                        <a:t>时使用 </a:t>
-                      </a:r>
-                      <a:r>
-                        <a:t>fallback </a:t>
-                      </a:r>
-                      <a:r>
-                        <a:rPr>
-                          <a:latin typeface="+mj-lt"/>
-                          <a:ea typeface="+mj-ea"/>
-                          <a:cs typeface="+mj-cs"/>
-                          <a:sym typeface="Helvetica Neue"/>
-                        </a:rPr>
-                        <a:t>数据。</a:t>
+                        <a:t>。</a:t>
                       </a:r>
                     </a:p>
                   </a:txBody>
@@ -9128,8 +9530,14 @@
                     <a:bodyPr/>
                     <a:lstStyle/>
                     <a:p>
-                      <a:r>
-                        <a:t>总采样轨迹</a:t>
+                      <a:pPr/>
+                      <a:r>
+                        <a:rPr b="1" sz="2200">
+                          <a:solidFill>
+                            <a:srgbClr val="1F2937"/>
+                          </a:solidFill>
+                        </a:rPr>
+                        <a:t>平均车速</a:t>
                       </a:r>
                     </a:p>
                   </a:txBody>
@@ -9156,7 +9564,7 @@
                         </a:defRPr>
                       </a:pPr>
                       <a:r>
-                        <a:t>dws_taxi_overview.total_trips</a:t>
+                        <a:t>dws_taxi_overview.avg_speed_kmh</a:t>
                       </a:r>
                     </a:p>
                     <a:p>
@@ -9165,22 +9573,18 @@
                           <a:solidFill>
                             <a:srgbClr val="586577"/>
                           </a:solidFill>
+                        </a:defRPr>
+                      </a:pPr>
+                      <a:r>
+                        <a:t>最新 </a:t>
+                      </a:r>
+                      <a:r>
+                        <a:rPr>
                           <a:latin typeface="Microsoft YaHei"/>
                           <a:ea typeface="Microsoft YaHei"/>
                           <a:cs typeface="Microsoft YaHei"/>
                           <a:sym typeface="Microsoft YaHei"/>
-                        </a:defRPr>
-                      </a:pPr>
-                      <a:r>
-                        <a:rPr>
-                          <a:latin typeface="+mj-lt"/>
-                          <a:ea typeface="+mj-ea"/>
-                          <a:cs typeface="+mj-cs"/>
-                          <a:sym typeface="Helvetica Neue"/>
                         </a:rPr>
-                        <a:t>最新 </a:t>
-                      </a:r>
-                      <a:r>
                         <a:t>stat_date</a:t>
                       </a:r>
                     </a:p>
@@ -9208,37 +9612,40 @@
                         </a:defRPr>
                       </a:pPr>
                       <a:r>
+                        <a:t>avg_speed_kmh </a:t>
+                      </a:r>
+                      <a:r>
                         <a:rPr>
-                          <a:latin typeface="+mj-lt"/>
-                          <a:ea typeface="+mj-ea"/>
-                          <a:cs typeface="+mj-cs"/>
+                          <a:latin typeface="+mn-lt"/>
+                          <a:ea typeface="+mn-ea"/>
+                          <a:cs typeface="+mn-cs"/>
                           <a:sym typeface="Helvetica Neue"/>
                         </a:rPr>
-                        <a:t>直接读取 </a:t>
-                      </a:r>
-                      <a:r>
-                        <a:t>total_trips</a:t>
+                        <a:t>四舍五入保留 </a:t>
+                      </a:r>
+                      <a:r>
+                        <a:t>2 </a:t>
                       </a:r>
                       <a:r>
                         <a:rPr>
-                          <a:latin typeface="+mj-lt"/>
-                          <a:ea typeface="+mj-ea"/>
-                          <a:cs typeface="+mj-cs"/>
+                          <a:latin typeface="+mn-lt"/>
+                          <a:ea typeface="+mn-ea"/>
+                          <a:cs typeface="+mn-cs"/>
                           <a:sym typeface="Helvetica Neue"/>
                         </a:rPr>
-                        <a:t>，表示当前总览口径下的轨迹</a:t>
-                      </a:r>
-                      <a:r>
-                        <a:t>/</a:t>
+                        <a:t>位小数，单位 </a:t>
+                      </a:r>
+                      <a:r>
+                        <a:t>km/h</a:t>
                       </a:r>
                       <a:r>
                         <a:rPr>
-                          <a:latin typeface="+mj-lt"/>
-                          <a:ea typeface="+mj-ea"/>
-                          <a:cs typeface="+mj-cs"/>
+                          <a:latin typeface="+mn-lt"/>
+                          <a:ea typeface="+mn-ea"/>
+                          <a:cs typeface="+mn-cs"/>
                           <a:sym typeface="Helvetica Neue"/>
                         </a:rPr>
-                        <a:t>行程采样数量。</a:t>
+                        <a:t>。</a:t>
                       </a:r>
                     </a:p>
                   </a:txBody>
@@ -9255,8 +9662,52 @@
                     <a:bodyPr/>
                     <a:lstStyle/>
                     <a:p>
+                      <a:pPr/>
+                      <a:r>
+                        <a:rPr b="1" sz="2200">
+                          <a:solidFill>
+                            <a:srgbClr val="1F2937"/>
+                          </a:solidFill>
+                        </a:rPr>
+                        <a:t>路网健康度</a:t>
+                      </a:r>
+                    </a:p>
+                  </a:txBody>
+                  <a:tcPr marL="64008" marR="64008" marT="64008" marB="64008" anchor="ctr" anchorCtr="0" horzOverflow="overflow">
+                    <a:solidFill>
+                      <a:srgbClr val="FFFFFF"/>
+                    </a:solidFill>
+                  </a:tcPr>
+                </a:tc>
+                <a:tc>
+                  <a:txBody>
+                    <a:bodyPr/>
+                    <a:lstStyle/>
+                    <a:p>
+                      <a:pPr/>
+                      <a:r>
+                        <a:rPr sz="2200">
+                          <a:solidFill>
+                            <a:srgbClr val="586577"/>
+                          </a:solidFill>
+                        </a:rPr>
+                        <a:t>由平均车速派生</a:t>
+                      </a:r>
+                    </a:p>
+                  </a:txBody>
+                  <a:tcPr marL="64008" marR="64008" marT="64008" marB="64008" anchor="ctr" anchorCtr="0" horzOverflow="overflow">
+                    <a:solidFill>
+                      <a:srgbClr val="FFFFFF"/>
+                    </a:solidFill>
+                  </a:tcPr>
+                </a:tc>
+                <a:tc>
+                  <a:txBody>
+                    <a:bodyPr/>
+                    <a:lstStyle/>
+                    <a:p>
                       <a:pPr>
-                        <a:defRPr b="1" sz="2200">
+                        <a:defRPr sz="2200">
                           <a:solidFill>
                             <a:srgbClr val="1F2937"/>
                           </a:solidFill>
@@ -9267,13 +9718,171 @@
                         </a:defRPr>
                       </a:pPr>
                       <a:r>
+                        <a:t>healthScore = clamp(round(58 + avgSpeedKmh × 1.45), 45, 96)</a:t>
+                      </a:r>
+                      <a:r>
                         <a:rPr>
-                          <a:latin typeface="+mj-lt"/>
-                          <a:ea typeface="+mj-ea"/>
-                          <a:cs typeface="+mj-cs"/>
+                          <a:latin typeface="+mn-lt"/>
+                          <a:ea typeface="+mn-ea"/>
+                          <a:cs typeface="+mn-cs"/>
                           <a:sym typeface="Helvetica Neue"/>
                         </a:rPr>
-                        <a:t>估算总里程</a:t>
+                        <a:t>。</a:t>
+                      </a:r>
+                    </a:p>
+                    <a:p>
+                      <a:pPr>
+                        <a:defRPr sz="2200">
+                          <a:solidFill>
+                            <a:srgbClr val="1F2937"/>
+                          </a:solidFill>
+                        </a:defRPr>
+                      </a:pPr>
+                      <a:r>
+                        <a:t>用于把速度转成 </a:t>
+                      </a:r>
+                      <a:r>
+                        <a:rPr>
+                          <a:latin typeface="Microsoft YaHei"/>
+                          <a:ea typeface="Microsoft YaHei"/>
+                          <a:cs typeface="Microsoft YaHei"/>
+                          <a:sym typeface="Microsoft YaHei"/>
+                        </a:rPr>
+                        <a:t>0-100 </a:t>
+                      </a:r>
+                      <a:r>
+                        <a:t>风格的展示评分。</a:t>
+                      </a:r>
+                    </a:p>
+                  </a:txBody>
+                  <a:tcPr marL="64008" marR="64008" marT="64008" marB="64008" anchor="ctr" anchorCtr="0" horzOverflow="overflow">
+                    <a:solidFill>
+                      <a:srgbClr val="FFFFFF"/>
+                    </a:solidFill>
+                  </a:tcPr>
+                </a:tc>
+              </a:tr>
+              <a:tr h="1337310">
+                <a:tc>
+                  <a:txBody>
+                    <a:bodyPr/>
+                    <a:lstStyle/>
+                    <a:p>
+                      <a:pPr/>
+                      <a:r>
+                        <a:rPr b="1" sz="2200">
+                          <a:solidFill>
+                            <a:srgbClr val="1F2937"/>
+                          </a:solidFill>
+                        </a:rPr>
+                        <a:t>高峰小时</a:t>
+                      </a:r>
+                    </a:p>
+                  </a:txBody>
+                  <a:tcPr marL="64008" marR="64008" marT="64008" marB="64008" anchor="ctr" anchorCtr="0" horzOverflow="overflow">
+                    <a:solidFill>
+                      <a:srgbClr val="FAFCFE"/>
+                    </a:solidFill>
+                  </a:tcPr>
+                </a:tc>
+                <a:tc>
+                  <a:txBody>
+                    <a:bodyPr/>
+                    <a:lstStyle/>
+                    <a:p>
+                      <a:pPr>
+                        <a:defRPr sz="2200">
+                          <a:solidFill>
+                            <a:srgbClr val="586577"/>
+                          </a:solidFill>
+                          <a:latin typeface="Microsoft YaHei"/>
+                          <a:ea typeface="Microsoft YaHei"/>
+                          <a:cs typeface="Microsoft YaHei"/>
+                          <a:sym typeface="Microsoft YaHei"/>
+                        </a:defRPr>
+                      </a:pPr>
+                      <a:r>
+                        <a:t>dws_taxi_overview.peak_hour</a:t>
+                      </a:r>
+                    </a:p>
+                    <a:p>
+                      <a:pPr>
+                        <a:defRPr sz="2200">
+                          <a:solidFill>
+                            <a:srgbClr val="586577"/>
+                          </a:solidFill>
+                        </a:defRPr>
+                      </a:pPr>
+                      <a:r>
+                        <a:t>最新 </a:t>
+                      </a:r>
+                      <a:r>
+                        <a:rPr>
+                          <a:latin typeface="Microsoft YaHei"/>
+                          <a:ea typeface="Microsoft YaHei"/>
+                          <a:cs typeface="Microsoft YaHei"/>
+                          <a:sym typeface="Microsoft YaHei"/>
+                        </a:rPr>
+                        <a:t>stat_date</a:t>
+                      </a:r>
+                    </a:p>
+                  </a:txBody>
+                  <a:tcPr marL="64008" marR="64008" marT="64008" marB="64008" anchor="ctr" anchorCtr="0" horzOverflow="overflow">
+                    <a:solidFill>
+                      <a:srgbClr val="FAFCFE"/>
+                    </a:solidFill>
+                  </a:tcPr>
+                </a:tc>
+                <a:tc>
+                  <a:txBody>
+                    <a:bodyPr/>
+                    <a:lstStyle/>
+                    <a:p>
+                      <a:pPr>
+                        <a:defRPr sz="2200">
+                          <a:solidFill>
+                            <a:srgbClr val="1F2937"/>
+                          </a:solidFill>
+                        </a:defRPr>
+                      </a:pPr>
+                      <a:r>
+                        <a:t>直接读取 </a:t>
+                      </a:r>
+                      <a:r>
+                        <a:rPr>
+                          <a:latin typeface="Microsoft YaHei"/>
+                          <a:ea typeface="Microsoft YaHei"/>
+                          <a:cs typeface="Microsoft YaHei"/>
+                          <a:sym typeface="Microsoft YaHei"/>
+                        </a:rPr>
+                        <a:t>peak_hour</a:t>
+                      </a:r>
+                      <a:r>
+                        <a:t>，表示总览表已聚合出的峰值小时。</a:t>
+                      </a:r>
+                    </a:p>
+                  </a:txBody>
+                  <a:tcPr marL="64008" marR="64008" marT="64008" marB="64008" anchor="ctr" anchorCtr="0" horzOverflow="overflow">
+                    <a:solidFill>
+                      <a:srgbClr val="FAFCFE"/>
+                    </a:solidFill>
+                  </a:tcPr>
+                </a:tc>
+              </a:tr>
+              <a:tr h="1337310">
+                <a:tc>
+                  <a:txBody>
+                    <a:bodyPr/>
+                    <a:lstStyle/>
+                    <a:p>
+                      <a:pPr/>
+                      <a:r>
+                        <a:rPr b="1" sz="2200">
+                          <a:solidFill>
+                            <a:srgbClr val="1F2937"/>
+                          </a:solidFill>
+                        </a:rPr>
+                        <a:t>更新时间</a:t>
                       </a:r>
                     </a:p>
                   </a:txBody>
@@ -9300,32 +9909,16 @@
                         </a:defRPr>
                       </a:pPr>
                       <a:r>
-                        <a:t>dws_taxi_overview.total_distance_km</a:t>
-                      </a:r>
-                    </a:p>
-                    <a:p>
-                      <a:pPr>
-                        <a:defRPr sz="2200">
-                          <a:solidFill>
-                            <a:srgbClr val="586577"/>
-                          </a:solidFill>
-                          <a:latin typeface="Microsoft YaHei"/>
-                          <a:ea typeface="Microsoft YaHei"/>
-                          <a:cs typeface="Microsoft YaHei"/>
-                          <a:sym typeface="Microsoft YaHei"/>
-                        </a:defRPr>
-                      </a:pPr>
+                        <a:t>API </a:t>
+                      </a:r>
                       <a:r>
                         <a:rPr>
-                          <a:latin typeface="+mj-lt"/>
-                          <a:ea typeface="+mj-ea"/>
-                          <a:cs typeface="+mj-cs"/>
+                          <a:latin typeface="+mn-lt"/>
+                          <a:ea typeface="+mn-ea"/>
+                          <a:cs typeface="+mn-cs"/>
                           <a:sym typeface="Helvetica Neue"/>
                         </a:rPr>
-                        <a:t>最新 </a:t>
-                      </a:r>
-                      <a:r>
-                        <a:t>stat_date</a:t>
+                        <a:t>响应时间</a:t>
                       </a:r>
                     </a:p>
                   </a:txBody>
@@ -9352,298 +9945,17 @@
                         </a:defRPr>
                       </a:pPr>
                       <a:r>
-                        <a:t>total_distance_km </a:t>
+                        <a:t>updatedAt = new Date().toISOString()</a:t>
                       </a:r>
                       <a:r>
                         <a:rPr>
-                          <a:latin typeface="+mj-lt"/>
-                          <a:ea typeface="+mj-ea"/>
-                          <a:cs typeface="+mj-cs"/>
-                          <a:sym typeface="Helvetica Neue"/>
-                        </a:rPr>
-                        <a:t>四舍五入保留 </a:t>
-                      </a:r>
-                      <a:r>
-                        <a:t>2 </a:t>
-                      </a:r>
-                      <a:r>
-                        <a:rPr>
-                          <a:latin typeface="+mj-lt"/>
-                          <a:ea typeface="+mj-ea"/>
-                          <a:cs typeface="+mj-cs"/>
-                          <a:sym typeface="Helvetica Neue"/>
-                        </a:rPr>
-                        <a:t>位小数，单位 </a:t>
-                      </a:r>
-                      <a:r>
-                        <a:t>km</a:t>
-                      </a:r>
-                      <a:r>
-                        <a:rPr>
-                          <a:latin typeface="+mj-lt"/>
-                          <a:ea typeface="+mj-ea"/>
-                          <a:cs typeface="+mj-cs"/>
+                          <a:latin typeface="+mn-lt"/>
+                          <a:ea typeface="+mn-ea"/>
+                          <a:cs typeface="+mn-cs"/>
                           <a:sym typeface="Helvetica Neue"/>
                         </a:rPr>
                         <a:t>。</a:t>
                       </a:r>
-                    </a:p>
-                  </a:txBody>
-                  <a:tcPr marL="64008" marR="64008" marT="64008" marB="64008" anchor="ctr" anchorCtr="0" horzOverflow="overflow">
-                    <a:solidFill>
-                      <a:srgbClr val="FFFFFF"/>
-                    </a:solidFill>
-                  </a:tcPr>
-                </a:tc>
-              </a:tr>
-              <a:tr h="1337310">
-                <a:tc>
-                  <a:txBody>
-                    <a:bodyPr/>
-                    <a:lstStyle/>
-                    <a:p>
-                      <a:pPr>
-                        <a:defRPr b="1" sz="2200">
-                          <a:solidFill>
-                            <a:srgbClr val="1F2937"/>
-                          </a:solidFill>
-                          <a:latin typeface="Microsoft YaHei"/>
-                          <a:ea typeface="Microsoft YaHei"/>
-                          <a:cs typeface="Microsoft YaHei"/>
-                          <a:sym typeface="Microsoft YaHei"/>
-                        </a:defRPr>
-                      </a:pPr>
-                      <a:r>
-                        <a:rPr>
-                          <a:latin typeface="+mj-lt"/>
-                          <a:ea typeface="+mj-ea"/>
-                          <a:cs typeface="+mj-cs"/>
-                          <a:sym typeface="Helvetica Neue"/>
-                        </a:rPr>
-                        <a:t>平均车速</a:t>
-                      </a:r>
-                    </a:p>
-                  </a:txBody>
-                  <a:tcPr marL="64008" marR="64008" marT="64008" marB="64008" anchor="ctr" anchorCtr="0" horzOverflow="overflow">
-                    <a:solidFill>
-                      <a:srgbClr val="FAFCFE"/>
-                    </a:solidFill>
-                  </a:tcPr>
-                </a:tc>
-                <a:tc>
-                  <a:txBody>
-                    <a:bodyPr/>
-                    <a:lstStyle/>
-                    <a:p>
-                      <a:pPr>
-                        <a:defRPr sz="2200">
-                          <a:solidFill>
-                            <a:srgbClr val="586577"/>
-                          </a:solidFill>
-                          <a:latin typeface="Microsoft YaHei"/>
-                          <a:ea typeface="Microsoft YaHei"/>
-                          <a:cs typeface="Microsoft YaHei"/>
-                          <a:sym typeface="Microsoft YaHei"/>
-                        </a:defRPr>
-                      </a:pPr>
-                      <a:r>
-                        <a:t>dws_taxi_overview.avg_speed_kmh</a:t>
-                      </a:r>
-                    </a:p>
-                    <a:p>
-                      <a:pPr>
-                        <a:defRPr sz="2200">
-                          <a:solidFill>
-                            <a:srgbClr val="586577"/>
-                          </a:solidFill>
-                          <a:latin typeface="Microsoft YaHei"/>
-                          <a:ea typeface="Microsoft YaHei"/>
-                          <a:cs typeface="Microsoft YaHei"/>
-                          <a:sym typeface="Microsoft YaHei"/>
-                        </a:defRPr>
-                      </a:pPr>
-                      <a:r>
-                        <a:rPr>
-                          <a:latin typeface="+mj-lt"/>
-                          <a:ea typeface="+mj-ea"/>
-                          <a:cs typeface="+mj-cs"/>
-                          <a:sym typeface="Helvetica Neue"/>
-                        </a:rPr>
-                        <a:t>最新 </a:t>
-                      </a:r>
-                      <a:r>
-                        <a:t>stat_date</a:t>
-                      </a:r>
-                    </a:p>
-                  </a:txBody>
-                  <a:tcPr marL="64008" marR="64008" marT="64008" marB="64008" anchor="ctr" anchorCtr="0" horzOverflow="overflow">
-                    <a:solidFill>
-                      <a:srgbClr val="FAFCFE"/>
-                    </a:solidFill>
-                  </a:tcPr>
-                </a:tc>
-                <a:tc>
-                  <a:txBody>
-                    <a:bodyPr/>
-                    <a:lstStyle/>
-                    <a:p>
-                      <a:pPr>
-                        <a:defRPr sz="2200">
-                          <a:solidFill>
-                            <a:srgbClr val="1F2937"/>
-                          </a:solidFill>
-                          <a:latin typeface="Microsoft YaHei"/>
-                          <a:ea typeface="Microsoft YaHei"/>
-                          <a:cs typeface="Microsoft YaHei"/>
-                          <a:sym typeface="Microsoft YaHei"/>
-                        </a:defRPr>
-                      </a:pPr>
-                      <a:r>
-                        <a:t>avg_speed_kmh </a:t>
-                      </a:r>
-                      <a:r>
-                        <a:rPr>
-                          <a:latin typeface="+mj-lt"/>
-                          <a:ea typeface="+mj-ea"/>
-                          <a:cs typeface="+mj-cs"/>
-                          <a:sym typeface="Helvetica Neue"/>
-                        </a:rPr>
-                        <a:t>四舍五入保留 </a:t>
-                      </a:r>
-                      <a:r>
-                        <a:t>2 </a:t>
-                      </a:r>
-                      <a:r>
-                        <a:rPr>
-                          <a:latin typeface="+mj-lt"/>
-                          <a:ea typeface="+mj-ea"/>
-                          <a:cs typeface="+mj-cs"/>
-                          <a:sym typeface="Helvetica Neue"/>
-                        </a:rPr>
-                        <a:t>位小数，单位 </a:t>
-                      </a:r>
-                      <a:r>
-                        <a:t>km/h</a:t>
-                      </a:r>
-                      <a:r>
-                        <a:rPr>
-                          <a:latin typeface="+mj-lt"/>
-                          <a:ea typeface="+mj-ea"/>
-                          <a:cs typeface="+mj-cs"/>
-                          <a:sym typeface="Helvetica Neue"/>
-                        </a:rPr>
-                        <a:t>。</a:t>
-                      </a:r>
-                    </a:p>
-                  </a:txBody>
-                  <a:tcPr marL="64008" marR="64008" marT="64008" marB="64008" anchor="ctr" anchorCtr="0" horzOverflow="overflow">
-                    <a:solidFill>
-                      <a:srgbClr val="FAFCFE"/>
-                    </a:solidFill>
-                  </a:tcPr>
-                </a:tc>
-              </a:tr>
-              <a:tr h="1337310">
-                <a:tc>
-                  <a:txBody>
-                    <a:bodyPr/>
-                    <a:lstStyle/>
-                    <a:p>
-                      <a:pPr>
-                        <a:defRPr b="1" sz="2200">
-                          <a:solidFill>
-                            <a:srgbClr val="1F2937"/>
-                          </a:solidFill>
-                          <a:latin typeface="Microsoft YaHei"/>
-                          <a:ea typeface="Microsoft YaHei"/>
-                          <a:cs typeface="Microsoft YaHei"/>
-                          <a:sym typeface="Microsoft YaHei"/>
-                        </a:defRPr>
-                      </a:pPr>
-                      <a:r>
-                        <a:rPr>
-                          <a:latin typeface="+mj-lt"/>
-                          <a:ea typeface="+mj-ea"/>
-                          <a:cs typeface="+mj-cs"/>
-                          <a:sym typeface="Helvetica Neue"/>
-                        </a:rPr>
-                        <a:t>路网健康度</a:t>
-                      </a:r>
-                    </a:p>
-                  </a:txBody>
-                  <a:tcPr marL="64008" marR="64008" marT="64008" marB="64008" anchor="ctr" anchorCtr="0" horzOverflow="overflow">
-                    <a:solidFill>
-                      <a:srgbClr val="FFFFFF"/>
-                    </a:solidFill>
-                  </a:tcPr>
-                </a:tc>
-                <a:tc>
-                  <a:txBody>
-                    <a:bodyPr/>
-                    <a:lstStyle/>
-                    <a:p>
-                      <a:pPr>
-                        <a:defRPr sz="2200">
-                          <a:solidFill>
-                            <a:srgbClr val="586577"/>
-                          </a:solidFill>
-                          <a:latin typeface="Microsoft YaHei"/>
-                          <a:ea typeface="Microsoft YaHei"/>
-                          <a:cs typeface="Microsoft YaHei"/>
-                          <a:sym typeface="Microsoft YaHei"/>
-                        </a:defRPr>
-                      </a:pPr>
-                      <a:r>
-                        <a:rPr>
-                          <a:latin typeface="+mj-lt"/>
-                          <a:ea typeface="+mj-ea"/>
-                          <a:cs typeface="+mj-cs"/>
-                          <a:sym typeface="Helvetica Neue"/>
-                        </a:rPr>
-                        <a:t>由平均车速派生</a:t>
-                      </a:r>
-                    </a:p>
-                  </a:txBody>
-                  <a:tcPr marL="64008" marR="64008" marT="64008" marB="64008" anchor="ctr" anchorCtr="0" horzOverflow="overflow">
-                    <a:solidFill>
-                      <a:srgbClr val="FFFFFF"/>
-                    </a:solidFill>
-                  </a:tcPr>
-                </a:tc>
-                <a:tc>
-                  <a:txBody>
-                    <a:bodyPr/>
-                    <a:lstStyle/>
-                    <a:p>
-                      <a:pPr>
-                        <a:defRPr sz="2200">
-                          <a:solidFill>
-                            <a:srgbClr val="1F2937"/>
-                          </a:solidFill>
-                          <a:latin typeface="Microsoft YaHei"/>
-                          <a:ea typeface="Microsoft YaHei"/>
-                          <a:cs typeface="Microsoft YaHei"/>
-                          <a:sym typeface="Microsoft YaHei"/>
-                        </a:defRPr>
-                      </a:pPr>
-                      <a:r>
-                        <a:t>healthScore = clamp(round(58 + avgSpeedKmh × 1.45), 45, 96)</a:t>
-                      </a:r>
-                      <a:r>
-                        <a:rPr>
-                          <a:latin typeface="+mj-lt"/>
-                          <a:ea typeface="+mj-ea"/>
-                          <a:cs typeface="+mj-cs"/>
-                          <a:sym typeface="Helvetica Neue"/>
-                        </a:rPr>
-                        <a:t>。</a:t>
-                      </a:r>
-                      <a:endParaRPr>
-                        <a:latin typeface="+mj-lt"/>
-                        <a:ea typeface="+mj-ea"/>
-                        <a:cs typeface="+mj-cs"/>
-                        <a:sym typeface="Helvetica Neue"/>
-                      </a:endParaRPr>
                     </a:p>
                     <a:p>
                       <a:pPr>
@@ -9651,322 +9963,33 @@
                           <a:solidFill>
                             <a:srgbClr val="1F2937"/>
                           </a:solidFill>
+                        </a:defRPr>
+                      </a:pPr>
+                      <a:r>
+                        <a:t>注意：这是接口生成</a:t>
+                      </a:r>
+                      <a:r>
+                        <a:rPr>
                           <a:latin typeface="Microsoft YaHei"/>
                           <a:ea typeface="Microsoft YaHei"/>
                           <a:cs typeface="Microsoft YaHei"/>
                           <a:sym typeface="Microsoft YaHei"/>
-                        </a:defRPr>
-                      </a:pPr>
+                        </a:rPr>
+                        <a:t>/</a:t>
+                      </a:r>
+                      <a:r>
+                        <a:t>缓存刷新时间，不是底层业务 </a:t>
+                      </a:r>
                       <a:r>
                         <a:rPr>
-                          <a:latin typeface="+mj-lt"/>
-                          <a:ea typeface="+mj-ea"/>
-                          <a:cs typeface="+mj-cs"/>
-                          <a:sym typeface="Helvetica Neue"/>
-                        </a:rPr>
-                        <a:t>用于把速度转成 </a:t>
-                      </a:r>
-                      <a:r>
-                        <a:t>0-100 </a:t>
-                      </a:r>
-                      <a:r>
-                        <a:rPr>
-                          <a:latin typeface="+mj-lt"/>
-                          <a:ea typeface="+mj-ea"/>
-                          <a:cs typeface="+mj-cs"/>
-                          <a:sym typeface="Helvetica Neue"/>
-                        </a:rPr>
-                        <a:t>风格的展示评分。</a:t>
-                      </a:r>
-                    </a:p>
-                  </a:txBody>
-                  <a:tcPr marL="64008" marR="64008" marT="64008" marB="64008" anchor="ctr" anchorCtr="0" horzOverflow="overflow">
-                    <a:solidFill>
-                      <a:srgbClr val="FFFFFF"/>
-                    </a:solidFill>
-                  </a:tcPr>
-                </a:tc>
-              </a:tr>
-              <a:tr h="1337310">
-                <a:tc>
-                  <a:txBody>
-                    <a:bodyPr/>
-                    <a:lstStyle/>
-                    <a:p>
-                      <a:pPr>
-                        <a:defRPr b="1" sz="2200">
-                          <a:solidFill>
-                            <a:srgbClr val="1F2937"/>
-                          </a:solidFill>
                           <a:latin typeface="Microsoft YaHei"/>
                           <a:ea typeface="Microsoft YaHei"/>
                           <a:cs typeface="Microsoft YaHei"/>
                           <a:sym typeface="Microsoft YaHei"/>
-                        </a:defRPr>
-                      </a:pPr>
-                      <a:r>
-                        <a:rPr>
-                          <a:latin typeface="+mj-lt"/>
-                          <a:ea typeface="+mj-ea"/>
-                          <a:cs typeface="+mj-cs"/>
-                          <a:sym typeface="Helvetica Neue"/>
                         </a:rPr>
-                        <a:t>高峰小时</a:t>
-                      </a:r>
-                    </a:p>
-                  </a:txBody>
-                  <a:tcPr marL="64008" marR="64008" marT="64008" marB="64008" anchor="ctr" anchorCtr="0" horzOverflow="overflow">
-                    <a:solidFill>
-                      <a:srgbClr val="FAFCFE"/>
-                    </a:solidFill>
-                  </a:tcPr>
-                </a:tc>
-                <a:tc>
-                  <a:txBody>
-                    <a:bodyPr/>
-                    <a:lstStyle/>
-                    <a:p>
-                      <a:pPr>
-                        <a:defRPr sz="2200">
-                          <a:solidFill>
-                            <a:srgbClr val="586577"/>
-                          </a:solidFill>
-                          <a:latin typeface="Microsoft YaHei"/>
-                          <a:ea typeface="Microsoft YaHei"/>
-                          <a:cs typeface="Microsoft YaHei"/>
-                          <a:sym typeface="Microsoft YaHei"/>
-                        </a:defRPr>
-                      </a:pPr>
-                      <a:r>
-                        <a:t>dws_taxi_overview.peak_hour</a:t>
-                      </a:r>
-                    </a:p>
-                    <a:p>
-                      <a:pPr>
-                        <a:defRPr sz="2200">
-                          <a:solidFill>
-                            <a:srgbClr val="586577"/>
-                          </a:solidFill>
-                          <a:latin typeface="Microsoft YaHei"/>
-                          <a:ea typeface="Microsoft YaHei"/>
-                          <a:cs typeface="Microsoft YaHei"/>
-                          <a:sym typeface="Microsoft YaHei"/>
-                        </a:defRPr>
-                      </a:pPr>
-                      <a:r>
-                        <a:rPr>
-                          <a:latin typeface="+mj-lt"/>
-                          <a:ea typeface="+mj-ea"/>
-                          <a:cs typeface="+mj-cs"/>
-                          <a:sym typeface="Helvetica Neue"/>
-                        </a:rPr>
-                        <a:t>最新 </a:t>
-                      </a:r>
-                      <a:r>
                         <a:t>stat_date</a:t>
                       </a:r>
-                    </a:p>
-                  </a:txBody>
-                  <a:tcPr marL="64008" marR="64008" marT="64008" marB="64008" anchor="ctr" anchorCtr="0" horzOverflow="overflow">
-                    <a:solidFill>
-                      <a:srgbClr val="FAFCFE"/>
-                    </a:solidFill>
-                  </a:tcPr>
-                </a:tc>
-                <a:tc>
-                  <a:txBody>
-                    <a:bodyPr/>
-                    <a:lstStyle/>
-                    <a:p>
-                      <a:pPr>
-                        <a:defRPr sz="2200">
-                          <a:solidFill>
-                            <a:srgbClr val="1F2937"/>
-                          </a:solidFill>
-                          <a:latin typeface="Microsoft YaHei"/>
-                          <a:ea typeface="Microsoft YaHei"/>
-                          <a:cs typeface="Microsoft YaHei"/>
-                          <a:sym typeface="Microsoft YaHei"/>
-                        </a:defRPr>
-                      </a:pPr>
-                      <a:r>
-                        <a:rPr>
-                          <a:latin typeface="+mj-lt"/>
-                          <a:ea typeface="+mj-ea"/>
-                          <a:cs typeface="+mj-cs"/>
-                          <a:sym typeface="Helvetica Neue"/>
-                        </a:rPr>
-                        <a:t>直接读取 </a:t>
-                      </a:r>
-                      <a:r>
-                        <a:t>peak_hour</a:t>
-                      </a:r>
-                      <a:r>
-                        <a:rPr>
-                          <a:latin typeface="+mj-lt"/>
-                          <a:ea typeface="+mj-ea"/>
-                          <a:cs typeface="+mj-cs"/>
-                          <a:sym typeface="Helvetica Neue"/>
-                        </a:rPr>
-                        <a:t>，表示总览表已聚合出的峰值小时。</a:t>
-                      </a:r>
-                    </a:p>
-                  </a:txBody>
-                  <a:tcPr marL="64008" marR="64008" marT="64008" marB="64008" anchor="ctr" anchorCtr="0" horzOverflow="overflow">
-                    <a:solidFill>
-                      <a:srgbClr val="FAFCFE"/>
-                    </a:solidFill>
-                  </a:tcPr>
-                </a:tc>
-              </a:tr>
-              <a:tr h="1337310">
-                <a:tc>
-                  <a:txBody>
-                    <a:bodyPr/>
-                    <a:lstStyle/>
-                    <a:p>
-                      <a:pPr>
-                        <a:defRPr b="1" sz="2200">
-                          <a:solidFill>
-                            <a:srgbClr val="1F2937"/>
-                          </a:solidFill>
-                          <a:latin typeface="Microsoft YaHei"/>
-                          <a:ea typeface="Microsoft YaHei"/>
-                          <a:cs typeface="Microsoft YaHei"/>
-                          <a:sym typeface="Microsoft YaHei"/>
-                        </a:defRPr>
-                      </a:pPr>
-                      <a:r>
-                        <a:rPr>
-                          <a:latin typeface="+mj-lt"/>
-                          <a:ea typeface="+mj-ea"/>
-                          <a:cs typeface="+mj-cs"/>
-                          <a:sym typeface="Helvetica Neue"/>
-                        </a:rPr>
-                        <a:t>更新时间</a:t>
-                      </a:r>
-                    </a:p>
-                  </a:txBody>
-                  <a:tcPr marL="64008" marR="64008" marT="64008" marB="64008" anchor="ctr" anchorCtr="0" horzOverflow="overflow">
-                    <a:solidFill>
-                      <a:srgbClr val="FFFFFF"/>
-                    </a:solidFill>
-                  </a:tcPr>
-                </a:tc>
-                <a:tc>
-                  <a:txBody>
-                    <a:bodyPr/>
-                    <a:lstStyle/>
-                    <a:p>
-                      <a:pPr>
-                        <a:defRPr sz="2200">
-                          <a:solidFill>
-                            <a:srgbClr val="586577"/>
-                          </a:solidFill>
-                          <a:latin typeface="Microsoft YaHei"/>
-                          <a:ea typeface="Microsoft YaHei"/>
-                          <a:cs typeface="Microsoft YaHei"/>
-                          <a:sym typeface="Microsoft YaHei"/>
-                        </a:defRPr>
-                      </a:pPr>
-                      <a:r>
-                        <a:t>API </a:t>
-                      </a:r>
-                      <a:r>
-                        <a:rPr>
-                          <a:latin typeface="+mj-lt"/>
-                          <a:ea typeface="+mj-ea"/>
-                          <a:cs typeface="+mj-cs"/>
-                          <a:sym typeface="Helvetica Neue"/>
-                        </a:rPr>
-                        <a:t>响应时间</a:t>
-                      </a:r>
-                    </a:p>
-                  </a:txBody>
-                  <a:tcPr marL="64008" marR="64008" marT="64008" marB="64008" anchor="ctr" anchorCtr="0" horzOverflow="overflow">
-                    <a:solidFill>
-                      <a:srgbClr val="FFFFFF"/>
-                    </a:solidFill>
-                  </a:tcPr>
-                </a:tc>
-                <a:tc>
-                  <a:txBody>
-                    <a:bodyPr/>
-                    <a:lstStyle/>
-                    <a:p>
-                      <a:pPr>
-                        <a:defRPr sz="2200">
-                          <a:solidFill>
-                            <a:srgbClr val="1F2937"/>
-                          </a:solidFill>
-                          <a:latin typeface="Microsoft YaHei"/>
-                          <a:ea typeface="Microsoft YaHei"/>
-                          <a:cs typeface="Microsoft YaHei"/>
-                          <a:sym typeface="Microsoft YaHei"/>
-                        </a:defRPr>
-                      </a:pPr>
-                      <a:r>
-                        <a:t>updatedAt = new Date().toISOString()</a:t>
-                      </a:r>
-                      <a:r>
-                        <a:rPr>
-                          <a:latin typeface="+mj-lt"/>
-                          <a:ea typeface="+mj-ea"/>
-                          <a:cs typeface="+mj-cs"/>
-                          <a:sym typeface="Helvetica Neue"/>
-                        </a:rPr>
-                        <a:t>。</a:t>
-                      </a:r>
-                      <a:endParaRPr>
-                        <a:latin typeface="+mj-lt"/>
-                        <a:ea typeface="+mj-ea"/>
-                        <a:cs typeface="+mj-cs"/>
-                        <a:sym typeface="Helvetica Neue"/>
-                      </a:endParaRPr>
-                    </a:p>
-                    <a:p>
-                      <a:pPr>
-                        <a:defRPr sz="2200">
-                          <a:solidFill>
-                            <a:srgbClr val="1F2937"/>
-                          </a:solidFill>
-                          <a:latin typeface="Microsoft YaHei"/>
-                          <a:ea typeface="Microsoft YaHei"/>
-                          <a:cs typeface="Microsoft YaHei"/>
-                          <a:sym typeface="Microsoft YaHei"/>
-                        </a:defRPr>
-                      </a:pPr>
-                      <a:r>
-                        <a:rPr>
-                          <a:latin typeface="+mj-lt"/>
-                          <a:ea typeface="+mj-ea"/>
-                          <a:cs typeface="+mj-cs"/>
-                          <a:sym typeface="Helvetica Neue"/>
-                        </a:rPr>
-                        <a:t>注意：这是接口生成</a:t>
-                      </a:r>
-                      <a:r>
-                        <a:t>/</a:t>
-                      </a:r>
-                      <a:r>
-                        <a:rPr>
-                          <a:latin typeface="+mj-lt"/>
-                          <a:ea typeface="+mj-ea"/>
-                          <a:cs typeface="+mj-cs"/>
-                          <a:sym typeface="Helvetica Neue"/>
-                        </a:rPr>
-                        <a:t>缓存刷新时间，不是底层业务 </a:t>
-                      </a:r>
-                      <a:r>
-                        <a:t>stat_date</a:t>
-                      </a:r>
-                      <a:r>
-                        <a:rPr>
-                          <a:latin typeface="+mj-lt"/>
-                          <a:ea typeface="+mj-ea"/>
-                          <a:cs typeface="+mj-cs"/>
-                          <a:sym typeface="Helvetica Neue"/>
-                        </a:rPr>
+                      <a:r>
                         <a:t>。</a:t>
                       </a:r>
                     </a:p>
@@ -10010,7 +10033,7 @@
       </p:grpSpPr>
       <p:sp>
         <p:nvSpPr>
-          <p:cNvPr id="259" name="Rectangle 1"/>
+          <p:cNvPr id="260" name="Rectangle 1"/>
           <p:cNvSpPr/>
           <p:nvPr/>
         </p:nvSpPr>
@@ -10038,6 +10061,10 @@
                 <a:solidFill>
                   <a:srgbClr val="FFFFFF"/>
                 </a:solidFill>
+                <a:latin typeface="+mn-lt"/>
+                <a:ea typeface="+mn-ea"/>
+                <a:cs typeface="+mn-cs"/>
+                <a:sym typeface="Helvetica Neue"/>
               </a:defRPr>
             </a:pPr>
           </a:p>
@@ -10045,7 +10072,7 @@
       </p:sp>
       <p:sp>
         <p:nvSpPr>
-          <p:cNvPr id="260" name="Rectangle 2"/>
+          <p:cNvPr id="261" name="Rectangle 2"/>
           <p:cNvSpPr/>
           <p:nvPr/>
         </p:nvSpPr>
@@ -10073,6 +10100,10 @@
                 <a:solidFill>
                   <a:srgbClr val="FFFFFF"/>
                 </a:solidFill>
+                <a:latin typeface="+mn-lt"/>
+                <a:ea typeface="+mn-ea"/>
+                <a:cs typeface="+mn-cs"/>
+                <a:sym typeface="Helvetica Neue"/>
               </a:defRPr>
             </a:pPr>
           </a:p>
@@ -10080,14 +10111,14 @@
       </p:sp>
       <p:sp>
         <p:nvSpPr>
-          <p:cNvPr id="261" name="Rectangle 3"/>
+          <p:cNvPr id="262" name="Rectangle 3"/>
           <p:cNvSpPr/>
           <p:nvPr/>
         </p:nvSpPr>
         <p:spPr>
           <a:xfrm>
             <a:off x="0" y="1325880"/>
-            <a:ext cx="24384000" cy="73153"/>
+            <a:ext cx="24384000" cy="73154"/>
           </a:xfrm>
           <a:prstGeom prst="rect">
             <a:avLst/>
@@ -10108,6 +10139,10 @@
                 <a:solidFill>
                   <a:srgbClr val="FFFFFF"/>
                 </a:solidFill>
+                <a:latin typeface="+mn-lt"/>
+                <a:ea typeface="+mn-ea"/>
+                <a:cs typeface="+mn-cs"/>
+                <a:sym typeface="Helvetica Neue"/>
               </a:defRPr>
             </a:pPr>
           </a:p>
@@ -10115,13 +10150,13 @@
       </p:sp>
       <p:sp>
         <p:nvSpPr>
-          <p:cNvPr id="262" name="TextBox 4"/>
+          <p:cNvPr id="263" name="TextBox 4"/>
           <p:cNvSpPr txBox="1"/>
           <p:nvPr/>
         </p:nvSpPr>
         <p:spPr>
           <a:xfrm>
-            <a:off x="914400" y="256031"/>
+            <a:off x="914399" y="256030"/>
             <a:ext cx="5283513" cy="533401"/>
           </a:xfrm>
           <a:prstGeom prst="rect">
@@ -10147,31 +10182,25 @@
                 <a:solidFill>
                   <a:srgbClr val="FFFFFF"/>
                 </a:solidFill>
+                <a:latin typeface="+mn-lt"/>
+                <a:ea typeface="+mn-ea"/>
+                <a:cs typeface="+mn-cs"/>
+                <a:sym typeface="Helvetica Neue"/>
+              </a:defRPr>
+            </a:pPr>
+            <a:r>
+              <a:t>计算口径 </a:t>
+            </a:r>
+            <a:r>
+              <a:rPr>
                 <a:latin typeface="Microsoft YaHei"/>
                 <a:ea typeface="Microsoft YaHei"/>
                 <a:cs typeface="Microsoft YaHei"/>
                 <a:sym typeface="Microsoft YaHei"/>
-              </a:defRPr>
-            </a:pPr>
-            <a:r>
-              <a:rPr>
-                <a:latin typeface="+mj-lt"/>
-                <a:ea typeface="+mj-ea"/>
-                <a:cs typeface="+mj-cs"/>
-                <a:sym typeface="Helvetica Neue"/>
               </a:rPr>
-              <a:t>计算口径 </a:t>
-            </a:r>
-            <a:r>
               <a:t>2</a:t>
             </a:r>
             <a:r>
-              <a:rPr>
-                <a:latin typeface="+mj-lt"/>
-                <a:ea typeface="+mj-ea"/>
-                <a:cs typeface="+mj-cs"/>
-                <a:sym typeface="Helvetica Neue"/>
-              </a:rPr>
               <a:t>：趋势、热点与拥堵</a:t>
             </a:r>
           </a:p>
@@ -10179,14 +10208,14 @@
       </p:sp>
       <p:sp>
         <p:nvSpPr>
-          <p:cNvPr id="263" name="TextBox 5"/>
+          <p:cNvPr id="264" name="TextBox 5"/>
           <p:cNvSpPr txBox="1"/>
           <p:nvPr/>
         </p:nvSpPr>
         <p:spPr>
           <a:xfrm>
-            <a:off x="22149550" y="347472"/>
-            <a:ext cx="1030491" cy="320041"/>
+            <a:off x="22149550" y="347473"/>
+            <a:ext cx="1030489" cy="320039"/>
           </a:xfrm>
           <a:prstGeom prst="rect">
             <a:avLst/>
@@ -10201,7 +10230,7 @@
           </a:extLst>
         </p:spPr>
         <p:txBody>
-          <a:bodyPr wrap="none" lIns="45719" rIns="45719">
+          <a:bodyPr wrap="none" lIns="45718" tIns="45718" rIns="45718" bIns="45718">
             <a:spAutoFit/>
           </a:bodyPr>
           <a:lstStyle/>
@@ -10222,9 +10251,9 @@
             </a:r>
             <a:r>
               <a:rPr>
-                <a:latin typeface="+mj-lt"/>
-                <a:ea typeface="+mj-ea"/>
-                <a:cs typeface="+mj-cs"/>
+                <a:latin typeface="+mn-lt"/>
+                <a:ea typeface="+mn-ea"/>
+                <a:cs typeface="+mn-cs"/>
                 <a:sym typeface="Helvetica Neue"/>
               </a:rPr>
               <a:t>分析表</a:t>
@@ -10234,13 +10263,13 @@
       </p:sp>
       <p:graphicFrame>
         <p:nvGraphicFramePr>
-          <p:cNvPr id="264" name="Table 6"/>
+          <p:cNvPr id="265" name="Table 6"/>
           <p:cNvGraphicFramePr/>
           <p:nvPr/>
         </p:nvGraphicFramePr>
         <p:xfrm>
-          <a:off x="822960" y="1874518"/>
-          <a:ext cx="22722840" cy="10698482"/>
+          <a:off x="822960" y="1874517"/>
+          <a:ext cx="22722840" cy="10698483"/>
         </p:xfrm>
         <a:graphic xmlns:a="http://schemas.openxmlformats.org/drawingml/2006/main">
           <a:graphicData uri="http://schemas.openxmlformats.org/drawingml/2006/table">
@@ -10260,22 +10289,17 @@
                     <a:lstStyle/>
                     <a:p>
                       <a:pPr>
-                        <a:defRPr sz="2200">
+                        <a:defRPr b="0">
+                          <a:solidFill>
+                            <a:srgbClr val="000000"/>
+                          </a:solidFill>
+                        </a:defRPr>
+                      </a:pPr>
+                      <a:r>
+                        <a:rPr b="1" sz="2200">
                           <a:solidFill>
                             <a:srgbClr val="16314E"/>
                           </a:solidFill>
-                          <a:latin typeface="Microsoft YaHei"/>
-                          <a:ea typeface="Microsoft YaHei"/>
-                          <a:cs typeface="Microsoft YaHei"/>
-                          <a:sym typeface="Microsoft YaHei"/>
-                        </a:defRPr>
-                      </a:pPr>
-                      <a:r>
-                        <a:rPr>
-                          <a:latin typeface="+mj-lt"/>
-                          <a:ea typeface="+mj-ea"/>
-                          <a:cs typeface="+mj-cs"/>
-                          <a:sym typeface="Helvetica Neue"/>
                         </a:rPr>
                         <a:t>数据项</a:t>
                       </a:r>
@@ -10297,31 +10321,21 @@
                           <a:solidFill>
                             <a:srgbClr val="16314E"/>
                           </a:solidFill>
+                        </a:defRPr>
+                      </a:pPr>
+                      <a:r>
+                        <a:t>来源字段 </a:t>
+                      </a:r>
+                      <a:r>
+                        <a:rPr>
                           <a:latin typeface="Microsoft YaHei"/>
                           <a:ea typeface="Microsoft YaHei"/>
                           <a:cs typeface="Microsoft YaHei"/>
                           <a:sym typeface="Microsoft YaHei"/>
-                        </a:defRPr>
-                      </a:pPr>
-                      <a:r>
-                        <a:rPr>
-                          <a:latin typeface="+mj-lt"/>
-                          <a:ea typeface="+mj-ea"/>
-                          <a:cs typeface="+mj-cs"/>
-                          <a:sym typeface="Helvetica Neue"/>
                         </a:rPr>
-                        <a:t>来源字段 </a:t>
-                      </a:r>
-                      <a:r>
                         <a:t>/ </a:t>
                       </a:r>
                       <a:r>
-                        <a:rPr>
-                          <a:latin typeface="+mj-lt"/>
-                          <a:ea typeface="+mj-ea"/>
-                          <a:cs typeface="+mj-cs"/>
-                          <a:sym typeface="Helvetica Neue"/>
-                        </a:rPr>
                         <a:t>数据表</a:t>
                       </a:r>
                     </a:p>
@@ -10342,31 +10356,21 @@
                           <a:solidFill>
                             <a:srgbClr val="16314E"/>
                           </a:solidFill>
+                        </a:defRPr>
+                      </a:pPr>
+                      <a:r>
+                        <a:t>计算方式 </a:t>
+                      </a:r>
+                      <a:r>
+                        <a:rPr>
                           <a:latin typeface="Microsoft YaHei"/>
                           <a:ea typeface="Microsoft YaHei"/>
                           <a:cs typeface="Microsoft YaHei"/>
                           <a:sym typeface="Microsoft YaHei"/>
-                        </a:defRPr>
-                      </a:pPr>
-                      <a:r>
-                        <a:rPr>
-                          <a:latin typeface="+mj-lt"/>
-                          <a:ea typeface="+mj-ea"/>
-                          <a:cs typeface="+mj-cs"/>
-                          <a:sym typeface="Helvetica Neue"/>
                         </a:rPr>
-                        <a:t>计算方式 </a:t>
-                      </a:r>
-                      <a:r>
                         <a:t>/ </a:t>
                       </a:r>
                       <a:r>
-                        <a:rPr>
-                          <a:latin typeface="+mj-lt"/>
-                          <a:ea typeface="+mj-ea"/>
-                          <a:cs typeface="+mj-cs"/>
-                          <a:sym typeface="Helvetica Neue"/>
-                        </a:rPr>
                         <a:t>口径说明</a:t>
                       </a:r>
                     </a:p>
@@ -10384,6 +10388,7 @@
                     <a:bodyPr/>
                     <a:lstStyle/>
                     <a:p>
+                      <a:pPr/>
                       <a:r>
                         <a:t>趋势图（覆盖路段）</a:t>
                       </a:r>
@@ -10400,13 +10405,10 @@
                     <a:bodyPr/>
                     <a:lstStyle/>
                     <a:p>
-                      <a:r>
-                        <a:t>dws_road_traffic</a:t>
-                      </a:r>
-                    </a:p>
-                    <a:p>
-                      <a:r>
-                        <a:t>最近24个小时点</a:t>
+                      <a:pPr/>
+                      <a:r>
+                        <a:t>dws_road_traffic
+最近24个小时点</a:t>
                       </a:r>
                     </a:p>
                   </a:txBody>
@@ -10421,18 +10423,11 @@
                     <a:bodyPr/>
                     <a:lstStyle/>
                     <a:p>
-                      <a:r>
-                        <a:t>按 stat_date DESC、stat_hour DESC 取最近 24 条，再按时间正序展示。</a:t>
-                      </a:r>
-                    </a:p>
-                    <a:p>
-                      <a:r>
-                        <a:t>hour 单日显示 HH:00，跨日期显示 MM/DD HH:00。</a:t>
-                      </a:r>
-                    </a:p>
-                    <a:p>
-                      <a:r>
-                        <a:t>覆盖路段数 = total_roads；avgSpeed = avg_speed_kmh。</a:t>
+                      <a:pPr/>
+                      <a:r>
+                        <a:t>按 stat_date DESC、stat_hour DESC 取最近 24 条，再按时间正序展示。
+hour 单日显示 HH:00，跨日期显示 MM/DD HH:00。
+覆盖路段数 = total_roads；avgSpeed = avg_speed_kmh。</a:t>
                       </a:r>
                     </a:p>
                   </a:txBody>
@@ -10449,10 +10444,32 @@
                     <a:bodyPr/>
                     <a:lstStyle/>
                     <a:p>
-                      <a:pPr>
-                        <a:defRPr b="1" sz="2200">
+                      <a:pPr/>
+                      <a:r>
+                        <a:rPr b="1" sz="2200">
                           <a:solidFill>
                             <a:srgbClr val="1F2937"/>
+                          </a:solidFill>
+                        </a:rPr>
+                        <a:t>趋势拥堵度</a:t>
+                      </a:r>
+                    </a:p>
+                  </a:txBody>
+                  <a:tcPr marL="64008" marR="64008" marT="64008" marB="64008" anchor="ctr" anchorCtr="0" horzOverflow="overflow">
+                    <a:solidFill>
+                      <a:srgbClr val="FAFCFE"/>
+                    </a:solidFill>
+                  </a:tcPr>
+                </a:tc>
+                <a:tc>
+                  <a:txBody>
+                    <a:bodyPr/>
+                    <a:lstStyle/>
+                    <a:p>
+                      <a:pPr>
+                        <a:defRPr sz="2200">
+                          <a:solidFill>
+                            <a:srgbClr val="586577"/>
                           </a:solidFill>
                           <a:latin typeface="Microsoft YaHei"/>
                           <a:ea typeface="Microsoft YaHei"/>
@@ -10461,13 +10478,278 @@
                         </a:defRPr>
                       </a:pPr>
                       <a:r>
+                        <a:t>dws_road_traffic.avg_congestion</a:t>
+                      </a:r>
+                    </a:p>
+                    <a:p>
+                      <a:pPr>
+                        <a:defRPr sz="2200">
+                          <a:solidFill>
+                            <a:srgbClr val="586577"/>
+                          </a:solidFill>
+                          <a:latin typeface="Microsoft YaHei"/>
+                          <a:ea typeface="Microsoft YaHei"/>
+                          <a:cs typeface="Microsoft YaHei"/>
+                          <a:sym typeface="Microsoft YaHei"/>
+                        </a:defRPr>
+                      </a:pPr>
+                      <a:r>
+                        <a:t>congested_roads / total_roads</a:t>
+                      </a:r>
+                    </a:p>
+                  </a:txBody>
+                  <a:tcPr marL="64008" marR="64008" marT="64008" marB="64008" anchor="ctr" anchorCtr="0" horzOverflow="overflow">
+                    <a:solidFill>
+                      <a:srgbClr val="FAFCFE"/>
+                    </a:solidFill>
+                  </a:tcPr>
+                </a:tc>
+                <a:tc>
+                  <a:txBody>
+                    <a:bodyPr/>
+                    <a:lstStyle/>
+                    <a:p>
+                      <a:pPr>
+                        <a:defRPr sz="2200">
+                          <a:solidFill>
+                            <a:srgbClr val="1F2937"/>
+                          </a:solidFill>
+                        </a:defRPr>
+                      </a:pPr>
+                      <a:r>
+                        <a:t>优先使用 </a:t>
+                      </a:r>
+                      <a:r>
                         <a:rPr>
-                          <a:latin typeface="+mj-lt"/>
-                          <a:ea typeface="+mj-ea"/>
-                          <a:cs typeface="+mj-cs"/>
-                          <a:sym typeface="Helvetica Neue"/>
+                          <a:latin typeface="Microsoft YaHei"/>
+                          <a:ea typeface="Microsoft YaHei"/>
+                          <a:cs typeface="Microsoft YaHei"/>
+                          <a:sym typeface="Microsoft YaHei"/>
                         </a:rPr>
-                        <a:t>趋势拥堵度</a:t>
+                        <a:t>avg_congestion</a:t>
+                      </a:r>
+                      <a:r>
+                        <a:t>，并限制最大为 </a:t>
+                      </a:r>
+                      <a:r>
+                        <a:rPr>
+                          <a:latin typeface="Microsoft YaHei"/>
+                          <a:ea typeface="Microsoft YaHei"/>
+                          <a:cs typeface="Microsoft YaHei"/>
+                          <a:sym typeface="Microsoft YaHei"/>
+                        </a:rPr>
+                        <a:t>1</a:t>
+                      </a:r>
+                      <a:r>
+                        <a:t>。</a:t>
+                      </a:r>
+                    </a:p>
+                    <a:p>
+                      <a:pPr>
+                        <a:defRPr sz="2200">
+                          <a:solidFill>
+                            <a:srgbClr val="1F2937"/>
+                          </a:solidFill>
+                        </a:defRPr>
+                      </a:pPr>
+                      <a:r>
+                        <a:t>若缺失，则 </a:t>
+                      </a:r>
+                      <a:r>
+                        <a:rPr>
+                          <a:latin typeface="Microsoft YaHei"/>
+                          <a:ea typeface="Microsoft YaHei"/>
+                          <a:cs typeface="Microsoft YaHei"/>
+                          <a:sym typeface="Microsoft YaHei"/>
+                        </a:rPr>
+                        <a:t>congestion = congested_roads / total_roads</a:t>
+                      </a:r>
+                      <a:r>
+                        <a:t>；仍缺失默认 </a:t>
+                      </a:r>
+                      <a:r>
+                        <a:rPr>
+                          <a:latin typeface="Microsoft YaHei"/>
+                          <a:ea typeface="Microsoft YaHei"/>
+                          <a:cs typeface="Microsoft YaHei"/>
+                          <a:sym typeface="Microsoft YaHei"/>
+                        </a:rPr>
+                        <a:t>0.38</a:t>
+                      </a:r>
+                      <a:r>
+                        <a:t>。</a:t>
+                      </a:r>
+                    </a:p>
+                  </a:txBody>
+                  <a:tcPr marL="64008" marR="64008" marT="64008" marB="64008" anchor="ctr" anchorCtr="0" horzOverflow="overflow">
+                    <a:solidFill>
+                      <a:srgbClr val="FAFCFE"/>
+                    </a:solidFill>
+                  </a:tcPr>
+                </a:tc>
+              </a:tr>
+              <a:tr h="1528354">
+                <a:tc>
+                  <a:txBody>
+                    <a:bodyPr/>
+                    <a:lstStyle/>
+                    <a:p>
+                      <a:pPr>
+                        <a:defRPr b="1" sz="2200">
+                          <a:solidFill>
+                            <a:srgbClr val="1F2937"/>
+                          </a:solidFill>
+                        </a:defRPr>
+                      </a:pPr>
+                      <a:r>
+                        <a:t>热点</a:t>
+                      </a:r>
+                      <a:r>
+                        <a:rPr>
+                          <a:latin typeface="Microsoft YaHei"/>
+                          <a:ea typeface="Microsoft YaHei"/>
+                          <a:cs typeface="Microsoft YaHei"/>
+                          <a:sym typeface="Microsoft YaHei"/>
+                        </a:rPr>
+                        <a:t>TopN</a:t>
+                      </a:r>
+                    </a:p>
+                  </a:txBody>
+                  <a:tcPr marL="64008" marR="64008" marT="64008" marB="64008" anchor="ctr" anchorCtr="0" horzOverflow="overflow">
+                    <a:solidFill>
+                      <a:srgbClr val="FFFFFF"/>
+                    </a:solidFill>
+                  </a:tcPr>
+                </a:tc>
+                <a:tc>
+                  <a:txBody>
+                    <a:bodyPr/>
+                    <a:lstStyle/>
+                    <a:p>
+                      <a:pPr>
+                        <a:defRPr sz="2200">
+                          <a:solidFill>
+                            <a:srgbClr val="586577"/>
+                          </a:solidFill>
+                          <a:latin typeface="Microsoft YaHei"/>
+                          <a:ea typeface="Microsoft YaHei"/>
+                          <a:cs typeface="Microsoft YaHei"/>
+                          <a:sym typeface="Microsoft YaHei"/>
+                        </a:defRPr>
+                      </a:pPr>
+                      <a:r>
+                        <a:t>dws_hotspot_analysis h</a:t>
+                      </a:r>
+                    </a:p>
+                    <a:p>
+                      <a:pPr>
+                        <a:defRPr sz="2200">
+                          <a:solidFill>
+                            <a:srgbClr val="586577"/>
+                          </a:solidFill>
+                          <a:latin typeface="Microsoft YaHei"/>
+                          <a:ea typeface="Microsoft YaHei"/>
+                          <a:cs typeface="Microsoft YaHei"/>
+                          <a:sym typeface="Microsoft YaHei"/>
+                        </a:defRPr>
+                      </a:pPr>
+                      <a:r>
+                        <a:t>LEFT JOIN dim_road_segment d</a:t>
+                      </a:r>
+                    </a:p>
+                  </a:txBody>
+                  <a:tcPr marL="64008" marR="64008" marT="64008" marB="64008" anchor="ctr" anchorCtr="0" horzOverflow="overflow">
+                    <a:solidFill>
+                      <a:srgbClr val="FFFFFF"/>
+                    </a:solidFill>
+                  </a:tcPr>
+                </a:tc>
+                <a:tc>
+                  <a:txBody>
+                    <a:bodyPr/>
+                    <a:lstStyle/>
+                    <a:p>
+                      <a:pPr>
+                        <a:defRPr sz="2200">
+                          <a:solidFill>
+                            <a:srgbClr val="1F2937"/>
+                          </a:solidFill>
+                        </a:defRPr>
+                      </a:pPr>
+                      <a:r>
+                        <a:t>取 </a:t>
+                      </a:r>
+                      <a:r>
+                        <a:rPr>
+                          <a:latin typeface="Microsoft YaHei"/>
+                          <a:ea typeface="Microsoft YaHei"/>
+                          <a:cs typeface="Microsoft YaHei"/>
+                          <a:sym typeface="Microsoft YaHei"/>
+                        </a:rPr>
+                        <a:t>MAX(stat_date)</a:t>
+                      </a:r>
+                      <a:r>
+                        <a:t>，按 </a:t>
+                      </a:r>
+                      <a:r>
+                        <a:rPr>
+                          <a:latin typeface="Microsoft YaHei"/>
+                          <a:ea typeface="Microsoft YaHei"/>
+                          <a:cs typeface="Microsoft YaHei"/>
+                          <a:sym typeface="Microsoft YaHei"/>
+                        </a:rPr>
+                        <a:t>pass_count DESC </a:t>
+                      </a:r>
+                      <a:r>
+                        <a:t>排序。</a:t>
+                      </a:r>
+                    </a:p>
+                    <a:p>
+                      <a:pPr>
+                        <a:defRPr sz="2200">
+                          <a:solidFill>
+                            <a:srgbClr val="1F2937"/>
+                          </a:solidFill>
+                        </a:defRPr>
+                      </a:pPr>
+                      <a:r>
+                        <a:t>坐标取道路起点</a:t>
+                      </a:r>
+                      <a:r>
+                        <a:rPr>
+                          <a:latin typeface="Microsoft YaHei"/>
+                          <a:ea typeface="Microsoft YaHei"/>
+                          <a:cs typeface="Microsoft YaHei"/>
+                          <a:sym typeface="Microsoft YaHei"/>
+                        </a:rPr>
+                        <a:t>/</a:t>
+                      </a:r>
+                      <a:r>
+                        <a:t>终点中点；无有效哈尔滨坐标则过滤。</a:t>
+                      </a:r>
+                    </a:p>
+                  </a:txBody>
+                  <a:tcPr marL="64008" marR="64008" marT="64008" marB="64008" anchor="ctr" anchorCtr="0" horzOverflow="overflow">
+                    <a:solidFill>
+                      <a:srgbClr val="FFFFFF"/>
+                    </a:solidFill>
+                  </a:tcPr>
+                </a:tc>
+              </a:tr>
+              <a:tr h="1528354">
+                <a:tc>
+                  <a:txBody>
+                    <a:bodyPr/>
+                    <a:lstStyle/>
+                    <a:p>
+                      <a:pPr/>
+                      <a:r>
+                        <a:rPr b="1" sz="2200">
+                          <a:solidFill>
+                            <a:srgbClr val="1F2937"/>
+                          </a:solidFill>
+                        </a:rPr>
+                        <a:t>热点强度</a:t>
                       </a:r>
                     </a:p>
                   </a:txBody>
@@ -10493,8 +10775,7 @@
                           <a:cs typeface="Microsoft YaHei"/>
                           <a:sym typeface="Microsoft YaHei"/>
                         </a:rPr>
-                        <a:t>dws_road_traffic.avg_congestion
-congested_roads / total_roads</a:t>
+                        <a:t>dws_hotspot_analysis.pass_count</a:t>
                       </a:r>
                     </a:p>
                   </a:txBody>
@@ -10521,44 +10802,17 @@
                         </a:defRPr>
                       </a:pPr>
                       <a:r>
+                        <a:t>intensity = max(1, round(log10(pass_count)))</a:t>
+                      </a:r>
+                      <a:r>
                         <a:rPr>
-                          <a:latin typeface="+mj-lt"/>
-                          <a:ea typeface="+mj-ea"/>
-                          <a:cs typeface="+mj-cs"/>
-                          <a:sym typeface="Helvetica Neue"/>
-                        </a:rPr>
-                        <a:t>优先使用 </a:t>
-                      </a:r>
-                      <a:r>
-                        <a:t>avg_congestion</a:t>
-                      </a:r>
-                      <a:r>
-                        <a:rPr>
-                          <a:latin typeface="+mj-lt"/>
-                          <a:ea typeface="+mj-ea"/>
-                          <a:cs typeface="+mj-cs"/>
-                          <a:sym typeface="Helvetica Neue"/>
-                        </a:rPr>
-                        <a:t>，并限制最大为 </a:t>
-                      </a:r>
-                      <a:r>
-                        <a:t>1</a:t>
-                      </a:r>
-                      <a:r>
-                        <a:rPr>
-                          <a:latin typeface="+mj-lt"/>
-                          <a:ea typeface="+mj-ea"/>
-                          <a:cs typeface="+mj-cs"/>
+                          <a:latin typeface="+mn-lt"/>
+                          <a:ea typeface="+mn-ea"/>
+                          <a:cs typeface="+mn-cs"/>
                           <a:sym typeface="Helvetica Neue"/>
                         </a:rPr>
                         <a:t>。</a:t>
                       </a:r>
-                      <a:endParaRPr>
-                        <a:latin typeface="+mj-lt"/>
-                        <a:ea typeface="+mj-ea"/>
-                        <a:cs typeface="+mj-cs"/>
-                        <a:sym typeface="Helvetica Neue"/>
-                      </a:endParaRPr>
                     </a:p>
                     <a:p>
                       <a:pPr>
@@ -10573,34 +10827,37 @@
                         </a:defRPr>
                       </a:pPr>
                       <a:r>
+                        <a:t>passCount = pass_count</a:t>
+                      </a:r>
+                      <a:r>
                         <a:rPr>
-                          <a:latin typeface="+mj-lt"/>
-                          <a:ea typeface="+mj-ea"/>
-                          <a:cs typeface="+mj-cs"/>
+                          <a:latin typeface="+mn-lt"/>
+                          <a:ea typeface="+mn-ea"/>
+                          <a:cs typeface="+mn-cs"/>
                           <a:sym typeface="Helvetica Neue"/>
                         </a:rPr>
-                        <a:t>若缺失，则 </a:t>
-                      </a:r>
-                      <a:r>
-                        <a:t>congestion = congested_roads / total_roads</a:t>
+                        <a:t>；</a:t>
+                      </a:r>
+                      <a:r>
+                        <a:t>uniqueTaxis = unique_taxis</a:t>
                       </a:r>
                       <a:r>
                         <a:rPr>
-                          <a:latin typeface="+mj-lt"/>
-                          <a:ea typeface="+mj-ea"/>
-                          <a:cs typeface="+mj-cs"/>
+                          <a:latin typeface="+mn-lt"/>
+                          <a:ea typeface="+mn-ea"/>
+                          <a:cs typeface="+mn-cs"/>
                           <a:sym typeface="Helvetica Neue"/>
                         </a:rPr>
-                        <a:t>；仍缺失默认 </a:t>
-                      </a:r>
-                      <a:r>
-                        <a:t>0.38</a:t>
+                        <a:t>；</a:t>
+                      </a:r>
+                      <a:r>
+                        <a:t>type = road_class_name</a:t>
                       </a:r>
                       <a:r>
                         <a:rPr>
-                          <a:latin typeface="+mj-lt"/>
-                          <a:ea typeface="+mj-ea"/>
-                          <a:cs typeface="+mj-cs"/>
+                          <a:latin typeface="+mn-lt"/>
+                          <a:ea typeface="+mn-ea"/>
+                          <a:cs typeface="+mn-cs"/>
                           <a:sym typeface="Helvetica Neue"/>
                         </a:rPr>
                         <a:t>。</a:t>
@@ -10620,28 +10877,14 @@
                     <a:bodyPr/>
                     <a:lstStyle/>
                     <a:p>
-                      <a:pPr>
-                        <a:defRPr b="1" sz="2200">
+                      <a:pPr/>
+                      <a:r>
+                        <a:rPr b="1" sz="2200">
                           <a:solidFill>
                             <a:srgbClr val="1F2937"/>
                           </a:solidFill>
-                          <a:latin typeface="Microsoft YaHei"/>
-                          <a:ea typeface="Microsoft YaHei"/>
-                          <a:cs typeface="Microsoft YaHei"/>
-                          <a:sym typeface="Microsoft YaHei"/>
-                        </a:defRPr>
-                      </a:pPr>
-                      <a:r>
-                        <a:rPr>
-                          <a:latin typeface="+mj-lt"/>
-                          <a:ea typeface="+mj-ea"/>
-                          <a:cs typeface="+mj-cs"/>
-                          <a:sym typeface="Helvetica Neue"/>
                         </a:rPr>
-                        <a:t>热点</a:t>
-                      </a:r>
-                      <a:r>
-                        <a:t>TopN</a:t>
+                        <a:t>拥堵路段</a:t>
                       </a:r>
                     </a:p>
                   </a:txBody>
@@ -10656,9 +10899,8 @@
                     <a:bodyPr/>
                     <a:lstStyle/>
                     <a:p>
-                      <a:pPr/>
-                      <a:r>
-                        <a:rPr sz="2200">
+                      <a:pPr>
+                        <a:defRPr sz="2200">
                           <a:solidFill>
                             <a:srgbClr val="586577"/>
                           </a:solidFill>
@@ -10666,9 +10908,26 @@
                           <a:ea typeface="Microsoft YaHei"/>
                           <a:cs typeface="Microsoft YaHei"/>
                           <a:sym typeface="Microsoft YaHei"/>
-                        </a:rPr>
-                        <a:t>dws_hotspot_analysis h
-LEFT JOIN dim_road_segment d</a:t>
+                        </a:defRPr>
+                      </a:pPr>
+                      <a:r>
+                        <a:t>dws_hotspot_analysis</a:t>
+                      </a:r>
+                    </a:p>
+                    <a:p>
+                      <a:pPr>
+                        <a:defRPr sz="2200">
+                          <a:solidFill>
+                            <a:srgbClr val="586577"/>
+                          </a:solidFill>
+                          <a:latin typeface="Microsoft YaHei"/>
+                          <a:ea typeface="Microsoft YaHei"/>
+                          <a:cs typeface="Microsoft YaHei"/>
+                          <a:sym typeface="Microsoft YaHei"/>
+                        </a:defRPr>
+                      </a:pPr>
+                      <a:r>
+                        <a:t>MAX(stat_date)</a:t>
                       </a:r>
                     </a:p>
                   </a:txBody>
@@ -10688,51 +10947,35 @@
                           <a:solidFill>
                             <a:srgbClr val="1F2937"/>
                           </a:solidFill>
+                        </a:defRPr>
+                      </a:pPr>
+                      <a:r>
+                        <a:t>按 </a:t>
+                      </a:r>
+                      <a:r>
+                        <a:rPr>
                           <a:latin typeface="Microsoft YaHei"/>
                           <a:ea typeface="Microsoft YaHei"/>
                           <a:cs typeface="Microsoft YaHei"/>
                           <a:sym typeface="Microsoft YaHei"/>
-                        </a:defRPr>
-                      </a:pPr>
+                        </a:rPr>
+                        <a:t>COALESCE(congestion_level,0) DESC</a:t>
+                      </a:r>
+                      <a:r>
+                        <a:t>、</a:t>
+                      </a:r>
                       <a:r>
                         <a:rPr>
-                          <a:latin typeface="+mj-lt"/>
-                          <a:ea typeface="+mj-ea"/>
-                          <a:cs typeface="+mj-cs"/>
-                          <a:sym typeface="Helvetica Neue"/>
+                          <a:latin typeface="Microsoft YaHei"/>
+                          <a:ea typeface="Microsoft YaHei"/>
+                          <a:cs typeface="Microsoft YaHei"/>
+                          <a:sym typeface="Microsoft YaHei"/>
                         </a:rPr>
-                        <a:t>取 </a:t>
-                      </a:r>
-                      <a:r>
-                        <a:t>MAX(stat_date)</a:t>
-                      </a:r>
-                      <a:r>
-                        <a:rPr>
-                          <a:latin typeface="+mj-lt"/>
-                          <a:ea typeface="+mj-ea"/>
-                          <a:cs typeface="+mj-cs"/>
-                          <a:sym typeface="Helvetica Neue"/>
-                        </a:rPr>
-                        <a:t>，按 </a:t>
-                      </a:r>
-                      <a:r>
                         <a:t>pass_count DESC </a:t>
                       </a:r>
                       <a:r>
-                        <a:rPr>
-                          <a:latin typeface="+mj-lt"/>
-                          <a:ea typeface="+mj-ea"/>
-                          <a:cs typeface="+mj-cs"/>
-                          <a:sym typeface="Helvetica Neue"/>
-                        </a:rPr>
                         <a:t>排序。</a:t>
                       </a:r>
-                      <a:endParaRPr>
-                        <a:latin typeface="+mj-lt"/>
-                        <a:ea typeface="+mj-ea"/>
-                        <a:cs typeface="+mj-cs"/>
-                        <a:sym typeface="Helvetica Neue"/>
-                      </a:endParaRPr>
                     </a:p>
                     <a:p>
                       <a:pPr>
@@ -10747,25 +10990,28 @@
                         </a:defRPr>
                       </a:pPr>
                       <a:r>
+                        <a:t>count = pass_count</a:t>
+                      </a:r>
+                      <a:r>
                         <a:rPr>
-                          <a:latin typeface="+mj-lt"/>
-                          <a:ea typeface="+mj-ea"/>
-                          <a:cs typeface="+mj-cs"/>
+                          <a:latin typeface="+mn-lt"/>
+                          <a:ea typeface="+mn-ea"/>
+                          <a:cs typeface="+mn-cs"/>
                           <a:sym typeface="Helvetica Neue"/>
                         </a:rPr>
-                        <a:t>坐标取道路起点</a:t>
-                      </a:r>
-                      <a:r>
-                        <a:t>/</a:t>
+                        <a:t>；</a:t>
+                      </a:r>
+                      <a:r>
+                        <a:t>avgSpeedKmh = avg_speed_kmh</a:t>
                       </a:r>
                       <a:r>
                         <a:rPr>
-                          <a:latin typeface="+mj-lt"/>
-                          <a:ea typeface="+mj-ea"/>
-                          <a:cs typeface="+mj-cs"/>
+                          <a:latin typeface="+mn-lt"/>
+                          <a:ea typeface="+mn-ea"/>
+                          <a:cs typeface="+mn-cs"/>
                           <a:sym typeface="Helvetica Neue"/>
                         </a:rPr>
-                        <a:t>终点中点；无有效哈尔滨坐标则过滤。</a:t>
+                        <a:t>。</a:t>
                       </a:r>
                     </a:p>
                   </a:txBody>
@@ -10776,31 +11022,20 @@
                   </a:tcPr>
                 </a:tc>
               </a:tr>
-              <a:tr h="1528354">
+              <a:tr h="1528356">
                 <a:tc>
                   <a:txBody>
                     <a:bodyPr/>
                     <a:lstStyle/>
                     <a:p>
-                      <a:pPr>
-                        <a:defRPr b="1" sz="2200">
+                      <a:pPr/>
+                      <a:r>
+                        <a:rPr b="1" sz="2200">
                           <a:solidFill>
                             <a:srgbClr val="1F2937"/>
                           </a:solidFill>
-                          <a:latin typeface="Microsoft YaHei"/>
-                          <a:ea typeface="Microsoft YaHei"/>
-                          <a:cs typeface="Microsoft YaHei"/>
-                          <a:sym typeface="Microsoft YaHei"/>
-                        </a:defRPr>
-                      </a:pPr>
-                      <a:r>
-                        <a:rPr>
-                          <a:latin typeface="+mj-lt"/>
-                          <a:ea typeface="+mj-ea"/>
-                          <a:cs typeface="+mj-cs"/>
-                          <a:sym typeface="Helvetica Neue"/>
                         </a:rPr>
-                        <a:t>热点强度</a:t>
+                        <a:t>拥堵等级</a:t>
                       </a:r>
                     </a:p>
                   </a:txBody>
@@ -10826,7 +11061,7 @@
                           <a:cs typeface="Microsoft YaHei"/>
                           <a:sym typeface="Microsoft YaHei"/>
                         </a:rPr>
-                        <a:t>dws_hotspot_analysis.pass_count</a:t>
+                        <a:t>congestion_level + avg_speed_kmh</a:t>
                       </a:r>
                     </a:p>
                   </a:txBody>
@@ -10846,30 +11081,35 @@
                           <a:solidFill>
                             <a:srgbClr val="1F2937"/>
                           </a:solidFill>
+                        </a:defRPr>
+                      </a:pPr>
+                      <a:r>
+                        <a:t>高：</a:t>
+                      </a:r>
+                      <a:r>
+                        <a:rPr>
                           <a:latin typeface="Microsoft YaHei"/>
                           <a:ea typeface="Microsoft YaHei"/>
                           <a:cs typeface="Microsoft YaHei"/>
                           <a:sym typeface="Microsoft YaHei"/>
-                        </a:defRPr>
-                      </a:pPr>
-                      <a:r>
-                        <a:t>intensity = max(1, round(log10(pass_count)))</a:t>
+                        </a:rPr>
+                        <a:t>congestion_level ≥ 0.65 </a:t>
+                      </a:r>
+                      <a:r>
+                        <a:t>或 </a:t>
                       </a:r>
                       <a:r>
                         <a:rPr>
-                          <a:latin typeface="+mj-lt"/>
-                          <a:ea typeface="+mj-ea"/>
-                          <a:cs typeface="+mj-cs"/>
-                          <a:sym typeface="Helvetica Neue"/>
+                          <a:latin typeface="Microsoft YaHei"/>
+                          <a:ea typeface="Microsoft YaHei"/>
+                          <a:cs typeface="Microsoft YaHei"/>
+                          <a:sym typeface="Microsoft YaHei"/>
                         </a:rPr>
+                        <a:t>avg_speed_kmh &lt; 24</a:t>
+                      </a:r>
+                      <a:r>
                         <a:t>。</a:t>
                       </a:r>
-                      <a:endParaRPr>
-                        <a:latin typeface="+mj-lt"/>
-                        <a:ea typeface="+mj-ea"/>
-                        <a:cs typeface="+mj-cs"/>
-                        <a:sym typeface="Helvetica Neue"/>
-                      </a:endParaRPr>
                     </a:p>
                     <a:p>
                       <a:pPr>
@@ -10877,173 +11117,35 @@
                           <a:solidFill>
                             <a:srgbClr val="1F2937"/>
                           </a:solidFill>
-                          <a:latin typeface="Microsoft YaHei"/>
-                          <a:ea typeface="Microsoft YaHei"/>
-                          <a:cs typeface="Microsoft YaHei"/>
-                          <a:sym typeface="Microsoft YaHei"/>
                         </a:defRPr>
                       </a:pPr>
                       <a:r>
-                        <a:t>passCount = pass_count</a:t>
+                        <a:t>中：</a:t>
                       </a:r>
                       <a:r>
                         <a:rPr>
-                          <a:latin typeface="+mj-lt"/>
-                          <a:ea typeface="+mj-ea"/>
-                          <a:cs typeface="+mj-cs"/>
-                          <a:sym typeface="Helvetica Neue"/>
-                        </a:rPr>
-                        <a:t>；</a:t>
-                      </a:r>
-                      <a:r>
-                        <a:t>uniqueTaxis = unique_taxis</a:t>
-                      </a:r>
-                      <a:r>
-                        <a:rPr>
-                          <a:latin typeface="+mj-lt"/>
-                          <a:ea typeface="+mj-ea"/>
-                          <a:cs typeface="+mj-cs"/>
-                          <a:sym typeface="Helvetica Neue"/>
-                        </a:rPr>
-                        <a:t>；</a:t>
-                      </a:r>
-                      <a:r>
-                        <a:t>type = road_class_name</a:t>
-                      </a:r>
-                      <a:r>
-                        <a:rPr>
-                          <a:latin typeface="+mj-lt"/>
-                          <a:ea typeface="+mj-ea"/>
-                          <a:cs typeface="+mj-cs"/>
-                          <a:sym typeface="Helvetica Neue"/>
-                        </a:rPr>
-                        <a:t>。</a:t>
-                      </a:r>
-                    </a:p>
-                  </a:txBody>
-                  <a:tcPr marL="64008" marR="64008" marT="64008" marB="64008" anchor="ctr" anchorCtr="0" horzOverflow="overflow">
-                    <a:solidFill>
-                      <a:srgbClr val="FAFCFE"/>
-                    </a:solidFill>
-                  </a:tcPr>
-                </a:tc>
-              </a:tr>
-              <a:tr h="1528354">
-                <a:tc>
-                  <a:txBody>
-                    <a:bodyPr/>
-                    <a:lstStyle/>
-                    <a:p>
-                      <a:pPr>
-                        <a:defRPr b="1" sz="2200">
-                          <a:solidFill>
-                            <a:srgbClr val="1F2937"/>
-                          </a:solidFill>
-                          <a:latin typeface="Microsoft YaHei"/>
-                          <a:ea typeface="Microsoft YaHei"/>
-                          <a:cs typeface="Microsoft YaHei"/>
-                          <a:sym typeface="Microsoft YaHei"/>
-                        </a:defRPr>
-                      </a:pPr>
-                      <a:r>
-                        <a:rPr>
-                          <a:latin typeface="+mj-lt"/>
-                          <a:ea typeface="+mj-ea"/>
-                          <a:cs typeface="+mj-cs"/>
-                          <a:sym typeface="Helvetica Neue"/>
-                        </a:rPr>
-                        <a:t>拥堵路段</a:t>
-                      </a:r>
-                    </a:p>
-                  </a:txBody>
-                  <a:tcPr marL="64008" marR="64008" marT="64008" marB="64008" anchor="ctr" anchorCtr="0" horzOverflow="overflow">
-                    <a:solidFill>
-                      <a:srgbClr val="FFFFFF"/>
-                    </a:solidFill>
-                  </a:tcPr>
-                </a:tc>
-                <a:tc>
-                  <a:txBody>
-                    <a:bodyPr/>
-                    <a:lstStyle/>
-                    <a:p>
-                      <a:pPr/>
-                      <a:r>
-                        <a:rPr sz="2200">
-                          <a:solidFill>
-                            <a:srgbClr val="586577"/>
-                          </a:solidFill>
                           <a:latin typeface="Microsoft YaHei"/>
                           <a:ea typeface="Microsoft YaHei"/>
                           <a:cs typeface="Microsoft YaHei"/>
                           <a:sym typeface="Microsoft YaHei"/>
                         </a:rPr>
-                        <a:t>dws_hotspot_analysis
-MAX(stat_date)</a:t>
-                      </a:r>
-                    </a:p>
-                  </a:txBody>
-                  <a:tcPr marL="64008" marR="64008" marT="64008" marB="64008" anchor="ctr" anchorCtr="0" horzOverflow="overflow">
-                    <a:solidFill>
-                      <a:srgbClr val="FFFFFF"/>
-                    </a:solidFill>
-                  </a:tcPr>
-                </a:tc>
-                <a:tc>
-                  <a:txBody>
-                    <a:bodyPr/>
-                    <a:lstStyle/>
-                    <a:p>
-                      <a:pPr>
-                        <a:defRPr sz="2200">
-                          <a:solidFill>
-                            <a:srgbClr val="1F2937"/>
-                          </a:solidFill>
+                        <a:t>congestion_level ≥ 0.35 </a:t>
+                      </a:r>
+                      <a:r>
+                        <a:t>或 </a:t>
+                      </a:r>
+                      <a:r>
+                        <a:rPr>
                           <a:latin typeface="Microsoft YaHei"/>
                           <a:ea typeface="Microsoft YaHei"/>
                           <a:cs typeface="Microsoft YaHei"/>
                           <a:sym typeface="Microsoft YaHei"/>
-                        </a:defRPr>
-                      </a:pPr>
-                      <a:r>
-                        <a:rPr>
-                          <a:latin typeface="+mj-lt"/>
-                          <a:ea typeface="+mj-ea"/>
-                          <a:cs typeface="+mj-cs"/>
-                          <a:sym typeface="Helvetica Neue"/>
                         </a:rPr>
-                        <a:t>按 </a:t>
-                      </a:r>
-                      <a:r>
-                        <a:t>COALESCE(congestion_level,0) DESC</a:t>
-                      </a:r>
-                      <a:r>
-                        <a:rPr>
-                          <a:latin typeface="+mj-lt"/>
-                          <a:ea typeface="+mj-ea"/>
-                          <a:cs typeface="+mj-cs"/>
-                          <a:sym typeface="Helvetica Neue"/>
-                        </a:rPr>
-                        <a:t>、</a:t>
-                      </a:r>
-                      <a:r>
-                        <a:t>pass_count DESC </a:t>
-                      </a:r>
-                      <a:r>
-                        <a:rPr>
-                          <a:latin typeface="+mj-lt"/>
-                          <a:ea typeface="+mj-ea"/>
-                          <a:cs typeface="+mj-cs"/>
-                          <a:sym typeface="Helvetica Neue"/>
-                        </a:rPr>
-                        <a:t>排序。</a:t>
-                      </a:r>
-                      <a:endParaRPr>
-                        <a:latin typeface="+mj-lt"/>
-                        <a:ea typeface="+mj-ea"/>
-                        <a:cs typeface="+mj-cs"/>
-                        <a:sym typeface="Helvetica Neue"/>
-                      </a:endParaRPr>
+                        <a:t>avg_speed_kmh &lt; 38</a:t>
+                      </a:r>
+                      <a:r>
+                        <a:t>。</a:t>
+                      </a:r>
                     </a:p>
                     <a:p>
                       <a:pPr>
@@ -11051,232 +11153,9 @@
                           <a:solidFill>
                             <a:srgbClr val="1F2937"/>
                           </a:solidFill>
-                          <a:latin typeface="Microsoft YaHei"/>
-                          <a:ea typeface="Microsoft YaHei"/>
-                          <a:cs typeface="Microsoft YaHei"/>
-                          <a:sym typeface="Microsoft YaHei"/>
                         </a:defRPr>
                       </a:pPr>
                       <a:r>
-                        <a:t>count = pass_count</a:t>
-                      </a:r>
-                      <a:r>
-                        <a:rPr>
-                          <a:latin typeface="+mj-lt"/>
-                          <a:ea typeface="+mj-ea"/>
-                          <a:cs typeface="+mj-cs"/>
-                          <a:sym typeface="Helvetica Neue"/>
-                        </a:rPr>
-                        <a:t>；</a:t>
-                      </a:r>
-                      <a:r>
-                        <a:t>avgSpeedKmh = avg_speed_kmh</a:t>
-                      </a:r>
-                      <a:r>
-                        <a:rPr>
-                          <a:latin typeface="+mj-lt"/>
-                          <a:ea typeface="+mj-ea"/>
-                          <a:cs typeface="+mj-cs"/>
-                          <a:sym typeface="Helvetica Neue"/>
-                        </a:rPr>
-                        <a:t>。</a:t>
-                      </a:r>
-                    </a:p>
-                  </a:txBody>
-                  <a:tcPr marL="64008" marR="64008" marT="64008" marB="64008" anchor="ctr" anchorCtr="0" horzOverflow="overflow">
-                    <a:solidFill>
-                      <a:srgbClr val="FFFFFF"/>
-                    </a:solidFill>
-                  </a:tcPr>
-                </a:tc>
-              </a:tr>
-              <a:tr h="1528356">
-                <a:tc>
-                  <a:txBody>
-                    <a:bodyPr/>
-                    <a:lstStyle/>
-                    <a:p>
-                      <a:pPr>
-                        <a:defRPr b="1" sz="2200">
-                          <a:solidFill>
-                            <a:srgbClr val="1F2937"/>
-                          </a:solidFill>
-                          <a:latin typeface="Microsoft YaHei"/>
-                          <a:ea typeface="Microsoft YaHei"/>
-                          <a:cs typeface="Microsoft YaHei"/>
-                          <a:sym typeface="Microsoft YaHei"/>
-                        </a:defRPr>
-                      </a:pPr>
-                      <a:r>
-                        <a:rPr>
-                          <a:latin typeface="+mj-lt"/>
-                          <a:ea typeface="+mj-ea"/>
-                          <a:cs typeface="+mj-cs"/>
-                          <a:sym typeface="Helvetica Neue"/>
-                        </a:rPr>
-                        <a:t>拥堵等级</a:t>
-                      </a:r>
-                    </a:p>
-                  </a:txBody>
-                  <a:tcPr marL="64008" marR="64008" marT="64008" marB="64008" anchor="ctr" anchorCtr="0" horzOverflow="overflow">
-                    <a:solidFill>
-                      <a:srgbClr val="FAFCFE"/>
-                    </a:solidFill>
-                  </a:tcPr>
-                </a:tc>
-                <a:tc>
-                  <a:txBody>
-                    <a:bodyPr/>
-                    <a:lstStyle/>
-                    <a:p>
-                      <a:pPr/>
-                      <a:r>
-                        <a:rPr sz="2200">
-                          <a:solidFill>
-                            <a:srgbClr val="586577"/>
-                          </a:solidFill>
-                          <a:latin typeface="Microsoft YaHei"/>
-                          <a:ea typeface="Microsoft YaHei"/>
-                          <a:cs typeface="Microsoft YaHei"/>
-                          <a:sym typeface="Microsoft YaHei"/>
-                        </a:rPr>
-                        <a:t>congestion_level + avg_speed_kmh</a:t>
-                      </a:r>
-                    </a:p>
-                  </a:txBody>
-                  <a:tcPr marL="64008" marR="64008" marT="64008" marB="64008" anchor="ctr" anchorCtr="0" horzOverflow="overflow">
-                    <a:solidFill>
-                      <a:srgbClr val="FAFCFE"/>
-                    </a:solidFill>
-                  </a:tcPr>
-                </a:tc>
-                <a:tc>
-                  <a:txBody>
-                    <a:bodyPr/>
-                    <a:lstStyle/>
-                    <a:p>
-                      <a:pPr>
-                        <a:defRPr sz="2200">
-                          <a:solidFill>
-                            <a:srgbClr val="1F2937"/>
-                          </a:solidFill>
-                          <a:latin typeface="Microsoft YaHei"/>
-                          <a:ea typeface="Microsoft YaHei"/>
-                          <a:cs typeface="Microsoft YaHei"/>
-                          <a:sym typeface="Microsoft YaHei"/>
-                        </a:defRPr>
-                      </a:pPr>
-                      <a:r>
-                        <a:rPr>
-                          <a:latin typeface="+mj-lt"/>
-                          <a:ea typeface="+mj-ea"/>
-                          <a:cs typeface="+mj-cs"/>
-                          <a:sym typeface="Helvetica Neue"/>
-                        </a:rPr>
-                        <a:t>高：</a:t>
-                      </a:r>
-                      <a:r>
-                        <a:t>congestion_level ≥ 0.65 </a:t>
-                      </a:r>
-                      <a:r>
-                        <a:rPr>
-                          <a:latin typeface="+mj-lt"/>
-                          <a:ea typeface="+mj-ea"/>
-                          <a:cs typeface="+mj-cs"/>
-                          <a:sym typeface="Helvetica Neue"/>
-                        </a:rPr>
-                        <a:t>或 </a:t>
-                      </a:r>
-                      <a:r>
-                        <a:t>avg_speed_kmh &lt; 24</a:t>
-                      </a:r>
-                      <a:r>
-                        <a:rPr>
-                          <a:latin typeface="+mj-lt"/>
-                          <a:ea typeface="+mj-ea"/>
-                          <a:cs typeface="+mj-cs"/>
-                          <a:sym typeface="Helvetica Neue"/>
-                        </a:rPr>
-                        <a:t>。</a:t>
-                      </a:r>
-                      <a:endParaRPr>
-                        <a:latin typeface="+mj-lt"/>
-                        <a:ea typeface="+mj-ea"/>
-                        <a:cs typeface="+mj-cs"/>
-                        <a:sym typeface="Helvetica Neue"/>
-                      </a:endParaRPr>
-                    </a:p>
-                    <a:p>
-                      <a:pPr>
-                        <a:defRPr sz="2200">
-                          <a:solidFill>
-                            <a:srgbClr val="1F2937"/>
-                          </a:solidFill>
-                          <a:latin typeface="Microsoft YaHei"/>
-                          <a:ea typeface="Microsoft YaHei"/>
-                          <a:cs typeface="Microsoft YaHei"/>
-                          <a:sym typeface="Microsoft YaHei"/>
-                        </a:defRPr>
-                      </a:pPr>
-                      <a:r>
-                        <a:rPr>
-                          <a:latin typeface="+mj-lt"/>
-                          <a:ea typeface="+mj-ea"/>
-                          <a:cs typeface="+mj-cs"/>
-                          <a:sym typeface="Helvetica Neue"/>
-                        </a:rPr>
-                        <a:t>中：</a:t>
-                      </a:r>
-                      <a:r>
-                        <a:t>congestion_level ≥ 0.35 </a:t>
-                      </a:r>
-                      <a:r>
-                        <a:rPr>
-                          <a:latin typeface="+mj-lt"/>
-                          <a:ea typeface="+mj-ea"/>
-                          <a:cs typeface="+mj-cs"/>
-                          <a:sym typeface="Helvetica Neue"/>
-                        </a:rPr>
-                        <a:t>或 </a:t>
-                      </a:r>
-                      <a:r>
-                        <a:t>avg_speed_kmh &lt; 38</a:t>
-                      </a:r>
-                      <a:r>
-                        <a:rPr>
-                          <a:latin typeface="+mj-lt"/>
-                          <a:ea typeface="+mj-ea"/>
-                          <a:cs typeface="+mj-cs"/>
-                          <a:sym typeface="Helvetica Neue"/>
-                        </a:rPr>
-                        <a:t>。</a:t>
-                      </a:r>
-                      <a:endParaRPr>
-                        <a:latin typeface="+mj-lt"/>
-                        <a:ea typeface="+mj-ea"/>
-                        <a:cs typeface="+mj-cs"/>
-                        <a:sym typeface="Helvetica Neue"/>
-                      </a:endParaRPr>
-                    </a:p>
-                    <a:p>
-                      <a:pPr>
-                        <a:defRPr sz="2200">
-                          <a:solidFill>
-                            <a:srgbClr val="1F2937"/>
-                          </a:solidFill>
-                          <a:latin typeface="Microsoft YaHei"/>
-                          <a:ea typeface="Microsoft YaHei"/>
-                          <a:cs typeface="Microsoft YaHei"/>
-                          <a:sym typeface="Microsoft YaHei"/>
-                        </a:defRPr>
-                      </a:pPr>
-                      <a:r>
-                        <a:rPr>
-                          <a:latin typeface="+mj-lt"/>
-                          <a:ea typeface="+mj-ea"/>
-                          <a:cs typeface="+mj-cs"/>
-                          <a:sym typeface="Helvetica Neue"/>
-                        </a:rPr>
                         <a:t>其余为低。</a:t>
                       </a:r>
                     </a:p>
@@ -11320,7 +11199,7 @@
       </p:grpSpPr>
       <p:sp>
         <p:nvSpPr>
-          <p:cNvPr id="266" name="Rectangle 1"/>
+          <p:cNvPr id="267" name="Rectangle 1"/>
           <p:cNvSpPr/>
           <p:nvPr/>
         </p:nvSpPr>
@@ -11348,6 +11227,10 @@
                 <a:solidFill>
                   <a:srgbClr val="FFFFFF"/>
                 </a:solidFill>
+                <a:latin typeface="+mn-lt"/>
+                <a:ea typeface="+mn-ea"/>
+                <a:cs typeface="+mn-cs"/>
+                <a:sym typeface="Helvetica Neue"/>
               </a:defRPr>
             </a:pPr>
           </a:p>
@@ -11355,7 +11238,7 @@
       </p:sp>
       <p:sp>
         <p:nvSpPr>
-          <p:cNvPr id="267" name="Rectangle 2"/>
+          <p:cNvPr id="268" name="Rectangle 2"/>
           <p:cNvSpPr/>
           <p:nvPr/>
         </p:nvSpPr>
@@ -11383,6 +11266,10 @@
                 <a:solidFill>
                   <a:srgbClr val="FFFFFF"/>
                 </a:solidFill>
+                <a:latin typeface="+mn-lt"/>
+                <a:ea typeface="+mn-ea"/>
+                <a:cs typeface="+mn-cs"/>
+                <a:sym typeface="Helvetica Neue"/>
               </a:defRPr>
             </a:pPr>
           </a:p>
@@ -11390,14 +11277,14 @@
       </p:sp>
       <p:sp>
         <p:nvSpPr>
-          <p:cNvPr id="268" name="Rectangle 3"/>
+          <p:cNvPr id="269" name="Rectangle 3"/>
           <p:cNvSpPr/>
           <p:nvPr/>
         </p:nvSpPr>
         <p:spPr>
           <a:xfrm>
             <a:off x="0" y="1325880"/>
-            <a:ext cx="24384000" cy="73153"/>
+            <a:ext cx="24384000" cy="73154"/>
           </a:xfrm>
           <a:prstGeom prst="rect">
             <a:avLst/>
@@ -11418,6 +11305,10 @@
                 <a:solidFill>
                   <a:srgbClr val="FFFFFF"/>
                 </a:solidFill>
+                <a:latin typeface="+mn-lt"/>
+                <a:ea typeface="+mn-ea"/>
+                <a:cs typeface="+mn-cs"/>
+                <a:sym typeface="Helvetica Neue"/>
               </a:defRPr>
             </a:pPr>
           </a:p>
@@ -11425,13 +11316,13 @@
       </p:sp>
       <p:sp>
         <p:nvSpPr>
-          <p:cNvPr id="269" name="TextBox 4"/>
+          <p:cNvPr id="270" name="TextBox 4"/>
           <p:cNvSpPr txBox="1"/>
           <p:nvPr/>
         </p:nvSpPr>
         <p:spPr>
           <a:xfrm>
-            <a:off x="914400" y="256031"/>
+            <a:off x="914399" y="256030"/>
             <a:ext cx="5664513" cy="533401"/>
           </a:xfrm>
           <a:prstGeom prst="rect">
@@ -11457,31 +11348,25 @@
                 <a:solidFill>
                   <a:srgbClr val="FFFFFF"/>
                 </a:solidFill>
+                <a:latin typeface="+mn-lt"/>
+                <a:ea typeface="+mn-ea"/>
+                <a:cs typeface="+mn-cs"/>
+                <a:sym typeface="Helvetica Neue"/>
+              </a:defRPr>
+            </a:pPr>
+            <a:r>
+              <a:t>计算口径 </a:t>
+            </a:r>
+            <a:r>
+              <a:rPr>
                 <a:latin typeface="Microsoft YaHei"/>
                 <a:ea typeface="Microsoft YaHei"/>
                 <a:cs typeface="Microsoft YaHei"/>
                 <a:sym typeface="Microsoft YaHei"/>
-              </a:defRPr>
-            </a:pPr>
-            <a:r>
-              <a:rPr>
-                <a:latin typeface="+mj-lt"/>
-                <a:ea typeface="+mj-ea"/>
-                <a:cs typeface="+mj-cs"/>
-                <a:sym typeface="Helvetica Neue"/>
               </a:rPr>
-              <a:t>计算口径 </a:t>
-            </a:r>
-            <a:r>
               <a:t>3</a:t>
             </a:r>
             <a:r>
-              <a:rPr>
-                <a:latin typeface="+mj-lt"/>
-                <a:ea typeface="+mj-ea"/>
-                <a:cs typeface="+mj-cs"/>
-                <a:sym typeface="Helvetica Neue"/>
-              </a:rPr>
               <a:t>：道路等级与轨迹复盘</a:t>
             </a:r>
           </a:p>
@@ -11489,14 +11374,14 @@
       </p:sp>
       <p:sp>
         <p:nvSpPr>
-          <p:cNvPr id="270" name="TextBox 5"/>
+          <p:cNvPr id="271" name="TextBox 5"/>
           <p:cNvSpPr txBox="1"/>
           <p:nvPr/>
         </p:nvSpPr>
         <p:spPr>
           <a:xfrm>
-            <a:off x="21897116" y="347472"/>
-            <a:ext cx="1282925" cy="320041"/>
+            <a:off x="21897116" y="347473"/>
+            <a:ext cx="1282922" cy="320039"/>
           </a:xfrm>
           <a:prstGeom prst="rect">
             <a:avLst/>
@@ -11511,7 +11396,7 @@
           </a:extLst>
         </p:spPr>
         <p:txBody>
-          <a:bodyPr wrap="none" lIns="45719" rIns="45719">
+          <a:bodyPr wrap="none" lIns="45718" tIns="45718" rIns="45718" bIns="45718">
             <a:spAutoFit/>
           </a:bodyPr>
           <a:lstStyle/>
@@ -11521,31 +11406,25 @@
                 <a:solidFill>
                   <a:srgbClr val="C6E7EE"/>
                 </a:solidFill>
+                <a:latin typeface="+mn-lt"/>
+                <a:ea typeface="+mn-ea"/>
+                <a:cs typeface="+mn-cs"/>
+                <a:sym typeface="Helvetica Neue"/>
+              </a:defRPr>
+            </a:pPr>
+            <a:r>
+              <a:t>道路 </a:t>
+            </a:r>
+            <a:r>
+              <a:rPr>
                 <a:latin typeface="Microsoft YaHei"/>
                 <a:ea typeface="Microsoft YaHei"/>
                 <a:cs typeface="Microsoft YaHei"/>
                 <a:sym typeface="Microsoft YaHei"/>
-              </a:defRPr>
-            </a:pPr>
-            <a:r>
-              <a:rPr>
-                <a:latin typeface="+mj-lt"/>
-                <a:ea typeface="+mj-ea"/>
-                <a:cs typeface="+mj-cs"/>
-                <a:sym typeface="Helvetica Neue"/>
               </a:rPr>
-              <a:t>道路 </a:t>
-            </a:r>
-            <a:r>
               <a:t>+ </a:t>
             </a:r>
             <a:r>
-              <a:rPr>
-                <a:latin typeface="+mj-lt"/>
-                <a:ea typeface="+mj-ea"/>
-                <a:cs typeface="+mj-cs"/>
-                <a:sym typeface="Helvetica Neue"/>
-              </a:rPr>
               <a:t>明细轨迹</a:t>
             </a:r>
           </a:p>
@@ -11553,13 +11432,13 @@
       </p:sp>
       <p:graphicFrame>
         <p:nvGraphicFramePr>
-          <p:cNvPr id="271" name="Table 6"/>
+          <p:cNvPr id="272" name="Table 6"/>
           <p:cNvGraphicFramePr/>
           <p:nvPr/>
         </p:nvGraphicFramePr>
         <p:xfrm>
-          <a:off x="822960" y="1874518"/>
-          <a:ext cx="22722840" cy="10698482"/>
+          <a:off x="822960" y="1874517"/>
+          <a:ext cx="22722840" cy="10698483"/>
         </p:xfrm>
         <a:graphic xmlns:a="http://schemas.openxmlformats.org/drawingml/2006/main">
           <a:graphicData uri="http://schemas.openxmlformats.org/drawingml/2006/table">
@@ -11579,22 +11458,17 @@
                     <a:lstStyle/>
                     <a:p>
                       <a:pPr>
-                        <a:defRPr sz="2200">
+                        <a:defRPr b="0">
+                          <a:solidFill>
+                            <a:srgbClr val="000000"/>
+                          </a:solidFill>
+                        </a:defRPr>
+                      </a:pPr>
+                      <a:r>
+                        <a:rPr b="1" sz="2200">
                           <a:solidFill>
                             <a:srgbClr val="16314E"/>
                           </a:solidFill>
-                          <a:latin typeface="Microsoft YaHei"/>
-                          <a:ea typeface="Microsoft YaHei"/>
-                          <a:cs typeface="Microsoft YaHei"/>
-                          <a:sym typeface="Microsoft YaHei"/>
-                        </a:defRPr>
-                      </a:pPr>
-                      <a:r>
-                        <a:rPr>
-                          <a:latin typeface="+mj-lt"/>
-                          <a:ea typeface="+mj-ea"/>
-                          <a:cs typeface="+mj-cs"/>
-                          <a:sym typeface="Helvetica Neue"/>
                         </a:rPr>
                         <a:t>数据项</a:t>
                       </a:r>
@@ -11616,31 +11490,21 @@
                           <a:solidFill>
                             <a:srgbClr val="16314E"/>
                           </a:solidFill>
+                        </a:defRPr>
+                      </a:pPr>
+                      <a:r>
+                        <a:t>来源字段 </a:t>
+                      </a:r>
+                      <a:r>
+                        <a:rPr>
                           <a:latin typeface="Microsoft YaHei"/>
                           <a:ea typeface="Microsoft YaHei"/>
                           <a:cs typeface="Microsoft YaHei"/>
                           <a:sym typeface="Microsoft YaHei"/>
-                        </a:defRPr>
-                      </a:pPr>
-                      <a:r>
-                        <a:rPr>
-                          <a:latin typeface="+mj-lt"/>
-                          <a:ea typeface="+mj-ea"/>
-                          <a:cs typeface="+mj-cs"/>
-                          <a:sym typeface="Helvetica Neue"/>
                         </a:rPr>
-                        <a:t>来源字段 </a:t>
-                      </a:r>
-                      <a:r>
                         <a:t>/ </a:t>
                       </a:r>
                       <a:r>
-                        <a:rPr>
-                          <a:latin typeface="+mj-lt"/>
-                          <a:ea typeface="+mj-ea"/>
-                          <a:cs typeface="+mj-cs"/>
-                          <a:sym typeface="Helvetica Neue"/>
-                        </a:rPr>
                         <a:t>数据表</a:t>
                       </a:r>
                     </a:p>
@@ -11661,31 +11525,21 @@
                           <a:solidFill>
                             <a:srgbClr val="16314E"/>
                           </a:solidFill>
+                        </a:defRPr>
+                      </a:pPr>
+                      <a:r>
+                        <a:t>计算方式 </a:t>
+                      </a:r>
+                      <a:r>
+                        <a:rPr>
                           <a:latin typeface="Microsoft YaHei"/>
                           <a:ea typeface="Microsoft YaHei"/>
                           <a:cs typeface="Microsoft YaHei"/>
                           <a:sym typeface="Microsoft YaHei"/>
-                        </a:defRPr>
-                      </a:pPr>
-                      <a:r>
-                        <a:rPr>
-                          <a:latin typeface="+mj-lt"/>
-                          <a:ea typeface="+mj-ea"/>
-                          <a:cs typeface="+mj-cs"/>
-                          <a:sym typeface="Helvetica Neue"/>
                         </a:rPr>
-                        <a:t>计算方式 </a:t>
-                      </a:r>
-                      <a:r>
                         <a:t>/ </a:t>
                       </a:r>
                       <a:r>
-                        <a:rPr>
-                          <a:latin typeface="+mj-lt"/>
-                          <a:ea typeface="+mj-ea"/>
-                          <a:cs typeface="+mj-cs"/>
-                          <a:sym typeface="Helvetica Neue"/>
-                        </a:rPr>
                         <a:t>口径说明</a:t>
                       </a:r>
                     </a:p>
@@ -11703,10 +11557,32 @@
                     <a:bodyPr/>
                     <a:lstStyle/>
                     <a:p>
-                      <a:pPr>
-                        <a:defRPr b="1" sz="2200">
+                      <a:pPr/>
+                      <a:r>
+                        <a:rPr b="1" sz="2200">
                           <a:solidFill>
                             <a:srgbClr val="1F2937"/>
+                          </a:solidFill>
+                        </a:rPr>
+                        <a:t>道路等级统计</a:t>
+                      </a:r>
+                    </a:p>
+                  </a:txBody>
+                  <a:tcPr marL="64008" marR="64008" marT="64008" marB="64008" anchor="ctr" anchorCtr="0" horzOverflow="overflow">
+                    <a:solidFill>
+                      <a:srgbClr val="FFFFFF"/>
+                    </a:solidFill>
+                  </a:tcPr>
+                </a:tc>
+                <a:tc>
+                  <a:txBody>
+                    <a:bodyPr/>
+                    <a:lstStyle/>
+                    <a:p>
+                      <a:pPr>
+                        <a:defRPr sz="2200">
+                          <a:solidFill>
+                            <a:srgbClr val="586577"/>
                           </a:solidFill>
                           <a:latin typeface="Microsoft YaHei"/>
                           <a:ea typeface="Microsoft YaHei"/>
@@ -11715,13 +11591,263 @@
                         </a:defRPr>
                       </a:pPr>
                       <a:r>
+                        <a:t>dws_road_class_analysis</a:t>
+                      </a:r>
+                    </a:p>
+                    <a:p>
+                      <a:pPr>
+                        <a:defRPr sz="2200">
+                          <a:solidFill>
+                            <a:srgbClr val="586577"/>
+                          </a:solidFill>
+                          <a:latin typeface="Microsoft YaHei"/>
+                          <a:ea typeface="Microsoft YaHei"/>
+                          <a:cs typeface="Microsoft YaHei"/>
+                          <a:sym typeface="Microsoft YaHei"/>
+                        </a:defRPr>
+                      </a:pPr>
+                      <a:r>
+                        <a:t>MAX(stat_date)</a:t>
+                      </a:r>
+                    </a:p>
+                  </a:txBody>
+                  <a:tcPr marL="64008" marR="64008" marT="64008" marB="64008" anchor="ctr" anchorCtr="0" horzOverflow="overflow">
+                    <a:solidFill>
+                      <a:srgbClr val="FFFFFF"/>
+                    </a:solidFill>
+                  </a:tcPr>
+                </a:tc>
+                <a:tc>
+                  <a:txBody>
+                    <a:bodyPr/>
+                    <a:lstStyle/>
+                    <a:p>
+                      <a:pPr>
+                        <a:defRPr sz="2200">
+                          <a:solidFill>
+                            <a:srgbClr val="1F2937"/>
+                          </a:solidFill>
+                        </a:defRPr>
+                      </a:pPr>
+                      <a:r>
+                        <a:t>按 </a:t>
+                      </a:r>
+                      <a:r>
                         <a:rPr>
-                          <a:latin typeface="+mj-lt"/>
-                          <a:ea typeface="+mj-ea"/>
-                          <a:cs typeface="+mj-cs"/>
-                          <a:sym typeface="Helvetica Neue"/>
+                          <a:latin typeface="Microsoft YaHei"/>
+                          <a:ea typeface="Microsoft YaHei"/>
+                          <a:cs typeface="Microsoft YaHei"/>
+                          <a:sym typeface="Microsoft YaHei"/>
                         </a:rPr>
-                        <a:t>道路等级统计</a:t>
+                        <a:t>total_pass DESC </a:t>
+                      </a:r>
+                      <a:r>
+                        <a:t>取前 </a:t>
+                      </a:r>
+                      <a:r>
+                        <a:rPr>
+                          <a:latin typeface="Microsoft YaHei"/>
+                          <a:ea typeface="Microsoft YaHei"/>
+                          <a:cs typeface="Microsoft YaHei"/>
+                          <a:sym typeface="Microsoft YaHei"/>
+                        </a:rPr>
+                        <a:t>8</a:t>
+                      </a:r>
+                      <a:r>
+                        <a:t>。</a:t>
+                      </a:r>
+                    </a:p>
+                    <a:p>
+                      <a:pPr>
+                        <a:defRPr sz="2200">
+                          <a:solidFill>
+                            <a:srgbClr val="1F2937"/>
+                          </a:solidFill>
+                        </a:defRPr>
+                      </a:pPr>
+                      <a:r>
+                        <a:t>输出 </a:t>
+                      </a:r>
+                      <a:r>
+                        <a:rPr>
+                          <a:latin typeface="Microsoft YaHei"/>
+                          <a:ea typeface="Microsoft YaHei"/>
+                          <a:cs typeface="Microsoft YaHei"/>
+                          <a:sym typeface="Microsoft YaHei"/>
+                        </a:rPr>
+                        <a:t>className</a:t>
+                      </a:r>
+                      <a:r>
+                        <a:t>、</a:t>
+                      </a:r>
+                      <a:r>
+                        <a:rPr>
+                          <a:latin typeface="Microsoft YaHei"/>
+                          <a:ea typeface="Microsoft YaHei"/>
+                          <a:cs typeface="Microsoft YaHei"/>
+                          <a:sym typeface="Microsoft YaHei"/>
+                        </a:rPr>
+                        <a:t>roadCount</a:t>
+                      </a:r>
+                      <a:r>
+                        <a:t>、</a:t>
+                      </a:r>
+                      <a:r>
+                        <a:rPr>
+                          <a:latin typeface="Microsoft YaHei"/>
+                          <a:ea typeface="Microsoft YaHei"/>
+                          <a:cs typeface="Microsoft YaHei"/>
+                          <a:sym typeface="Microsoft YaHei"/>
+                        </a:rPr>
+                        <a:t>totalPass</a:t>
+                      </a:r>
+                      <a:r>
+                        <a:t>、</a:t>
+                      </a:r>
+                      <a:r>
+                        <a:rPr>
+                          <a:latin typeface="Microsoft YaHei"/>
+                          <a:ea typeface="Microsoft YaHei"/>
+                          <a:cs typeface="Microsoft YaHei"/>
+                          <a:sym typeface="Microsoft YaHei"/>
+                        </a:rPr>
+                        <a:t>avgSpeedKmh</a:t>
+                      </a:r>
+                      <a:r>
+                        <a:t>、</a:t>
+                      </a:r>
+                      <a:r>
+                        <a:rPr>
+                          <a:latin typeface="Microsoft YaHei"/>
+                          <a:ea typeface="Microsoft YaHei"/>
+                          <a:cs typeface="Microsoft YaHei"/>
+                          <a:sym typeface="Microsoft YaHei"/>
+                        </a:rPr>
+                        <a:t>congestionLevel</a:t>
+                      </a:r>
+                      <a:r>
+                        <a:t>、</a:t>
+                      </a:r>
+                      <a:r>
+                        <a:rPr>
+                          <a:latin typeface="Microsoft YaHei"/>
+                          <a:ea typeface="Microsoft YaHei"/>
+                          <a:cs typeface="Microsoft YaHei"/>
+                          <a:sym typeface="Microsoft YaHei"/>
+                        </a:rPr>
+                        <a:t>avgLengthM</a:t>
+                      </a:r>
+                      <a:r>
+                        <a:t>。</a:t>
+                      </a:r>
+                    </a:p>
+                  </a:txBody>
+                  <a:tcPr marL="64008" marR="64008" marT="64008" marB="64008" anchor="ctr" anchorCtr="0" horzOverflow="overflow">
+                    <a:solidFill>
+                      <a:srgbClr val="FFFFFF"/>
+                    </a:solidFill>
+                  </a:tcPr>
+                </a:tc>
+              </a:tr>
+              <a:tr h="1337310">
+                <a:tc>
+                  <a:txBody>
+                    <a:bodyPr/>
+                    <a:lstStyle/>
+                    <a:p>
+                      <a:pPr/>
+                      <a:r>
+                        <a:rPr b="1" sz="2200">
+                          <a:solidFill>
+                            <a:srgbClr val="1F2937"/>
+                          </a:solidFill>
+                        </a:rPr>
+                        <a:t>轨迹样本</a:t>
+                      </a:r>
+                    </a:p>
+                  </a:txBody>
+                  <a:tcPr marL="64008" marR="64008" marT="64008" marB="64008" anchor="ctr" anchorCtr="0" horzOverflow="overflow">
+                    <a:solidFill>
+                      <a:srgbClr val="FAFCFE"/>
+                    </a:solidFill>
+                  </a:tcPr>
+                </a:tc>
+                <a:tc>
+                  <a:txBody>
+                    <a:bodyPr/>
+                    <a:lstStyle/>
+                    <a:p>
+                      <a:pPr>
+                        <a:defRPr sz="2200">
+                          <a:solidFill>
+                            <a:srgbClr val="586577"/>
+                          </a:solidFill>
+                          <a:latin typeface="Microsoft YaHei"/>
+                          <a:ea typeface="Microsoft YaHei"/>
+                          <a:cs typeface="Microsoft YaHei"/>
+                          <a:sym typeface="Microsoft YaHei"/>
+                        </a:defRPr>
+                      </a:pPr>
+                      <a:r>
+                        <a:t>dwd_taxi_trip</a:t>
+                      </a:r>
+                    </a:p>
+                    <a:p>
+                      <a:pPr>
+                        <a:defRPr sz="2200">
+                          <a:solidFill>
+                            <a:srgbClr val="586577"/>
+                          </a:solidFill>
+                          <a:latin typeface="Microsoft YaHei"/>
+                          <a:ea typeface="Microsoft YaHei"/>
+                          <a:cs typeface="Microsoft YaHei"/>
+                          <a:sym typeface="Microsoft YaHei"/>
+                        </a:defRPr>
+                      </a:pPr>
+                      <a:r>
+                        <a:t>route_geom IS NOT NULL</a:t>
+                      </a:r>
+                    </a:p>
+                  </a:txBody>
+                  <a:tcPr marL="64008" marR="64008" marT="64008" marB="64008" anchor="ctr" anchorCtr="0" horzOverflow="overflow">
+                    <a:solidFill>
+                      <a:srgbClr val="FAFCFE"/>
+                    </a:solidFill>
+                  </a:tcPr>
+                </a:tc>
+                <a:tc>
+                  <a:txBody>
+                    <a:bodyPr/>
+                    <a:lstStyle/>
+                    <a:p>
+                      <a:pPr/>
+                      <a:r>
+                        <a:t>按 trip_id DESC 取最新样本，默认 16 条、最多 30 条。
+tripId = trip_id；devid = 设备号。</a:t>
+                      </a:r>
+                    </a:p>
+                  </a:txBody>
+                  <a:tcPr marL="64008" marR="64008" marT="64008" marB="64008" anchor="ctr" anchorCtr="0" horzOverflow="overflow">
+                    <a:solidFill>
+                      <a:srgbClr val="FAFCFE"/>
+                    </a:solidFill>
+                  </a:tcPr>
+                </a:tc>
+              </a:tr>
+              <a:tr h="1337310">
+                <a:tc>
+                  <a:txBody>
+                    <a:bodyPr/>
+                    <a:lstStyle/>
+                    <a:p>
+                      <a:pPr/>
+                      <a:r>
+                        <a:rPr b="1" sz="2200">
+                          <a:solidFill>
+                            <a:srgbClr val="1F2937"/>
+                          </a:solidFill>
+                        </a:rPr>
+                        <a:t>轨迹路径</a:t>
                       </a:r>
                     </a:p>
                   </a:txBody>
@@ -11747,8 +11873,487 @@
                           <a:cs typeface="Microsoft YaHei"/>
                           <a:sym typeface="Microsoft YaHei"/>
                         </a:rPr>
-                        <a:t>dws_road_class_analysis
-MAX(stat_date)</a:t>
+                        <a:t>dwd_taxi_trip.route_geom</a:t>
+                      </a:r>
+                    </a:p>
+                  </a:txBody>
+                  <a:tcPr marL="64008" marR="64008" marT="64008" marB="64008" anchor="ctr" anchorCtr="0" horzOverflow="overflow">
+                    <a:solidFill>
+                      <a:srgbClr val="FFFFFF"/>
+                    </a:solidFill>
+                  </a:tcPr>
+                </a:tc>
+                <a:tc>
+                  <a:txBody>
+                    <a:bodyPr/>
+                    <a:lstStyle/>
+                    <a:p>
+                      <a:pPr>
+                        <a:defRPr sz="2200">
+                          <a:solidFill>
+                            <a:srgbClr val="1F2937"/>
+                          </a:solidFill>
+                        </a:defRPr>
+                      </a:pPr>
+                      <a:r>
+                        <a:t>解析 </a:t>
+                      </a:r>
+                      <a:r>
+                        <a:rPr>
+                          <a:latin typeface="Microsoft YaHei"/>
+                          <a:ea typeface="Microsoft YaHei"/>
+                          <a:cs typeface="Microsoft YaHei"/>
+                          <a:sym typeface="Microsoft YaHei"/>
+                        </a:rPr>
+                        <a:t>LINESTRING </a:t>
+                      </a:r>
+                      <a:r>
+                        <a:t>坐标，自动校验</a:t>
+                      </a:r>
+                      <a:r>
+                        <a:rPr>
+                          <a:latin typeface="Microsoft YaHei"/>
+                          <a:ea typeface="Microsoft YaHei"/>
+                          <a:cs typeface="Microsoft YaHei"/>
+                          <a:sym typeface="Microsoft YaHei"/>
+                        </a:rPr>
+                        <a:t>/</a:t>
+                      </a:r>
+                      <a:r>
+                        <a:t>纠正经纬度顺序。</a:t>
+                      </a:r>
+                    </a:p>
+                    <a:p>
+                      <a:pPr>
+                        <a:defRPr sz="2200">
+                          <a:solidFill>
+                            <a:srgbClr val="1F2937"/>
+                          </a:solidFill>
+                        </a:defRPr>
+                      </a:pPr>
+                      <a:r>
+                        <a:t>仅保留哈尔滨范围内坐标，连续重复点去重，最多 </a:t>
+                      </a:r>
+                      <a:r>
+                        <a:rPr>
+                          <a:latin typeface="Microsoft YaHei"/>
+                          <a:ea typeface="Microsoft YaHei"/>
+                          <a:cs typeface="Microsoft YaHei"/>
+                          <a:sym typeface="Microsoft YaHei"/>
+                        </a:rPr>
+                        <a:t>120 </a:t>
+                      </a:r>
+                      <a:r>
+                        <a:t>个点。</a:t>
+                      </a:r>
+                    </a:p>
+                  </a:txBody>
+                  <a:tcPr marL="64008" marR="64008" marT="64008" marB="64008" anchor="ctr" anchorCtr="0" horzOverflow="overflow">
+                    <a:solidFill>
+                      <a:srgbClr val="FFFFFF"/>
+                    </a:solidFill>
+                  </a:tcPr>
+                </a:tc>
+              </a:tr>
+              <a:tr h="1337310">
+                <a:tc>
+                  <a:txBody>
+                    <a:bodyPr/>
+                    <a:lstStyle/>
+                    <a:p>
+                      <a:pPr/>
+                      <a:r>
+                        <a:rPr b="1" sz="2200">
+                          <a:solidFill>
+                            <a:srgbClr val="1F2937"/>
+                          </a:solidFill>
+                        </a:rPr>
+                        <a:t>轨迹点数</a:t>
+                      </a:r>
+                    </a:p>
+                  </a:txBody>
+                  <a:tcPr marL="64008" marR="64008" marT="64008" marB="64008" anchor="ctr" anchorCtr="0" horzOverflow="overflow">
+                    <a:solidFill>
+                      <a:srgbClr val="FAFCFE"/>
+                    </a:solidFill>
+                  </a:tcPr>
+                </a:tc>
+                <a:tc>
+                  <a:txBody>
+                    <a:bodyPr/>
+                    <a:lstStyle/>
+                    <a:p>
+                      <a:pPr/>
+                      <a:r>
+                        <a:rPr sz="2200">
+                          <a:solidFill>
+                            <a:srgbClr val="586577"/>
+                          </a:solidFill>
+                          <a:latin typeface="Microsoft YaHei"/>
+                          <a:ea typeface="Microsoft YaHei"/>
+                          <a:cs typeface="Microsoft YaHei"/>
+                          <a:sym typeface="Microsoft YaHei"/>
+                        </a:rPr>
+                        <a:t>gps_points_count / path.length</a:t>
+                      </a:r>
+                    </a:p>
+                  </a:txBody>
+                  <a:tcPr marL="64008" marR="64008" marT="64008" marB="64008" anchor="ctr" anchorCtr="0" horzOverflow="overflow">
+                    <a:solidFill>
+                      <a:srgbClr val="FAFCFE"/>
+                    </a:solidFill>
+                  </a:tcPr>
+                </a:tc>
+                <a:tc>
+                  <a:txBody>
+                    <a:bodyPr/>
+                    <a:lstStyle/>
+                    <a:p>
+                      <a:pPr>
+                        <a:defRPr sz="2200">
+                          <a:solidFill>
+                            <a:srgbClr val="1F2937"/>
+                          </a:solidFill>
+                        </a:defRPr>
+                      </a:pPr>
+                      <a:r>
+                        <a:t>优先使用 </a:t>
+                      </a:r>
+                      <a:r>
+                        <a:rPr>
+                          <a:latin typeface="Microsoft YaHei"/>
+                          <a:ea typeface="Microsoft YaHei"/>
+                          <a:cs typeface="Microsoft YaHei"/>
+                          <a:sym typeface="Microsoft YaHei"/>
+                        </a:rPr>
+                        <a:t>gps_points_count</a:t>
+                      </a:r>
+                      <a:r>
+                        <a:t>；为空或 </a:t>
+                      </a:r>
+                      <a:r>
+                        <a:rPr>
+                          <a:latin typeface="Microsoft YaHei"/>
+                          <a:ea typeface="Microsoft YaHei"/>
+                          <a:cs typeface="Microsoft YaHei"/>
+                          <a:sym typeface="Microsoft YaHei"/>
+                        </a:rPr>
+                        <a:t>0 </a:t>
+                      </a:r>
+                      <a:r>
+                        <a:t>时使用解析出的 </a:t>
+                      </a:r>
+                      <a:r>
+                        <a:rPr>
+                          <a:latin typeface="Microsoft YaHei"/>
+                          <a:ea typeface="Microsoft YaHei"/>
+                          <a:cs typeface="Microsoft YaHei"/>
+                          <a:sym typeface="Microsoft YaHei"/>
+                        </a:rPr>
+                        <a:t>path.length</a:t>
+                      </a:r>
+                      <a:r>
+                        <a:t>。</a:t>
+                      </a:r>
+                    </a:p>
+                  </a:txBody>
+                  <a:tcPr marL="64008" marR="64008" marT="64008" marB="64008" anchor="ctr" anchorCtr="0" horzOverflow="overflow">
+                    <a:solidFill>
+                      <a:srgbClr val="FAFCFE"/>
+                    </a:solidFill>
+                  </a:tcPr>
+                </a:tc>
+              </a:tr>
+              <a:tr h="1337310">
+                <a:tc>
+                  <a:txBody>
+                    <a:bodyPr/>
+                    <a:lstStyle/>
+                    <a:p>
+                      <a:pPr/>
+                      <a:r>
+                        <a:rPr b="1" sz="2200">
+                          <a:solidFill>
+                            <a:srgbClr val="1F2937"/>
+                          </a:solidFill>
+                        </a:rPr>
+                        <a:t>轨迹里程</a:t>
+                      </a:r>
+                    </a:p>
+                  </a:txBody>
+                  <a:tcPr marL="64008" marR="64008" marT="64008" marB="64008" anchor="ctr" anchorCtr="0" horzOverflow="overflow">
+                    <a:solidFill>
+                      <a:srgbClr val="FFFFFF"/>
+                    </a:solidFill>
+                  </a:tcPr>
+                </a:tc>
+                <a:tc>
+                  <a:txBody>
+                    <a:bodyPr/>
+                    <a:lstStyle/>
+                    <a:p>
+                      <a:pPr/>
+                      <a:r>
+                        <a:rPr sz="2200">
+                          <a:solidFill>
+                            <a:srgbClr val="586577"/>
+                          </a:solidFill>
+                          <a:latin typeface="Microsoft YaHei"/>
+                          <a:ea typeface="Microsoft YaHei"/>
+                          <a:cs typeface="Microsoft YaHei"/>
+                          <a:sym typeface="Microsoft YaHei"/>
+                        </a:rPr>
+                        <a:t>route_distance_m / route_geom</a:t>
+                      </a:r>
+                    </a:p>
+                  </a:txBody>
+                  <a:tcPr marL="64008" marR="64008" marT="64008" marB="64008" anchor="ctr" anchorCtr="0" horzOverflow="overflow">
+                    <a:solidFill>
+                      <a:srgbClr val="FFFFFF"/>
+                    </a:solidFill>
+                  </a:tcPr>
+                </a:tc>
+                <a:tc>
+                  <a:txBody>
+                    <a:bodyPr/>
+                    <a:lstStyle/>
+                    <a:p>
+                      <a:pPr>
+                        <a:defRPr sz="2200">
+                          <a:solidFill>
+                            <a:srgbClr val="1F2937"/>
+                          </a:solidFill>
+                        </a:defRPr>
+                      </a:pPr>
+                      <a:r>
+                        <a:t>优先 </a:t>
+                      </a:r>
+                      <a:r>
+                        <a:rPr>
+                          <a:latin typeface="Microsoft YaHei"/>
+                          <a:ea typeface="Microsoft YaHei"/>
+                          <a:cs typeface="Microsoft YaHei"/>
+                          <a:sym typeface="Microsoft YaHei"/>
+                        </a:rPr>
+                        <a:t>route_distance_m / 1000</a:t>
+                      </a:r>
+                      <a:r>
+                        <a:t>。</a:t>
+                      </a:r>
+                    </a:p>
+                    <a:p>
+                      <a:pPr>
+                        <a:defRPr sz="2200">
+                          <a:solidFill>
+                            <a:srgbClr val="1F2937"/>
+                          </a:solidFill>
+                        </a:defRPr>
+                      </a:pPr>
+                      <a:r>
+                        <a:t>缺失时按轨迹点 </a:t>
+                      </a:r>
+                      <a:r>
+                        <a:rPr>
+                          <a:latin typeface="Microsoft YaHei"/>
+                          <a:ea typeface="Microsoft YaHei"/>
+                          <a:cs typeface="Microsoft YaHei"/>
+                          <a:sym typeface="Microsoft YaHei"/>
+                        </a:rPr>
+                        <a:t>haversine </a:t>
+                      </a:r>
+                      <a:r>
+                        <a:t>距离累加，保留 </a:t>
+                      </a:r>
+                      <a:r>
+                        <a:rPr>
+                          <a:latin typeface="Microsoft YaHei"/>
+                          <a:ea typeface="Microsoft YaHei"/>
+                          <a:cs typeface="Microsoft YaHei"/>
+                          <a:sym typeface="Microsoft YaHei"/>
+                        </a:rPr>
+                        <a:t>2 </a:t>
+                      </a:r>
+                      <a:r>
+                        <a:t>位小数。</a:t>
+                      </a:r>
+                    </a:p>
+                  </a:txBody>
+                  <a:tcPr marL="64008" marR="64008" marT="64008" marB="64008" anchor="ctr" anchorCtr="0" horzOverflow="overflow">
+                    <a:solidFill>
+                      <a:srgbClr val="FFFFFF"/>
+                    </a:solidFill>
+                  </a:tcPr>
+                </a:tc>
+              </a:tr>
+              <a:tr h="1337310">
+                <a:tc>
+                  <a:txBody>
+                    <a:bodyPr/>
+                    <a:lstStyle/>
+                    <a:p>
+                      <a:pPr/>
+                      <a:r>
+                        <a:rPr b="1" sz="2200">
+                          <a:solidFill>
+                            <a:srgbClr val="1F2937"/>
+                          </a:solidFill>
+                        </a:rPr>
+                        <a:t>轨迹均速</a:t>
+                      </a:r>
+                    </a:p>
+                  </a:txBody>
+                  <a:tcPr marL="64008" marR="64008" marT="64008" marB="64008" anchor="ctr" anchorCtr="0" horzOverflow="overflow">
+                    <a:solidFill>
+                      <a:srgbClr val="FAFCFE"/>
+                    </a:solidFill>
+                  </a:tcPr>
+                </a:tc>
+                <a:tc>
+                  <a:txBody>
+                    <a:bodyPr/>
+                    <a:lstStyle/>
+                    <a:p>
+                      <a:pPr/>
+                      <a:r>
+                        <a:rPr sz="2200">
+                          <a:solidFill>
+                            <a:srgbClr val="586577"/>
+                          </a:solidFill>
+                          <a:latin typeface="Microsoft YaHei"/>
+                          <a:ea typeface="Microsoft YaHei"/>
+                          <a:cs typeface="Microsoft YaHei"/>
+                          <a:sym typeface="Microsoft YaHei"/>
+                        </a:rPr>
+                        <a:t>avg_speed_kmh / trip_duration_s</a:t>
+                      </a:r>
+                    </a:p>
+                  </a:txBody>
+                  <a:tcPr marL="64008" marR="64008" marT="64008" marB="64008" anchor="ctr" anchorCtr="0" horzOverflow="overflow">
+                    <a:solidFill>
+                      <a:srgbClr val="FAFCFE"/>
+                    </a:solidFill>
+                  </a:tcPr>
+                </a:tc>
+                <a:tc>
+                  <a:txBody>
+                    <a:bodyPr/>
+                    <a:lstStyle/>
+                    <a:p>
+                      <a:pPr>
+                        <a:defRPr sz="2200">
+                          <a:solidFill>
+                            <a:srgbClr val="1F2937"/>
+                          </a:solidFill>
+                        </a:defRPr>
+                      </a:pPr>
+                      <a:r>
+                        <a:t>优先 </a:t>
+                      </a:r>
+                      <a:r>
+                        <a:rPr>
+                          <a:latin typeface="Microsoft YaHei"/>
+                          <a:ea typeface="Microsoft YaHei"/>
+                          <a:cs typeface="Microsoft YaHei"/>
+                          <a:sym typeface="Microsoft YaHei"/>
+                        </a:rPr>
+                        <a:t>avg_speed_kmh</a:t>
+                      </a:r>
+                      <a:r>
+                        <a:t>；缺失时 </a:t>
+                      </a:r>
+                      <a:r>
+                        <a:rPr>
+                          <a:latin typeface="Microsoft YaHei"/>
+                          <a:ea typeface="Microsoft YaHei"/>
+                          <a:cs typeface="Microsoft YaHei"/>
+                          <a:sym typeface="Microsoft YaHei"/>
+                        </a:rPr>
+                        <a:t>distanceKm / trip_duration_s × 3600</a:t>
+                      </a:r>
+                      <a:r>
+                        <a:t>。</a:t>
+                      </a:r>
+                    </a:p>
+                    <a:p>
+                      <a:pPr>
+                        <a:defRPr sz="2200">
+                          <a:solidFill>
+                            <a:srgbClr val="1F2937"/>
+                          </a:solidFill>
+                        </a:defRPr>
+                      </a:pPr>
+                      <a:r>
+                        <a:t>若速度 </a:t>
+                      </a:r>
+                      <a:r>
+                        <a:rPr>
+                          <a:latin typeface="Microsoft YaHei"/>
+                          <a:ea typeface="Microsoft YaHei"/>
+                          <a:cs typeface="Microsoft YaHei"/>
+                          <a:sym typeface="Microsoft YaHei"/>
+                        </a:rPr>
+                        <a:t>≤0 </a:t>
+                      </a:r>
+                      <a:r>
+                        <a:t>或 </a:t>
+                      </a:r>
+                      <a:r>
+                        <a:rPr>
+                          <a:latin typeface="Microsoft YaHei"/>
+                          <a:ea typeface="Microsoft YaHei"/>
+                          <a:cs typeface="Microsoft YaHei"/>
+                          <a:sym typeface="Microsoft YaHei"/>
+                        </a:rPr>
+                        <a:t>&gt;120</a:t>
+                      </a:r>
+                      <a:r>
+                        <a:t>，则用估算函数修正。</a:t>
+                      </a:r>
+                    </a:p>
+                  </a:txBody>
+                  <a:tcPr marL="64008" marR="64008" marT="64008" marB="64008" anchor="ctr" anchorCtr="0" horzOverflow="overflow">
+                    <a:solidFill>
+                      <a:srgbClr val="FAFCFE"/>
+                    </a:solidFill>
+                  </a:tcPr>
+                </a:tc>
+              </a:tr>
+              <a:tr h="1337310">
+                <a:tc>
+                  <a:txBody>
+                    <a:bodyPr/>
+                    <a:lstStyle/>
+                    <a:p>
+                      <a:pPr/>
+                      <a:r>
+                        <a:rPr b="1" sz="2200">
+                          <a:solidFill>
+                            <a:srgbClr val="1F2937"/>
+                          </a:solidFill>
+                        </a:rPr>
+                        <a:t>速度等级</a:t>
+                      </a:r>
+                    </a:p>
+                  </a:txBody>
+                  <a:tcPr marL="64008" marR="64008" marT="64008" marB="64008" anchor="ctr" anchorCtr="0" horzOverflow="overflow">
+                    <a:solidFill>
+                      <a:srgbClr val="FFFFFF"/>
+                    </a:solidFill>
+                  </a:tcPr>
+                </a:tc>
+                <a:tc>
+                  <a:txBody>
+                    <a:bodyPr/>
+                    <a:lstStyle/>
+                    <a:p>
+                      <a:pPr/>
+                      <a:r>
+                        <a:rPr sz="2200">
+                          <a:solidFill>
+                            <a:srgbClr val="586577"/>
+                          </a:solidFill>
+                        </a:rPr>
+                        <a:t>由轨迹均速派生</a:t>
                       </a:r>
                     </a:p>
                   </a:txBody>
@@ -11775,44 +12380,17 @@
                         </a:defRPr>
                       </a:pPr>
                       <a:r>
+                        <a:t>avgSpeedKmh &lt; 18</a:t>
+                      </a:r>
+                      <a:r>
                         <a:rPr>
-                          <a:latin typeface="+mj-lt"/>
-                          <a:ea typeface="+mj-ea"/>
-                          <a:cs typeface="+mj-cs"/>
+                          <a:latin typeface="+mn-lt"/>
+                          <a:ea typeface="+mn-ea"/>
+                          <a:cs typeface="+mn-cs"/>
                           <a:sym typeface="Helvetica Neue"/>
                         </a:rPr>
-                        <a:t>按 </a:t>
-                      </a:r>
-                      <a:r>
-                        <a:t>total_pass DESC </a:t>
-                      </a:r>
-                      <a:r>
-                        <a:rPr>
-                          <a:latin typeface="+mj-lt"/>
-                          <a:ea typeface="+mj-ea"/>
-                          <a:cs typeface="+mj-cs"/>
-                          <a:sym typeface="Helvetica Neue"/>
-                        </a:rPr>
-                        <a:t>取前 </a:t>
-                      </a:r>
-                      <a:r>
-                        <a:t>8</a:t>
-                      </a:r>
-                      <a:r>
-                        <a:rPr>
-                          <a:latin typeface="+mj-lt"/>
-                          <a:ea typeface="+mj-ea"/>
-                          <a:cs typeface="+mj-cs"/>
-                          <a:sym typeface="Helvetica Neue"/>
-                        </a:rPr>
-                        <a:t>。</a:t>
-                      </a:r>
-                      <a:endParaRPr>
-                        <a:latin typeface="+mj-lt"/>
-                        <a:ea typeface="+mj-ea"/>
-                        <a:cs typeface="+mj-cs"/>
-                        <a:sym typeface="Helvetica Neue"/>
-                      </a:endParaRPr>
+                        <a:t>：缓行。</a:t>
+                      </a:r>
                     </a:p>
                     <a:p>
                       <a:pPr>
@@ -11827,293 +12405,17 @@
                         </a:defRPr>
                       </a:pPr>
                       <a:r>
+                        <a:t>18 ≤ avgSpeedKmh &lt; 35</a:t>
+                      </a:r>
+                      <a:r>
                         <a:rPr>
-                          <a:latin typeface="+mj-lt"/>
-                          <a:ea typeface="+mj-ea"/>
-                          <a:cs typeface="+mj-cs"/>
+                          <a:latin typeface="+mn-lt"/>
+                          <a:ea typeface="+mn-ea"/>
+                          <a:cs typeface="+mn-cs"/>
                           <a:sym typeface="Helvetica Neue"/>
                         </a:rPr>
-                        <a:t>输出 </a:t>
-                      </a:r>
-                      <a:r>
-                        <a:t>className</a:t>
-                      </a:r>
-                      <a:r>
-                        <a:rPr>
-                          <a:latin typeface="+mj-lt"/>
-                          <a:ea typeface="+mj-ea"/>
-                          <a:cs typeface="+mj-cs"/>
-                          <a:sym typeface="Helvetica Neue"/>
-                        </a:rPr>
-                        <a:t>、</a:t>
-                      </a:r>
-                      <a:r>
-                        <a:t>roadCount</a:t>
-                      </a:r>
-                      <a:r>
-                        <a:rPr>
-                          <a:latin typeface="+mj-lt"/>
-                          <a:ea typeface="+mj-ea"/>
-                          <a:cs typeface="+mj-cs"/>
-                          <a:sym typeface="Helvetica Neue"/>
-                        </a:rPr>
-                        <a:t>、</a:t>
-                      </a:r>
-                      <a:r>
-                        <a:t>totalPass</a:t>
-                      </a:r>
-                      <a:r>
-                        <a:rPr>
-                          <a:latin typeface="+mj-lt"/>
-                          <a:ea typeface="+mj-ea"/>
-                          <a:cs typeface="+mj-cs"/>
-                          <a:sym typeface="Helvetica Neue"/>
-                        </a:rPr>
-                        <a:t>、</a:t>
-                      </a:r>
-                      <a:r>
-                        <a:t>avgSpeedKmh</a:t>
-                      </a:r>
-                      <a:r>
-                        <a:rPr>
-                          <a:latin typeface="+mj-lt"/>
-                          <a:ea typeface="+mj-ea"/>
-                          <a:cs typeface="+mj-cs"/>
-                          <a:sym typeface="Helvetica Neue"/>
-                        </a:rPr>
-                        <a:t>、</a:t>
-                      </a:r>
-                      <a:r>
-                        <a:t>congestionLevel</a:t>
-                      </a:r>
-                      <a:r>
-                        <a:rPr>
-                          <a:latin typeface="+mj-lt"/>
-                          <a:ea typeface="+mj-ea"/>
-                          <a:cs typeface="+mj-cs"/>
-                          <a:sym typeface="Helvetica Neue"/>
-                        </a:rPr>
-                        <a:t>、</a:t>
-                      </a:r>
-                      <a:r>
-                        <a:t>avgLengthM</a:t>
-                      </a:r>
-                      <a:r>
-                        <a:rPr>
-                          <a:latin typeface="+mj-lt"/>
-                          <a:ea typeface="+mj-ea"/>
-                          <a:cs typeface="+mj-cs"/>
-                          <a:sym typeface="Helvetica Neue"/>
-                        </a:rPr>
-                        <a:t>。</a:t>
-                      </a:r>
-                    </a:p>
-                  </a:txBody>
-                  <a:tcPr marL="64008" marR="64008" marT="64008" marB="64008" anchor="ctr" anchorCtr="0" horzOverflow="overflow">
-                    <a:solidFill>
-                      <a:srgbClr val="FFFFFF"/>
-                    </a:solidFill>
-                  </a:tcPr>
-                </a:tc>
-              </a:tr>
-              <a:tr h="1337310">
-                <a:tc>
-                  <a:txBody>
-                    <a:bodyPr/>
-                    <a:lstStyle/>
-                    <a:p>
-                      <a:pPr>
-                        <a:defRPr b="1" sz="2200">
-                          <a:solidFill>
-                            <a:srgbClr val="1F2937"/>
-                          </a:solidFill>
-                          <a:latin typeface="Microsoft YaHei"/>
-                          <a:ea typeface="Microsoft YaHei"/>
-                          <a:cs typeface="Microsoft YaHei"/>
-                          <a:sym typeface="Microsoft YaHei"/>
-                        </a:defRPr>
-                      </a:pPr>
-                      <a:r>
-                        <a:rPr>
-                          <a:latin typeface="+mj-lt"/>
-                          <a:ea typeface="+mj-ea"/>
-                          <a:cs typeface="+mj-cs"/>
-                          <a:sym typeface="Helvetica Neue"/>
-                        </a:rPr>
-                        <a:t>轨迹样本</a:t>
-                      </a:r>
-                    </a:p>
-                  </a:txBody>
-                  <a:tcPr marL="64008" marR="64008" marT="64008" marB="64008" anchor="ctr" anchorCtr="0" horzOverflow="overflow">
-                    <a:solidFill>
-                      <a:srgbClr val="FAFCFE"/>
-                    </a:solidFill>
-                  </a:tcPr>
-                </a:tc>
-                <a:tc>
-                  <a:txBody>
-                    <a:bodyPr/>
-                    <a:lstStyle/>
-                    <a:p>
-                      <a:pPr/>
-                      <a:r>
-                        <a:rPr sz="2200">
-                          <a:solidFill>
-                            <a:srgbClr val="586577"/>
-                          </a:solidFill>
-                          <a:latin typeface="Microsoft YaHei"/>
-                          <a:ea typeface="Microsoft YaHei"/>
-                          <a:cs typeface="Microsoft YaHei"/>
-                          <a:sym typeface="Microsoft YaHei"/>
-                        </a:rPr>
-                        <a:t>dwd_taxi_trip
-route_geom IS NOT NULL</a:t>
-                      </a:r>
-                    </a:p>
-                  </a:txBody>
-                  <a:tcPr marL="64008" marR="64008" marT="64008" marB="64008" anchor="ctr" anchorCtr="0" horzOverflow="overflow">
-                    <a:solidFill>
-                      <a:srgbClr val="FAFCFE"/>
-                    </a:solidFill>
-                  </a:tcPr>
-                </a:tc>
-                <a:tc>
-                  <a:txBody>
-                    <a:bodyPr/>
-                    <a:lstStyle/>
-                    <a:p>
-                      <a:r>
-                        <a:t>按 trip_id DESC 取最新样本，默认 16 条、最多 30 条。</a:t>
-                      </a:r>
-                    </a:p>
-                    <a:p>
-                      <a:r>
-                        <a:t>tripId = trip_id；devid = 设备号。</a:t>
-                      </a:r>
-                    </a:p>
-                  </a:txBody>
-                  <a:tcPr marL="64008" marR="64008" marT="64008" marB="64008" anchor="ctr" anchorCtr="0" horzOverflow="overflow">
-                    <a:solidFill>
-                      <a:srgbClr val="FAFCFE"/>
-                    </a:solidFill>
-                  </a:tcPr>
-                </a:tc>
-              </a:tr>
-              <a:tr h="1337310">
-                <a:tc>
-                  <a:txBody>
-                    <a:bodyPr/>
-                    <a:lstStyle/>
-                    <a:p>
-                      <a:pPr>
-                        <a:defRPr b="1" sz="2200">
-                          <a:solidFill>
-                            <a:srgbClr val="1F2937"/>
-                          </a:solidFill>
-                          <a:latin typeface="Microsoft YaHei"/>
-                          <a:ea typeface="Microsoft YaHei"/>
-                          <a:cs typeface="Microsoft YaHei"/>
-                          <a:sym typeface="Microsoft YaHei"/>
-                        </a:defRPr>
-                      </a:pPr>
-                      <a:r>
-                        <a:rPr>
-                          <a:latin typeface="+mj-lt"/>
-                          <a:ea typeface="+mj-ea"/>
-                          <a:cs typeface="+mj-cs"/>
-                          <a:sym typeface="Helvetica Neue"/>
-                        </a:rPr>
-                        <a:t>轨迹路径</a:t>
-                      </a:r>
-                    </a:p>
-                  </a:txBody>
-                  <a:tcPr marL="64008" marR="64008" marT="64008" marB="64008" anchor="ctr" anchorCtr="0" horzOverflow="overflow">
-                    <a:solidFill>
-                      <a:srgbClr val="FFFFFF"/>
-                    </a:solidFill>
-                  </a:tcPr>
-                </a:tc>
-                <a:tc>
-                  <a:txBody>
-                    <a:bodyPr/>
-                    <a:lstStyle/>
-                    <a:p>
-                      <a:pPr/>
-                      <a:r>
-                        <a:rPr sz="2200">
-                          <a:solidFill>
-                            <a:srgbClr val="586577"/>
-                          </a:solidFill>
-                          <a:latin typeface="Microsoft YaHei"/>
-                          <a:ea typeface="Microsoft YaHei"/>
-                          <a:cs typeface="Microsoft YaHei"/>
-                          <a:sym typeface="Microsoft YaHei"/>
-                        </a:rPr>
-                        <a:t>dwd_taxi_trip.route_geom</a:t>
-                      </a:r>
-                    </a:p>
-                  </a:txBody>
-                  <a:tcPr marL="64008" marR="64008" marT="64008" marB="64008" anchor="ctr" anchorCtr="0" horzOverflow="overflow">
-                    <a:solidFill>
-                      <a:srgbClr val="FFFFFF"/>
-                    </a:solidFill>
-                  </a:tcPr>
-                </a:tc>
-                <a:tc>
-                  <a:txBody>
-                    <a:bodyPr/>
-                    <a:lstStyle/>
-                    <a:p>
-                      <a:pPr>
-                        <a:defRPr sz="2200">
-                          <a:solidFill>
-                            <a:srgbClr val="1F2937"/>
-                          </a:solidFill>
-                          <a:latin typeface="Microsoft YaHei"/>
-                          <a:ea typeface="Microsoft YaHei"/>
-                          <a:cs typeface="Microsoft YaHei"/>
-                          <a:sym typeface="Microsoft YaHei"/>
-                        </a:defRPr>
-                      </a:pPr>
-                      <a:r>
-                        <a:rPr>
-                          <a:latin typeface="+mj-lt"/>
-                          <a:ea typeface="+mj-ea"/>
-                          <a:cs typeface="+mj-cs"/>
-                          <a:sym typeface="Helvetica Neue"/>
-                        </a:rPr>
-                        <a:t>解析 </a:t>
-                      </a:r>
-                      <a:r>
-                        <a:t>LINESTRING </a:t>
-                      </a:r>
-                      <a:r>
-                        <a:rPr>
-                          <a:latin typeface="+mj-lt"/>
-                          <a:ea typeface="+mj-ea"/>
-                          <a:cs typeface="+mj-cs"/>
-                          <a:sym typeface="Helvetica Neue"/>
-                        </a:rPr>
-                        <a:t>坐标，自动校验</a:t>
-                      </a:r>
-                      <a:r>
-                        <a:t>/</a:t>
-                      </a:r>
-                      <a:r>
-                        <a:rPr>
-                          <a:latin typeface="+mj-lt"/>
-                          <a:ea typeface="+mj-ea"/>
-                          <a:cs typeface="+mj-cs"/>
-                          <a:sym typeface="Helvetica Neue"/>
-                        </a:rPr>
-                        <a:t>纠正经纬度顺序。</a:t>
-                      </a:r>
-                      <a:endParaRPr>
-                        <a:latin typeface="+mj-lt"/>
-                        <a:ea typeface="+mj-ea"/>
-                        <a:cs typeface="+mj-cs"/>
-                        <a:sym typeface="Helvetica Neue"/>
-                      </a:endParaRPr>
+                        <a:t>：平稳。</a:t>
+                      </a:r>
                     </a:p>
                     <a:p>
                       <a:pPr>
@@ -12128,646 +12430,13 @@
                         </a:defRPr>
                       </a:pPr>
                       <a:r>
+                        <a:t>avgSpeedKmh ≥ 35</a:t>
+                      </a:r>
+                      <a:r>
                         <a:rPr>
-                          <a:latin typeface="+mj-lt"/>
-                          <a:ea typeface="+mj-ea"/>
-                          <a:cs typeface="+mj-cs"/>
-                          <a:sym typeface="Helvetica Neue"/>
-                        </a:rPr>
-                        <a:t>仅保留哈尔滨范围内坐标，连续重复点去重，最多 </a:t>
-                      </a:r>
-                      <a:r>
-                        <a:t>120 </a:t>
-                      </a:r>
-                      <a:r>
-                        <a:rPr>
-                          <a:latin typeface="+mj-lt"/>
-                          <a:ea typeface="+mj-ea"/>
-                          <a:cs typeface="+mj-cs"/>
-                          <a:sym typeface="Helvetica Neue"/>
-                        </a:rPr>
-                        <a:t>个点。</a:t>
-                      </a:r>
-                    </a:p>
-                  </a:txBody>
-                  <a:tcPr marL="64008" marR="64008" marT="64008" marB="64008" anchor="ctr" anchorCtr="0" horzOverflow="overflow">
-                    <a:solidFill>
-                      <a:srgbClr val="FFFFFF"/>
-                    </a:solidFill>
-                  </a:tcPr>
-                </a:tc>
-              </a:tr>
-              <a:tr h="1337310">
-                <a:tc>
-                  <a:txBody>
-                    <a:bodyPr/>
-                    <a:lstStyle/>
-                    <a:p>
-                      <a:pPr>
-                        <a:defRPr b="1" sz="2200">
-                          <a:solidFill>
-                            <a:srgbClr val="1F2937"/>
-                          </a:solidFill>
-                          <a:latin typeface="Microsoft YaHei"/>
-                          <a:ea typeface="Microsoft YaHei"/>
-                          <a:cs typeface="Microsoft YaHei"/>
-                          <a:sym typeface="Microsoft YaHei"/>
-                        </a:defRPr>
-                      </a:pPr>
-                      <a:r>
-                        <a:rPr>
-                          <a:latin typeface="+mj-lt"/>
-                          <a:ea typeface="+mj-ea"/>
-                          <a:cs typeface="+mj-cs"/>
-                          <a:sym typeface="Helvetica Neue"/>
-                        </a:rPr>
-                        <a:t>轨迹点数</a:t>
-                      </a:r>
-                    </a:p>
-                  </a:txBody>
-                  <a:tcPr marL="64008" marR="64008" marT="64008" marB="64008" anchor="ctr" anchorCtr="0" horzOverflow="overflow">
-                    <a:solidFill>
-                      <a:srgbClr val="FAFCFE"/>
-                    </a:solidFill>
-                  </a:tcPr>
-                </a:tc>
-                <a:tc>
-                  <a:txBody>
-                    <a:bodyPr/>
-                    <a:lstStyle/>
-                    <a:p>
-                      <a:pPr/>
-                      <a:r>
-                        <a:rPr sz="2200">
-                          <a:solidFill>
-                            <a:srgbClr val="586577"/>
-                          </a:solidFill>
-                          <a:latin typeface="Microsoft YaHei"/>
-                          <a:ea typeface="Microsoft YaHei"/>
-                          <a:cs typeface="Microsoft YaHei"/>
-                          <a:sym typeface="Microsoft YaHei"/>
-                        </a:rPr>
-                        <a:t>gps_points_count / path.length</a:t>
-                      </a:r>
-                    </a:p>
-                  </a:txBody>
-                  <a:tcPr marL="64008" marR="64008" marT="64008" marB="64008" anchor="ctr" anchorCtr="0" horzOverflow="overflow">
-                    <a:solidFill>
-                      <a:srgbClr val="FAFCFE"/>
-                    </a:solidFill>
-                  </a:tcPr>
-                </a:tc>
-                <a:tc>
-                  <a:txBody>
-                    <a:bodyPr/>
-                    <a:lstStyle/>
-                    <a:p>
-                      <a:pPr>
-                        <a:defRPr sz="2200">
-                          <a:solidFill>
-                            <a:srgbClr val="1F2937"/>
-                          </a:solidFill>
-                          <a:latin typeface="Microsoft YaHei"/>
-                          <a:ea typeface="Microsoft YaHei"/>
-                          <a:cs typeface="Microsoft YaHei"/>
-                          <a:sym typeface="Microsoft YaHei"/>
-                        </a:defRPr>
-                      </a:pPr>
-                      <a:r>
-                        <a:rPr>
-                          <a:latin typeface="+mj-lt"/>
-                          <a:ea typeface="+mj-ea"/>
-                          <a:cs typeface="+mj-cs"/>
-                          <a:sym typeface="Helvetica Neue"/>
-                        </a:rPr>
-                        <a:t>优先使用 </a:t>
-                      </a:r>
-                      <a:r>
-                        <a:t>gps_points_count</a:t>
-                      </a:r>
-                      <a:r>
-                        <a:rPr>
-                          <a:latin typeface="+mj-lt"/>
-                          <a:ea typeface="+mj-ea"/>
-                          <a:cs typeface="+mj-cs"/>
-                          <a:sym typeface="Helvetica Neue"/>
-                        </a:rPr>
-                        <a:t>；为空或 </a:t>
-                      </a:r>
-                      <a:r>
-                        <a:t>0 </a:t>
-                      </a:r>
-                      <a:r>
-                        <a:rPr>
-                          <a:latin typeface="+mj-lt"/>
-                          <a:ea typeface="+mj-ea"/>
-                          <a:cs typeface="+mj-cs"/>
-                          <a:sym typeface="Helvetica Neue"/>
-                        </a:rPr>
-                        <a:t>时使用解析出的 </a:t>
-                      </a:r>
-                      <a:r>
-                        <a:t>path.length</a:t>
-                      </a:r>
-                      <a:r>
-                        <a:rPr>
-                          <a:latin typeface="+mj-lt"/>
-                          <a:ea typeface="+mj-ea"/>
-                          <a:cs typeface="+mj-cs"/>
-                          <a:sym typeface="Helvetica Neue"/>
-                        </a:rPr>
-                        <a:t>。</a:t>
-                      </a:r>
-                    </a:p>
-                  </a:txBody>
-                  <a:tcPr marL="64008" marR="64008" marT="64008" marB="64008" anchor="ctr" anchorCtr="0" horzOverflow="overflow">
-                    <a:solidFill>
-                      <a:srgbClr val="FAFCFE"/>
-                    </a:solidFill>
-                  </a:tcPr>
-                </a:tc>
-              </a:tr>
-              <a:tr h="1337310">
-                <a:tc>
-                  <a:txBody>
-                    <a:bodyPr/>
-                    <a:lstStyle/>
-                    <a:p>
-                      <a:pPr>
-                        <a:defRPr b="1" sz="2200">
-                          <a:solidFill>
-                            <a:srgbClr val="1F2937"/>
-                          </a:solidFill>
-                          <a:latin typeface="Microsoft YaHei"/>
-                          <a:ea typeface="Microsoft YaHei"/>
-                          <a:cs typeface="Microsoft YaHei"/>
-                          <a:sym typeface="Microsoft YaHei"/>
-                        </a:defRPr>
-                      </a:pPr>
-                      <a:r>
-                        <a:rPr>
-                          <a:latin typeface="+mj-lt"/>
-                          <a:ea typeface="+mj-ea"/>
-                          <a:cs typeface="+mj-cs"/>
-                          <a:sym typeface="Helvetica Neue"/>
-                        </a:rPr>
-                        <a:t>轨迹里程</a:t>
-                      </a:r>
-                    </a:p>
-                  </a:txBody>
-                  <a:tcPr marL="64008" marR="64008" marT="64008" marB="64008" anchor="ctr" anchorCtr="0" horzOverflow="overflow">
-                    <a:solidFill>
-                      <a:srgbClr val="FFFFFF"/>
-                    </a:solidFill>
-                  </a:tcPr>
-                </a:tc>
-                <a:tc>
-                  <a:txBody>
-                    <a:bodyPr/>
-                    <a:lstStyle/>
-                    <a:p>
-                      <a:pPr/>
-                      <a:r>
-                        <a:rPr sz="2200">
-                          <a:solidFill>
-                            <a:srgbClr val="586577"/>
-                          </a:solidFill>
-                          <a:latin typeface="Microsoft YaHei"/>
-                          <a:ea typeface="Microsoft YaHei"/>
-                          <a:cs typeface="Microsoft YaHei"/>
-                          <a:sym typeface="Microsoft YaHei"/>
-                        </a:rPr>
-                        <a:t>route_distance_m / route_geom</a:t>
-                      </a:r>
-                    </a:p>
-                  </a:txBody>
-                  <a:tcPr marL="64008" marR="64008" marT="64008" marB="64008" anchor="ctr" anchorCtr="0" horzOverflow="overflow">
-                    <a:solidFill>
-                      <a:srgbClr val="FFFFFF"/>
-                    </a:solidFill>
-                  </a:tcPr>
-                </a:tc>
-                <a:tc>
-                  <a:txBody>
-                    <a:bodyPr/>
-                    <a:lstStyle/>
-                    <a:p>
-                      <a:pPr>
-                        <a:defRPr sz="2200">
-                          <a:solidFill>
-                            <a:srgbClr val="1F2937"/>
-                          </a:solidFill>
-                          <a:latin typeface="Microsoft YaHei"/>
-                          <a:ea typeface="Microsoft YaHei"/>
-                          <a:cs typeface="Microsoft YaHei"/>
-                          <a:sym typeface="Microsoft YaHei"/>
-                        </a:defRPr>
-                      </a:pPr>
-                      <a:r>
-                        <a:rPr>
-                          <a:latin typeface="+mj-lt"/>
-                          <a:ea typeface="+mj-ea"/>
-                          <a:cs typeface="+mj-cs"/>
-                          <a:sym typeface="Helvetica Neue"/>
-                        </a:rPr>
-                        <a:t>优先 </a:t>
-                      </a:r>
-                      <a:r>
-                        <a:t>route_distance_m / 1000</a:t>
-                      </a:r>
-                      <a:r>
-                        <a:rPr>
-                          <a:latin typeface="+mj-lt"/>
-                          <a:ea typeface="+mj-ea"/>
-                          <a:cs typeface="+mj-cs"/>
-                          <a:sym typeface="Helvetica Neue"/>
-                        </a:rPr>
-                        <a:t>。</a:t>
-                      </a:r>
-                      <a:endParaRPr>
-                        <a:latin typeface="+mj-lt"/>
-                        <a:ea typeface="+mj-ea"/>
-                        <a:cs typeface="+mj-cs"/>
-                        <a:sym typeface="Helvetica Neue"/>
-                      </a:endParaRPr>
-                    </a:p>
-                    <a:p>
-                      <a:pPr>
-                        <a:defRPr sz="2200">
-                          <a:solidFill>
-                            <a:srgbClr val="1F2937"/>
-                          </a:solidFill>
-                          <a:latin typeface="Microsoft YaHei"/>
-                          <a:ea typeface="Microsoft YaHei"/>
-                          <a:cs typeface="Microsoft YaHei"/>
-                          <a:sym typeface="Microsoft YaHei"/>
-                        </a:defRPr>
-                      </a:pPr>
-                      <a:r>
-                        <a:rPr>
-                          <a:latin typeface="+mj-lt"/>
-                          <a:ea typeface="+mj-ea"/>
-                          <a:cs typeface="+mj-cs"/>
-                          <a:sym typeface="Helvetica Neue"/>
-                        </a:rPr>
-                        <a:t>缺失时按轨迹点 </a:t>
-                      </a:r>
-                      <a:r>
-                        <a:t>haversine </a:t>
-                      </a:r>
-                      <a:r>
-                        <a:rPr>
-                          <a:latin typeface="+mj-lt"/>
-                          <a:ea typeface="+mj-ea"/>
-                          <a:cs typeface="+mj-cs"/>
-                          <a:sym typeface="Helvetica Neue"/>
-                        </a:rPr>
-                        <a:t>距离累加，保留 </a:t>
-                      </a:r>
-                      <a:r>
-                        <a:t>2 </a:t>
-                      </a:r>
-                      <a:r>
-                        <a:rPr>
-                          <a:latin typeface="+mj-lt"/>
-                          <a:ea typeface="+mj-ea"/>
-                          <a:cs typeface="+mj-cs"/>
-                          <a:sym typeface="Helvetica Neue"/>
-                        </a:rPr>
-                        <a:t>位小数。</a:t>
-                      </a:r>
-                    </a:p>
-                  </a:txBody>
-                  <a:tcPr marL="64008" marR="64008" marT="64008" marB="64008" anchor="ctr" anchorCtr="0" horzOverflow="overflow">
-                    <a:solidFill>
-                      <a:srgbClr val="FFFFFF"/>
-                    </a:solidFill>
-                  </a:tcPr>
-                </a:tc>
-              </a:tr>
-              <a:tr h="1337310">
-                <a:tc>
-                  <a:txBody>
-                    <a:bodyPr/>
-                    <a:lstStyle/>
-                    <a:p>
-                      <a:pPr>
-                        <a:defRPr b="1" sz="2200">
-                          <a:solidFill>
-                            <a:srgbClr val="1F2937"/>
-                          </a:solidFill>
-                          <a:latin typeface="Microsoft YaHei"/>
-                          <a:ea typeface="Microsoft YaHei"/>
-                          <a:cs typeface="Microsoft YaHei"/>
-                          <a:sym typeface="Microsoft YaHei"/>
-                        </a:defRPr>
-                      </a:pPr>
-                      <a:r>
-                        <a:rPr>
-                          <a:latin typeface="+mj-lt"/>
-                          <a:ea typeface="+mj-ea"/>
-                          <a:cs typeface="+mj-cs"/>
-                          <a:sym typeface="Helvetica Neue"/>
-                        </a:rPr>
-                        <a:t>轨迹均速</a:t>
-                      </a:r>
-                    </a:p>
-                  </a:txBody>
-                  <a:tcPr marL="64008" marR="64008" marT="64008" marB="64008" anchor="ctr" anchorCtr="0" horzOverflow="overflow">
-                    <a:solidFill>
-                      <a:srgbClr val="FAFCFE"/>
-                    </a:solidFill>
-                  </a:tcPr>
-                </a:tc>
-                <a:tc>
-                  <a:txBody>
-                    <a:bodyPr/>
-                    <a:lstStyle/>
-                    <a:p>
-                      <a:pPr/>
-                      <a:r>
-                        <a:rPr sz="2200">
-                          <a:solidFill>
-                            <a:srgbClr val="586577"/>
-                          </a:solidFill>
-                          <a:latin typeface="Microsoft YaHei"/>
-                          <a:ea typeface="Microsoft YaHei"/>
-                          <a:cs typeface="Microsoft YaHei"/>
-                          <a:sym typeface="Microsoft YaHei"/>
-                        </a:rPr>
-                        <a:t>avg_speed_kmh / trip_duration_s</a:t>
-                      </a:r>
-                    </a:p>
-                  </a:txBody>
-                  <a:tcPr marL="64008" marR="64008" marT="64008" marB="64008" anchor="ctr" anchorCtr="0" horzOverflow="overflow">
-                    <a:solidFill>
-                      <a:srgbClr val="FAFCFE"/>
-                    </a:solidFill>
-                  </a:tcPr>
-                </a:tc>
-                <a:tc>
-                  <a:txBody>
-                    <a:bodyPr/>
-                    <a:lstStyle/>
-                    <a:p>
-                      <a:pPr>
-                        <a:defRPr sz="2200">
-                          <a:solidFill>
-                            <a:srgbClr val="1F2937"/>
-                          </a:solidFill>
-                          <a:latin typeface="Microsoft YaHei"/>
-                          <a:ea typeface="Microsoft YaHei"/>
-                          <a:cs typeface="Microsoft YaHei"/>
-                          <a:sym typeface="Microsoft YaHei"/>
-                        </a:defRPr>
-                      </a:pPr>
-                      <a:r>
-                        <a:rPr>
-                          <a:latin typeface="+mj-lt"/>
-                          <a:ea typeface="+mj-ea"/>
-                          <a:cs typeface="+mj-cs"/>
-                          <a:sym typeface="Helvetica Neue"/>
-                        </a:rPr>
-                        <a:t>优先 </a:t>
-                      </a:r>
-                      <a:r>
-                        <a:t>avg_speed_kmh</a:t>
-                      </a:r>
-                      <a:r>
-                        <a:rPr>
-                          <a:latin typeface="+mj-lt"/>
-                          <a:ea typeface="+mj-ea"/>
-                          <a:cs typeface="+mj-cs"/>
-                          <a:sym typeface="Helvetica Neue"/>
-                        </a:rPr>
-                        <a:t>；缺失时 </a:t>
-                      </a:r>
-                      <a:r>
-                        <a:t>distanceKm / trip_duration_s × 3600</a:t>
-                      </a:r>
-                      <a:r>
-                        <a:rPr>
-                          <a:latin typeface="+mj-lt"/>
-                          <a:ea typeface="+mj-ea"/>
-                          <a:cs typeface="+mj-cs"/>
-                          <a:sym typeface="Helvetica Neue"/>
-                        </a:rPr>
-                        <a:t>。</a:t>
-                      </a:r>
-                      <a:endParaRPr>
-                        <a:latin typeface="+mj-lt"/>
-                        <a:ea typeface="+mj-ea"/>
-                        <a:cs typeface="+mj-cs"/>
-                        <a:sym typeface="Helvetica Neue"/>
-                      </a:endParaRPr>
-                    </a:p>
-                    <a:p>
-                      <a:pPr>
-                        <a:defRPr sz="2200">
-                          <a:solidFill>
-                            <a:srgbClr val="1F2937"/>
-                          </a:solidFill>
-                          <a:latin typeface="Microsoft YaHei"/>
-                          <a:ea typeface="Microsoft YaHei"/>
-                          <a:cs typeface="Microsoft YaHei"/>
-                          <a:sym typeface="Microsoft YaHei"/>
-                        </a:defRPr>
-                      </a:pPr>
-                      <a:r>
-                        <a:rPr>
-                          <a:latin typeface="+mj-lt"/>
-                          <a:ea typeface="+mj-ea"/>
-                          <a:cs typeface="+mj-cs"/>
-                          <a:sym typeface="Helvetica Neue"/>
-                        </a:rPr>
-                        <a:t>若速度 </a:t>
-                      </a:r>
-                      <a:r>
-                        <a:t>≤0 </a:t>
-                      </a:r>
-                      <a:r>
-                        <a:rPr>
-                          <a:latin typeface="+mj-lt"/>
-                          <a:ea typeface="+mj-ea"/>
-                          <a:cs typeface="+mj-cs"/>
-                          <a:sym typeface="Helvetica Neue"/>
-                        </a:rPr>
-                        <a:t>或 </a:t>
-                      </a:r>
-                      <a:r>
-                        <a:t>&gt;120</a:t>
-                      </a:r>
-                      <a:r>
-                        <a:rPr>
-                          <a:latin typeface="+mj-lt"/>
-                          <a:ea typeface="+mj-ea"/>
-                          <a:cs typeface="+mj-cs"/>
-                          <a:sym typeface="Helvetica Neue"/>
-                        </a:rPr>
-                        <a:t>，则用估算函数修正。</a:t>
-                      </a:r>
-                    </a:p>
-                  </a:txBody>
-                  <a:tcPr marL="64008" marR="64008" marT="64008" marB="64008" anchor="ctr" anchorCtr="0" horzOverflow="overflow">
-                    <a:solidFill>
-                      <a:srgbClr val="FAFCFE"/>
-                    </a:solidFill>
-                  </a:tcPr>
-                </a:tc>
-              </a:tr>
-              <a:tr h="1337310">
-                <a:tc>
-                  <a:txBody>
-                    <a:bodyPr/>
-                    <a:lstStyle/>
-                    <a:p>
-                      <a:pPr>
-                        <a:defRPr b="1" sz="2200">
-                          <a:solidFill>
-                            <a:srgbClr val="1F2937"/>
-                          </a:solidFill>
-                          <a:latin typeface="Microsoft YaHei"/>
-                          <a:ea typeface="Microsoft YaHei"/>
-                          <a:cs typeface="Microsoft YaHei"/>
-                          <a:sym typeface="Microsoft YaHei"/>
-                        </a:defRPr>
-                      </a:pPr>
-                      <a:r>
-                        <a:rPr>
-                          <a:latin typeface="+mj-lt"/>
-                          <a:ea typeface="+mj-ea"/>
-                          <a:cs typeface="+mj-cs"/>
-                          <a:sym typeface="Helvetica Neue"/>
-                        </a:rPr>
-                        <a:t>速度等级</a:t>
-                      </a:r>
-                    </a:p>
-                  </a:txBody>
-                  <a:tcPr marL="64008" marR="64008" marT="64008" marB="64008" anchor="ctr" anchorCtr="0" horzOverflow="overflow">
-                    <a:solidFill>
-                      <a:srgbClr val="FFFFFF"/>
-                    </a:solidFill>
-                  </a:tcPr>
-                </a:tc>
-                <a:tc>
-                  <a:txBody>
-                    <a:bodyPr/>
-                    <a:lstStyle/>
-                    <a:p>
-                      <a:pPr>
-                        <a:defRPr sz="2200">
-                          <a:solidFill>
-                            <a:srgbClr val="586577"/>
-                          </a:solidFill>
-                          <a:latin typeface="Microsoft YaHei"/>
-                          <a:ea typeface="Microsoft YaHei"/>
-                          <a:cs typeface="Microsoft YaHei"/>
-                          <a:sym typeface="Microsoft YaHei"/>
-                        </a:defRPr>
-                      </a:pPr>
-                      <a:r>
-                        <a:rPr>
-                          <a:latin typeface="+mj-lt"/>
-                          <a:ea typeface="+mj-ea"/>
-                          <a:cs typeface="+mj-cs"/>
-                          <a:sym typeface="Helvetica Neue"/>
-                        </a:rPr>
-                        <a:t>由轨迹均速派生</a:t>
-                      </a:r>
-                    </a:p>
-                  </a:txBody>
-                  <a:tcPr marL="64008" marR="64008" marT="64008" marB="64008" anchor="ctr" anchorCtr="0" horzOverflow="overflow">
-                    <a:solidFill>
-                      <a:srgbClr val="FFFFFF"/>
-                    </a:solidFill>
-                  </a:tcPr>
-                </a:tc>
-                <a:tc>
-                  <a:txBody>
-                    <a:bodyPr/>
-                    <a:lstStyle/>
-                    <a:p>
-                      <a:pPr>
-                        <a:defRPr sz="2200">
-                          <a:solidFill>
-                            <a:srgbClr val="1F2937"/>
-                          </a:solidFill>
-                          <a:latin typeface="Microsoft YaHei"/>
-                          <a:ea typeface="Microsoft YaHei"/>
-                          <a:cs typeface="Microsoft YaHei"/>
-                          <a:sym typeface="Microsoft YaHei"/>
-                        </a:defRPr>
-                      </a:pPr>
-                      <a:r>
-                        <a:t>avgSpeedKmh &lt; 18</a:t>
-                      </a:r>
-                      <a:r>
-                        <a:rPr>
-                          <a:latin typeface="+mj-lt"/>
-                          <a:ea typeface="+mj-ea"/>
-                          <a:cs typeface="+mj-cs"/>
-                          <a:sym typeface="Helvetica Neue"/>
-                        </a:rPr>
-                        <a:t>：缓行。</a:t>
-                      </a:r>
-                      <a:endParaRPr>
-                        <a:latin typeface="+mj-lt"/>
-                        <a:ea typeface="+mj-ea"/>
-                        <a:cs typeface="+mj-cs"/>
-                        <a:sym typeface="Helvetica Neue"/>
-                      </a:endParaRPr>
-                    </a:p>
-                    <a:p>
-                      <a:pPr>
-                        <a:defRPr sz="2200">
-                          <a:solidFill>
-                            <a:srgbClr val="1F2937"/>
-                          </a:solidFill>
-                          <a:latin typeface="Microsoft YaHei"/>
-                          <a:ea typeface="Microsoft YaHei"/>
-                          <a:cs typeface="Microsoft YaHei"/>
-                          <a:sym typeface="Microsoft YaHei"/>
-                        </a:defRPr>
-                      </a:pPr>
-                      <a:r>
-                        <a:t>18 ≤ avgSpeedKmh &lt; 35</a:t>
-                      </a:r>
-                      <a:r>
-                        <a:rPr>
-                          <a:latin typeface="+mj-lt"/>
-                          <a:ea typeface="+mj-ea"/>
-                          <a:cs typeface="+mj-cs"/>
-                          <a:sym typeface="Helvetica Neue"/>
-                        </a:rPr>
-                        <a:t>：平稳。</a:t>
-                      </a:r>
-                      <a:endParaRPr>
-                        <a:latin typeface="+mj-lt"/>
-                        <a:ea typeface="+mj-ea"/>
-                        <a:cs typeface="+mj-cs"/>
-                        <a:sym typeface="Helvetica Neue"/>
-                      </a:endParaRPr>
-                    </a:p>
-                    <a:p>
-                      <a:pPr>
-                        <a:defRPr sz="2200">
-                          <a:solidFill>
-                            <a:srgbClr val="1F2937"/>
-                          </a:solidFill>
-                          <a:latin typeface="Microsoft YaHei"/>
-                          <a:ea typeface="Microsoft YaHei"/>
-                          <a:cs typeface="Microsoft YaHei"/>
-                          <a:sym typeface="Microsoft YaHei"/>
-                        </a:defRPr>
-                      </a:pPr>
-                      <a:r>
-                        <a:t>avgSpeedKmh ≥ 35</a:t>
-                      </a:r>
-                      <a:r>
-                        <a:rPr>
-                          <a:latin typeface="+mj-lt"/>
-                          <a:ea typeface="+mj-ea"/>
-                          <a:cs typeface="+mj-cs"/>
+                          <a:latin typeface="+mn-lt"/>
+                          <a:ea typeface="+mn-ea"/>
+                          <a:cs typeface="+mn-cs"/>
                           <a:sym typeface="Helvetica Neue"/>
                         </a:rPr>
                         <a:t>：畅通。</a:t>
@@ -12813,7 +12482,7 @@
       </p:grpSpPr>
       <p:sp>
         <p:nvSpPr>
-          <p:cNvPr id="273" name="Rectangle 1"/>
+          <p:cNvPr id="274" name="Rectangle 1"/>
           <p:cNvSpPr/>
           <p:nvPr/>
         </p:nvSpPr>
@@ -12841,6 +12510,10 @@
                 <a:solidFill>
                   <a:srgbClr val="FFFFFF"/>
                 </a:solidFill>
+                <a:latin typeface="+mn-lt"/>
+                <a:ea typeface="+mn-ea"/>
+                <a:cs typeface="+mn-cs"/>
+                <a:sym typeface="Helvetica Neue"/>
               </a:defRPr>
             </a:pPr>
           </a:p>
@@ -12848,7 +12521,7 @@
       </p:sp>
       <p:sp>
         <p:nvSpPr>
-          <p:cNvPr id="274" name="Rectangle 2"/>
+          <p:cNvPr id="275" name="Rectangle 2"/>
           <p:cNvSpPr/>
           <p:nvPr/>
         </p:nvSpPr>
@@ -12876,6 +12549,10 @@
                 <a:solidFill>
                   <a:srgbClr val="FFFFFF"/>
                 </a:solidFill>
+                <a:latin typeface="+mn-lt"/>
+                <a:ea typeface="+mn-ea"/>
+                <a:cs typeface="+mn-cs"/>
+                <a:sym typeface="Helvetica Neue"/>
               </a:defRPr>
             </a:pPr>
           </a:p>
@@ -12883,14 +12560,14 @@
       </p:sp>
       <p:sp>
         <p:nvSpPr>
-          <p:cNvPr id="275" name="Rectangle 3"/>
+          <p:cNvPr id="276" name="Rectangle 3"/>
           <p:cNvSpPr/>
           <p:nvPr/>
         </p:nvSpPr>
         <p:spPr>
           <a:xfrm>
             <a:off x="0" y="1325880"/>
-            <a:ext cx="24384000" cy="73153"/>
+            <a:ext cx="24384000" cy="73154"/>
           </a:xfrm>
           <a:prstGeom prst="rect">
             <a:avLst/>
@@ -12911,6 +12588,10 @@
                 <a:solidFill>
                   <a:srgbClr val="FFFFFF"/>
                 </a:solidFill>
+                <a:latin typeface="+mn-lt"/>
+                <a:ea typeface="+mn-ea"/>
+                <a:cs typeface="+mn-cs"/>
+                <a:sym typeface="Helvetica Neue"/>
               </a:defRPr>
             </a:pPr>
           </a:p>
@@ -12918,13 +12599,13 @@
       </p:sp>
       <p:sp>
         <p:nvSpPr>
-          <p:cNvPr id="276" name="TextBox 4"/>
+          <p:cNvPr id="277" name="TextBox 4"/>
           <p:cNvSpPr txBox="1"/>
           <p:nvPr/>
         </p:nvSpPr>
         <p:spPr>
           <a:xfrm>
-            <a:off x="914400" y="256031"/>
+            <a:off x="914399" y="256030"/>
             <a:ext cx="7188513" cy="533401"/>
           </a:xfrm>
           <a:prstGeom prst="rect">
@@ -12950,31 +12631,25 @@
                 <a:solidFill>
                   <a:srgbClr val="FFFFFF"/>
                 </a:solidFill>
+                <a:latin typeface="+mn-lt"/>
+                <a:ea typeface="+mn-ea"/>
+                <a:cs typeface="+mn-cs"/>
+                <a:sym typeface="Helvetica Neue"/>
+              </a:defRPr>
+            </a:pPr>
+            <a:r>
+              <a:t>计算口径 </a:t>
+            </a:r>
+            <a:r>
+              <a:rPr>
                 <a:latin typeface="Microsoft YaHei"/>
                 <a:ea typeface="Microsoft YaHei"/>
                 <a:cs typeface="Microsoft YaHei"/>
                 <a:sym typeface="Microsoft YaHei"/>
-              </a:defRPr>
-            </a:pPr>
-            <a:r>
-              <a:rPr>
-                <a:latin typeface="+mj-lt"/>
-                <a:ea typeface="+mj-ea"/>
-                <a:cs typeface="+mj-cs"/>
-                <a:sym typeface="Helvetica Neue"/>
               </a:rPr>
-              <a:t>计算口径 </a:t>
-            </a:r>
-            <a:r>
               <a:t>4</a:t>
             </a:r>
             <a:r>
-              <a:rPr>
-                <a:latin typeface="+mj-lt"/>
-                <a:ea typeface="+mj-ea"/>
-                <a:cs typeface="+mj-cs"/>
-                <a:sym typeface="Helvetica Neue"/>
-              </a:rPr>
               <a:t>：地图图层、派生展示与新鲜度</a:t>
             </a:r>
           </a:p>
@@ -12982,14 +12657,14 @@
       </p:sp>
       <p:sp>
         <p:nvSpPr>
-          <p:cNvPr id="277" name="TextBox 5"/>
+          <p:cNvPr id="278" name="TextBox 5"/>
           <p:cNvSpPr txBox="1"/>
           <p:nvPr/>
         </p:nvSpPr>
         <p:spPr>
           <a:xfrm>
-            <a:off x="22415500" y="347472"/>
-            <a:ext cx="764541" cy="320041"/>
+            <a:off x="22415499" y="347473"/>
+            <a:ext cx="764539" cy="320039"/>
           </a:xfrm>
           <a:prstGeom prst="rect">
             <a:avLst/>
@@ -13004,7 +12679,7 @@
           </a:extLst>
         </p:spPr>
         <p:txBody>
-          <a:bodyPr wrap="none" lIns="45719" rIns="45719">
+          <a:bodyPr wrap="none" lIns="45718" tIns="45718" rIns="45718" bIns="45718">
             <a:spAutoFit/>
           </a:bodyPr>
           <a:lstStyle>
@@ -13013,25 +12688,16 @@
                 <a:solidFill>
                   <a:srgbClr val="C6E7EE"/>
                 </a:solidFill>
+                <a:latin typeface="+mn-lt"/>
+                <a:ea typeface="+mn-ea"/>
+                <a:cs typeface="+mn-cs"/>
+                <a:sym typeface="Helvetica Neue"/>
               </a:defRPr>
             </a:lvl1pPr>
           </a:lstStyle>
           <a:p>
-            <a:pPr>
-              <a:defRPr>
-                <a:latin typeface="Microsoft YaHei"/>
-                <a:ea typeface="Microsoft YaHei"/>
-                <a:cs typeface="Microsoft YaHei"/>
-                <a:sym typeface="Microsoft YaHei"/>
-              </a:defRPr>
-            </a:pPr>
-            <a:r>
-              <a:rPr>
-                <a:latin typeface="+mj-lt"/>
-                <a:ea typeface="+mj-ea"/>
-                <a:cs typeface="+mj-cs"/>
-                <a:sym typeface="Helvetica Neue"/>
-              </a:rPr>
+            <a:pPr/>
+            <a:r>
               <a:t>前端派生</a:t>
             </a:r>
           </a:p>
@@ -13039,13 +12705,13 @@
       </p:sp>
       <p:graphicFrame>
         <p:nvGraphicFramePr>
-          <p:cNvPr id="278" name="Table 6"/>
+          <p:cNvPr id="279" name="Table 6"/>
           <p:cNvGraphicFramePr/>
           <p:nvPr/>
         </p:nvGraphicFramePr>
         <p:xfrm>
-          <a:off x="822960" y="1874518"/>
-          <a:ext cx="22722840" cy="10698482"/>
+          <a:off x="822960" y="1874517"/>
+          <a:ext cx="22722840" cy="10698483"/>
         </p:xfrm>
         <a:graphic xmlns:a="http://schemas.openxmlformats.org/drawingml/2006/main">
           <a:graphicData uri="http://schemas.openxmlformats.org/drawingml/2006/table">
@@ -13065,22 +12731,17 @@
                     <a:lstStyle/>
                     <a:p>
                       <a:pPr>
-                        <a:defRPr sz="2200">
+                        <a:defRPr b="0">
+                          <a:solidFill>
+                            <a:srgbClr val="000000"/>
+                          </a:solidFill>
+                        </a:defRPr>
+                      </a:pPr>
+                      <a:r>
+                        <a:rPr b="1" sz="2200">
                           <a:solidFill>
                             <a:srgbClr val="16314E"/>
                           </a:solidFill>
-                          <a:latin typeface="Microsoft YaHei"/>
-                          <a:ea typeface="Microsoft YaHei"/>
-                          <a:cs typeface="Microsoft YaHei"/>
-                          <a:sym typeface="Microsoft YaHei"/>
-                        </a:defRPr>
-                      </a:pPr>
-                      <a:r>
-                        <a:rPr>
-                          <a:latin typeface="+mj-lt"/>
-                          <a:ea typeface="+mj-ea"/>
-                          <a:cs typeface="+mj-cs"/>
-                          <a:sym typeface="Helvetica Neue"/>
                         </a:rPr>
                         <a:t>数据项</a:t>
                       </a:r>
@@ -13102,31 +12763,21 @@
                           <a:solidFill>
                             <a:srgbClr val="16314E"/>
                           </a:solidFill>
+                        </a:defRPr>
+                      </a:pPr>
+                      <a:r>
+                        <a:t>来源字段 </a:t>
+                      </a:r>
+                      <a:r>
+                        <a:rPr>
                           <a:latin typeface="Microsoft YaHei"/>
                           <a:ea typeface="Microsoft YaHei"/>
                           <a:cs typeface="Microsoft YaHei"/>
                           <a:sym typeface="Microsoft YaHei"/>
-                        </a:defRPr>
-                      </a:pPr>
-                      <a:r>
-                        <a:rPr>
-                          <a:latin typeface="+mj-lt"/>
-                          <a:ea typeface="+mj-ea"/>
-                          <a:cs typeface="+mj-cs"/>
-                          <a:sym typeface="Helvetica Neue"/>
                         </a:rPr>
-                        <a:t>来源字段 </a:t>
-                      </a:r>
-                      <a:r>
                         <a:t>/ </a:t>
                       </a:r>
                       <a:r>
-                        <a:rPr>
-                          <a:latin typeface="+mj-lt"/>
-                          <a:ea typeface="+mj-ea"/>
-                          <a:cs typeface="+mj-cs"/>
-                          <a:sym typeface="Helvetica Neue"/>
-                        </a:rPr>
                         <a:t>数据表</a:t>
                       </a:r>
                     </a:p>
@@ -13147,31 +12798,21 @@
                           <a:solidFill>
                             <a:srgbClr val="16314E"/>
                           </a:solidFill>
+                        </a:defRPr>
+                      </a:pPr>
+                      <a:r>
+                        <a:t>计算方式 </a:t>
+                      </a:r>
+                      <a:r>
+                        <a:rPr>
                           <a:latin typeface="Microsoft YaHei"/>
                           <a:ea typeface="Microsoft YaHei"/>
                           <a:cs typeface="Microsoft YaHei"/>
                           <a:sym typeface="Microsoft YaHei"/>
-                        </a:defRPr>
-                      </a:pPr>
-                      <a:r>
-                        <a:rPr>
-                          <a:latin typeface="+mj-lt"/>
-                          <a:ea typeface="+mj-ea"/>
-                          <a:cs typeface="+mj-cs"/>
-                          <a:sym typeface="Helvetica Neue"/>
                         </a:rPr>
-                        <a:t>计算方式 </a:t>
-                      </a:r>
-                      <a:r>
                         <a:t>/ </a:t>
                       </a:r>
                       <a:r>
-                        <a:rPr>
-                          <a:latin typeface="+mj-lt"/>
-                          <a:ea typeface="+mj-ea"/>
-                          <a:cs typeface="+mj-cs"/>
-                          <a:sym typeface="Helvetica Neue"/>
-                        </a:rPr>
                         <a:t>口径说明</a:t>
                       </a:r>
                     </a:p>
@@ -13189,23 +12830,12 @@
                     <a:bodyPr/>
                     <a:lstStyle/>
                     <a:p>
-                      <a:pPr>
-                        <a:defRPr b="1" sz="2200">
+                      <a:pPr/>
+                      <a:r>
+                        <a:rPr b="1" sz="2200">
                           <a:solidFill>
                             <a:srgbClr val="1F2937"/>
                           </a:solidFill>
-                          <a:latin typeface="Microsoft YaHei"/>
-                          <a:ea typeface="Microsoft YaHei"/>
-                          <a:cs typeface="Microsoft YaHei"/>
-                          <a:sym typeface="Microsoft YaHei"/>
-                        </a:defRPr>
-                      </a:pPr>
-                      <a:r>
-                        <a:rPr>
-                          <a:latin typeface="+mj-lt"/>
-                          <a:ea typeface="+mj-ea"/>
-                          <a:cs typeface="+mj-cs"/>
-                          <a:sym typeface="Helvetica Neue"/>
                         </a:rPr>
                         <a:t>地图区域</a:t>
                       </a:r>
@@ -13264,19 +12894,13 @@
                       </a:r>
                       <a:r>
                         <a:rPr>
-                          <a:latin typeface="+mj-lt"/>
-                          <a:ea typeface="+mj-ea"/>
-                          <a:cs typeface="+mj-cs"/>
+                          <a:latin typeface="+mn-lt"/>
+                          <a:ea typeface="+mn-ea"/>
+                          <a:cs typeface="+mn-cs"/>
                           <a:sym typeface="Helvetica Neue"/>
                         </a:rPr>
                         <a:t>来源于热点。</a:t>
                       </a:r>
-                      <a:endParaRPr>
-                        <a:latin typeface="+mj-lt"/>
-                        <a:ea typeface="+mj-ea"/>
-                        <a:cs typeface="+mj-cs"/>
-                        <a:sym typeface="Helvetica Neue"/>
-                      </a:endParaRPr>
                     </a:p>
                     <a:p>
                       <a:pPr>
@@ -13295,9 +12919,9 @@
                       </a:r>
                       <a:r>
                         <a:rPr>
-                          <a:latin typeface="+mj-lt"/>
-                          <a:ea typeface="+mj-ea"/>
-                          <a:cs typeface="+mj-cs"/>
+                          <a:latin typeface="+mn-lt"/>
+                          <a:ea typeface="+mn-ea"/>
+                          <a:cs typeface="+mn-cs"/>
                           <a:sym typeface="Helvetica Neue"/>
                         </a:rPr>
                         <a:t>，缺失时 </a:t>
@@ -13307,9 +12931,9 @@
                       </a:r>
                       <a:r>
                         <a:rPr>
-                          <a:latin typeface="+mj-lt"/>
-                          <a:ea typeface="+mj-ea"/>
-                          <a:cs typeface="+mj-cs"/>
+                          <a:latin typeface="+mn-lt"/>
+                          <a:ea typeface="+mn-ea"/>
+                          <a:cs typeface="+mn-cs"/>
                           <a:sym typeface="Helvetica Neue"/>
                         </a:rPr>
                         <a:t>；</a:t>
@@ -13319,9 +12943,9 @@
                       </a:r>
                       <a:r>
                         <a:rPr>
-                          <a:latin typeface="+mj-lt"/>
-                          <a:ea typeface="+mj-ea"/>
-                          <a:cs typeface="+mj-cs"/>
+                          <a:latin typeface="+mn-lt"/>
+                          <a:ea typeface="+mn-ea"/>
+                          <a:cs typeface="+mn-cs"/>
                           <a:sym typeface="Helvetica Neue"/>
                         </a:rPr>
                         <a:t>，缺失时 </a:t>
@@ -13331,9 +12955,9 @@
                       </a:r>
                       <a:r>
                         <a:rPr>
-                          <a:latin typeface="+mj-lt"/>
-                          <a:ea typeface="+mj-ea"/>
-                          <a:cs typeface="+mj-cs"/>
+                          <a:latin typeface="+mn-lt"/>
+                          <a:ea typeface="+mn-ea"/>
+                          <a:cs typeface="+mn-cs"/>
                           <a:sym typeface="Helvetica Neue"/>
                         </a:rPr>
                         <a:t>。</a:t>
@@ -13353,25 +12977,228 @@
                     <a:bodyPr/>
                     <a:lstStyle/>
                     <a:p>
-                      <a:pPr>
-                        <a:defRPr b="1" sz="2200">
+                      <a:pPr/>
+                      <a:r>
+                        <a:rPr b="1" sz="2200">
                           <a:solidFill>
                             <a:srgbClr val="1F2937"/>
+                          </a:solidFill>
+                        </a:rPr>
+                        <a:t>区域等级</a:t>
+                      </a:r>
+                    </a:p>
+                  </a:txBody>
+                  <a:tcPr marL="64008" marR="64008" marT="64008" marB="64008" anchor="ctr" anchorCtr="0" horzOverflow="overflow">
+                    <a:solidFill>
+                      <a:srgbClr val="FAFCFE"/>
+                    </a:solidFill>
+                  </a:tcPr>
+                </a:tc>
+                <a:tc>
+                  <a:txBody>
+                    <a:bodyPr/>
+                    <a:lstStyle/>
+                    <a:p>
+                      <a:pPr/>
+                      <a:r>
+                        <a:rPr sz="2200">
+                          <a:solidFill>
+                            <a:srgbClr val="586577"/>
+                          </a:solidFill>
+                        </a:rPr>
+                        <a:t>热点排序位置</a:t>
+                      </a:r>
+                    </a:p>
+                  </a:txBody>
+                  <a:tcPr marL="64008" marR="64008" marT="64008" marB="64008" anchor="ctr" anchorCtr="0" horzOverflow="overflow">
+                    <a:solidFill>
+                      <a:srgbClr val="FAFCFE"/>
+                    </a:solidFill>
+                  </a:tcPr>
+                </a:tc>
+                <a:tc>
+                  <a:txBody>
+                    <a:bodyPr/>
+                    <a:lstStyle/>
+                    <a:p>
+                      <a:pPr>
+                        <a:defRPr sz="2200">
+                          <a:solidFill>
+                            <a:srgbClr val="1F2937"/>
+                          </a:solidFill>
+                        </a:defRPr>
+                      </a:pPr>
+                      <a:r>
+                        <a:t>第 </a:t>
+                      </a:r>
+                      <a:r>
+                        <a:rPr>
+                          <a:latin typeface="Microsoft YaHei"/>
+                          <a:ea typeface="Microsoft YaHei"/>
+                          <a:cs typeface="Microsoft YaHei"/>
+                          <a:sym typeface="Microsoft YaHei"/>
+                        </a:rPr>
+                        <a:t>1 </a:t>
+                      </a:r>
+                      <a:r>
+                        <a:t>个热点为高流量；第 </a:t>
+                      </a:r>
+                      <a:r>
+                        <a:rPr>
+                          <a:latin typeface="Microsoft YaHei"/>
+                          <a:ea typeface="Microsoft YaHei"/>
+                          <a:cs typeface="Microsoft YaHei"/>
+                          <a:sym typeface="Microsoft YaHei"/>
+                        </a:rPr>
+                        <a:t>2-5 </a:t>
+                      </a:r>
+                      <a:r>
+                        <a:t>个为中流量；其余为低流量。</a:t>
+                      </a:r>
+                    </a:p>
+                  </a:txBody>
+                  <a:tcPr marL="64008" marR="64008" marT="64008" marB="64008" anchor="ctr" anchorCtr="0" horzOverflow="overflow">
+                    <a:solidFill>
+                      <a:srgbClr val="FAFCFE"/>
+                    </a:solidFill>
+                  </a:tcPr>
+                </a:tc>
+              </a:tr>
+              <a:tr h="1337310">
+                <a:tc>
+                  <a:txBody>
+                    <a:bodyPr/>
+                    <a:lstStyle/>
+                    <a:p>
+                      <a:pPr/>
+                      <a:r>
+                        <a:rPr b="1" sz="2200">
+                          <a:solidFill>
+                            <a:srgbClr val="1F2937"/>
+                          </a:solidFill>
+                        </a:rPr>
+                        <a:t>热力点</a:t>
+                      </a:r>
+                    </a:p>
+                  </a:txBody>
+                  <a:tcPr marL="64008" marR="64008" marT="64008" marB="64008" anchor="ctr" anchorCtr="0" horzOverflow="overflow">
+                    <a:solidFill>
+                      <a:srgbClr val="FFFFFF"/>
+                    </a:solidFill>
+                  </a:tcPr>
+                </a:tc>
+                <a:tc>
+                  <a:txBody>
+                    <a:bodyPr/>
+                    <a:lstStyle/>
+                    <a:p>
+                      <a:pPr/>
+                      <a:r>
+                        <a:rPr sz="2200">
+                          <a:solidFill>
+                            <a:srgbClr val="586577"/>
                           </a:solidFill>
                           <a:latin typeface="Microsoft YaHei"/>
                           <a:ea typeface="Microsoft YaHei"/>
                           <a:cs typeface="Microsoft YaHei"/>
                           <a:sym typeface="Microsoft YaHei"/>
+                        </a:rPr>
+                        <a:t>hotspots.intensity</a:t>
+                      </a:r>
+                    </a:p>
+                  </a:txBody>
+                  <a:tcPr marL="64008" marR="64008" marT="64008" marB="64008" anchor="ctr" anchorCtr="0" horzOverflow="overflow">
+                    <a:solidFill>
+                      <a:srgbClr val="FFFFFF"/>
+                    </a:solidFill>
+                  </a:tcPr>
+                </a:tc>
+                <a:tc>
+                  <a:txBody>
+                    <a:bodyPr/>
+                    <a:lstStyle/>
+                    <a:p>
+                      <a:pPr>
+                        <a:defRPr sz="2200">
+                          <a:solidFill>
+                            <a:srgbClr val="1F2937"/>
+                          </a:solidFill>
                         </a:defRPr>
                       </a:pPr>
                       <a:r>
+                        <a:t>第 </a:t>
+                      </a:r>
+                      <a:r>
                         <a:rPr>
-                          <a:latin typeface="+mj-lt"/>
-                          <a:ea typeface="+mj-ea"/>
-                          <a:cs typeface="+mj-cs"/>
-                          <a:sym typeface="Helvetica Neue"/>
+                          <a:latin typeface="Microsoft YaHei"/>
+                          <a:ea typeface="Microsoft YaHei"/>
+                          <a:cs typeface="Microsoft YaHei"/>
+                          <a:sym typeface="Microsoft YaHei"/>
                         </a:rPr>
-                        <a:t>区域等级</a:t>
+                        <a:t>1 </a:t>
+                      </a:r>
+                      <a:r>
+                        <a:t>个热点 </a:t>
+                      </a:r>
+                      <a:r>
+                        <a:rPr>
+                          <a:latin typeface="Microsoft YaHei"/>
+                          <a:ea typeface="Microsoft YaHei"/>
+                          <a:cs typeface="Microsoft YaHei"/>
+                          <a:sym typeface="Microsoft YaHei"/>
+                        </a:rPr>
+                        <a:t>intensity = 1</a:t>
+                      </a:r>
+                      <a:r>
+                        <a:t>；其他点 </a:t>
+                      </a:r>
+                      <a:r>
+                        <a:rPr>
+                          <a:latin typeface="Microsoft YaHei"/>
+                          <a:ea typeface="Microsoft YaHei"/>
+                          <a:cs typeface="Microsoft YaHei"/>
+                          <a:sym typeface="Microsoft YaHei"/>
+                        </a:rPr>
+                        <a:t>intensity = max(0.12, hotspot.intensity / 10)</a:t>
+                      </a:r>
+                      <a:r>
+                        <a:t>，保留 </a:t>
+                      </a:r>
+                      <a:r>
+                        <a:rPr>
+                          <a:latin typeface="Microsoft YaHei"/>
+                          <a:ea typeface="Microsoft YaHei"/>
+                          <a:cs typeface="Microsoft YaHei"/>
+                          <a:sym typeface="Microsoft YaHei"/>
+                        </a:rPr>
+                        <a:t>3 </a:t>
+                      </a:r>
+                      <a:r>
+                        <a:t>位小数。</a:t>
+                      </a:r>
+                    </a:p>
+                  </a:txBody>
+                  <a:tcPr marL="64008" marR="64008" marT="64008" marB="64008" anchor="ctr" anchorCtr="0" horzOverflow="overflow">
+                    <a:solidFill>
+                      <a:srgbClr val="FFFFFF"/>
+                    </a:solidFill>
+                  </a:tcPr>
+                </a:tc>
+              </a:tr>
+              <a:tr h="1337310">
+                <a:tc>
+                  <a:txBody>
+                    <a:bodyPr/>
+                    <a:lstStyle/>
+                    <a:p>
+                      <a:pPr/>
+                      <a:r>
+                        <a:rPr b="1" sz="2200">
+                          <a:solidFill>
+                            <a:srgbClr val="1F2937"/>
+                          </a:solidFill>
+                        </a:rPr>
+                        <a:t>地图边界</a:t>
                       </a:r>
                     </a:p>
                   </a:txBody>
@@ -13391,20 +13218,22 @@
                           <a:solidFill>
                             <a:srgbClr val="586577"/>
                           </a:solidFill>
+                        </a:defRPr>
+                      </a:pPr>
+                      <a:r>
+                        <a:t>热点坐标 </a:t>
+                      </a:r>
+                      <a:r>
+                        <a:rPr>
                           <a:latin typeface="Microsoft YaHei"/>
                           <a:ea typeface="Microsoft YaHei"/>
                           <a:cs typeface="Microsoft YaHei"/>
                           <a:sym typeface="Microsoft YaHei"/>
-                        </a:defRPr>
-                      </a:pPr>
-                      <a:r>
-                        <a:rPr>
-                          <a:latin typeface="+mj-lt"/>
-                          <a:ea typeface="+mj-ea"/>
-                          <a:cs typeface="+mj-cs"/>
-                          <a:sym typeface="Helvetica Neue"/>
                         </a:rPr>
-                        <a:t>热点排序位置</a:t>
+                        <a:t>+ </a:t>
+                      </a:r>
+                      <a:r>
+                        <a:t>轨迹点</a:t>
                       </a:r>
                     </a:p>
                   </a:txBody>
@@ -13431,37 +13260,40 @@
                         </a:defRPr>
                       </a:pPr>
                       <a:r>
+                        <a:t>boundsFor(allPoints)</a:t>
+                      </a:r>
+                      <a:r>
                         <a:rPr>
-                          <a:latin typeface="+mj-lt"/>
-                          <a:ea typeface="+mj-ea"/>
-                          <a:cs typeface="+mj-cs"/>
+                          <a:latin typeface="+mn-lt"/>
+                          <a:ea typeface="+mn-ea"/>
+                          <a:cs typeface="+mn-cs"/>
                           <a:sym typeface="Helvetica Neue"/>
                         </a:rPr>
-                        <a:t>第 </a:t>
-                      </a:r>
-                      <a:r>
-                        <a:t>1 </a:t>
+                        <a:t>：取所有点 </a:t>
+                      </a:r>
+                      <a:r>
+                        <a:t>min/max lat/lon</a:t>
                       </a:r>
                       <a:r>
                         <a:rPr>
-                          <a:latin typeface="+mj-lt"/>
-                          <a:ea typeface="+mj-ea"/>
-                          <a:cs typeface="+mj-cs"/>
+                          <a:latin typeface="+mn-lt"/>
+                          <a:ea typeface="+mn-ea"/>
+                          <a:cs typeface="+mn-cs"/>
                           <a:sym typeface="Helvetica Neue"/>
                         </a:rPr>
-                        <a:t>个热点为高流量；第 </a:t>
-                      </a:r>
-                      <a:r>
-                        <a:t>2-5 </a:t>
-                      </a:r>
-                      <a:r>
-                        <a:rPr>
-                          <a:latin typeface="+mj-lt"/>
-                          <a:ea typeface="+mj-ea"/>
-                          <a:cs typeface="+mj-cs"/>
-                          <a:sym typeface="Helvetica Neue"/>
-                        </a:rPr>
-                        <a:t>个为中流量；其余为低流量。</a:t>
+                        <a:t>。</a:t>
+                      </a:r>
+                    </a:p>
+                    <a:p>
+                      <a:pPr>
+                        <a:defRPr sz="2200">
+                          <a:solidFill>
+                            <a:srgbClr val="1F2937"/>
+                          </a:solidFill>
+                        </a:defRPr>
+                      </a:pPr>
+                      <a:r>
+                        <a:t>无点时使用哈尔滨默认边界。</a:t>
                       </a:r>
                     </a:p>
                   </a:txBody>
@@ -13478,25 +13310,9 @@
                     <a:bodyPr/>
                     <a:lstStyle/>
                     <a:p>
-                      <a:pPr>
-                        <a:defRPr b="1" sz="2200">
-                          <a:solidFill>
-                            <a:srgbClr val="1F2937"/>
-                          </a:solidFill>
-                          <a:latin typeface="Microsoft YaHei"/>
-                          <a:ea typeface="Microsoft YaHei"/>
-                          <a:cs typeface="Microsoft YaHei"/>
-                          <a:sym typeface="Microsoft YaHei"/>
-                        </a:defRPr>
-                      </a:pPr>
-                      <a:r>
-                        <a:rPr>
-                          <a:latin typeface="+mj-lt"/>
-                          <a:ea typeface="+mj-ea"/>
-                          <a:cs typeface="+mj-cs"/>
-                          <a:sym typeface="Helvetica Neue"/>
-                        </a:rPr>
-                        <a:t>热力点</a:t>
+                      <a:pPr/>
+                      <a:r>
+                        <a:t>复盘样本速度占比</a:t>
                       </a:r>
                     </a:p>
                   </a:txBody>
@@ -13522,7 +13338,229 @@
                           <a:cs typeface="Microsoft YaHei"/>
                           <a:sym typeface="Microsoft YaHei"/>
                         </a:rPr>
-                        <a:t>hotspots.intensity</a:t>
+                        <a:t>trips.avgSpeedKmh</a:t>
+                      </a:r>
+                    </a:p>
+                  </a:txBody>
+                  <a:tcPr marL="64008" marR="64008" marT="64008" marB="64008" anchor="ctr" anchorCtr="0" horzOverflow="overflow">
+                    <a:solidFill>
+                      <a:srgbClr val="FFFFFF"/>
+                    </a:solidFill>
+                  </a:tcPr>
+                </a:tc>
+                <a:tc>
+                  <a:txBody>
+                    <a:bodyPr/>
+                    <a:lstStyle/>
+                    <a:p>
+                      <a:pPr/>
+                      <a:r>
+                        <a:t>快速：avgSpeedKmh ≥ 35；慢速：avgSpeedKmh &lt; 18；中速：其余。
+用于“复盘样本”速度占比环图，不代表总采样轨迹。</a:t>
+                      </a:r>
+                    </a:p>
+                  </a:txBody>
+                  <a:tcPr marL="64008" marR="64008" marT="64008" marB="64008" anchor="ctr" anchorCtr="0" horzOverflow="overflow">
+                    <a:solidFill>
+                      <a:srgbClr val="FFFFFF"/>
+                    </a:solidFill>
+                  </a:tcPr>
+                </a:tc>
+              </a:tr>
+              <a:tr h="1337310">
+                <a:tc>
+                  <a:txBody>
+                    <a:bodyPr/>
+                    <a:lstStyle/>
+                    <a:p>
+                      <a:pPr/>
+                      <a:r>
+                        <a:rPr b="1" sz="2200">
+                          <a:solidFill>
+                            <a:srgbClr val="1F2937"/>
+                          </a:solidFill>
+                        </a:rPr>
+                        <a:t>服务统计</a:t>
+                      </a:r>
+                    </a:p>
+                  </a:txBody>
+                  <a:tcPr marL="64008" marR="64008" marT="64008" marB="64008" anchor="ctr" anchorCtr="0" horzOverflow="overflow">
+                    <a:solidFill>
+                      <a:srgbClr val="FAFCFE"/>
+                    </a:solidFill>
+                  </a:tcPr>
+                </a:tc>
+                <a:tc>
+                  <a:txBody>
+                    <a:bodyPr/>
+                    <a:lstStyle/>
+                    <a:p>
+                      <a:pPr/>
+                      <a:r>
+                        <a:rPr sz="2200">
+                          <a:solidFill>
+                            <a:srgbClr val="586577"/>
+                          </a:solidFill>
+                          <a:latin typeface="Microsoft YaHei"/>
+                          <a:ea typeface="Microsoft YaHei"/>
+                          <a:cs typeface="Microsoft YaHei"/>
+                          <a:sym typeface="Microsoft YaHei"/>
+                        </a:rPr>
+                        <a:t>hotspots Top5</a:t>
+                      </a:r>
+                    </a:p>
+                  </a:txBody>
+                  <a:tcPr marL="64008" marR="64008" marT="64008" marB="64008" anchor="ctr" anchorCtr="0" horzOverflow="overflow">
+                    <a:solidFill>
+                      <a:srgbClr val="FAFCFE"/>
+                    </a:solidFill>
+                  </a:tcPr>
+                </a:tc>
+                <a:tc>
+                  <a:txBody>
+                    <a:bodyPr/>
+                    <a:lstStyle/>
+                    <a:p>
+                      <a:pPr>
+                        <a:defRPr sz="2200">
+                          <a:solidFill>
+                            <a:srgbClr val="1F2937"/>
+                          </a:solidFill>
+                        </a:defRPr>
+                      </a:pPr>
+                      <a:r>
+                        <a:t>服务数据条形图使用热点 </a:t>
+                      </a:r>
+                      <a:r>
+                        <a:rPr>
+                          <a:latin typeface="Microsoft YaHei"/>
+                          <a:ea typeface="Microsoft YaHei"/>
+                          <a:cs typeface="Microsoft YaHei"/>
+                          <a:sym typeface="Microsoft YaHei"/>
+                        </a:rPr>
+                        <a:t>Top5 </a:t>
+                      </a:r>
+                      <a:r>
+                        <a:t>的 </a:t>
+                      </a:r>
+                      <a:r>
+                        <a:rPr>
+                          <a:latin typeface="Microsoft YaHei"/>
+                          <a:ea typeface="Microsoft YaHei"/>
+                          <a:cs typeface="Microsoft YaHei"/>
+                          <a:sym typeface="Microsoft YaHei"/>
+                        </a:rPr>
+                        <a:t>intensity</a:t>
+                      </a:r>
+                      <a:r>
+                        <a:t>。</a:t>
+                      </a:r>
+                    </a:p>
+                    <a:p>
+                      <a:pPr>
+                        <a:defRPr sz="2200">
+                          <a:solidFill>
+                            <a:srgbClr val="1F2937"/>
+                          </a:solidFill>
+                        </a:defRPr>
+                      </a:pPr>
+                      <a:r>
+                        <a:t>路段服务统计：频次</a:t>
+                      </a:r>
+                      <a:r>
+                        <a:rPr>
+                          <a:latin typeface="Microsoft YaHei"/>
+                          <a:ea typeface="Microsoft YaHei"/>
+                          <a:cs typeface="Microsoft YaHei"/>
+                          <a:sym typeface="Microsoft YaHei"/>
+                        </a:rPr>
+                        <a:t>=count</a:t>
+                      </a:r>
+                      <a:r>
+                        <a:t>，超速</a:t>
+                      </a:r>
+                      <a:r>
+                        <a:rPr>
+                          <a:latin typeface="Microsoft YaHei"/>
+                          <a:ea typeface="Microsoft YaHei"/>
+                          <a:cs typeface="Microsoft YaHei"/>
+                          <a:sym typeface="Microsoft YaHei"/>
+                        </a:rPr>
+                        <a:t>=round(count×0.62)</a:t>
+                      </a:r>
+                      <a:r>
+                        <a:t>，绕行</a:t>
+                      </a:r>
+                      <a:r>
+                        <a:rPr>
+                          <a:latin typeface="Microsoft YaHei"/>
+                          <a:ea typeface="Microsoft YaHei"/>
+                          <a:cs typeface="Microsoft YaHei"/>
+                          <a:sym typeface="Microsoft YaHei"/>
+                        </a:rPr>
+                        <a:t>=round(count×0.42)</a:t>
+                      </a:r>
+                      <a:r>
+                        <a:t>，为演示估算项。</a:t>
+                      </a:r>
+                    </a:p>
+                  </a:txBody>
+                  <a:tcPr marL="64008" marR="64008" marT="64008" marB="64008" anchor="ctr" anchorCtr="0" horzOverflow="overflow">
+                    <a:solidFill>
+                      <a:srgbClr val="FAFCFE"/>
+                    </a:solidFill>
+                  </a:tcPr>
+                </a:tc>
+              </a:tr>
+              <a:tr h="1337310">
+                <a:tc>
+                  <a:txBody>
+                    <a:bodyPr/>
+                    <a:lstStyle/>
+                    <a:p>
+                      <a:pPr/>
+                      <a:r>
+                        <a:rPr b="1" sz="2200">
+                          <a:solidFill>
+                            <a:srgbClr val="1F2937"/>
+                          </a:solidFill>
+                        </a:rPr>
+                        <a:t>数据新鲜度</a:t>
+                      </a:r>
+                    </a:p>
+                  </a:txBody>
+                  <a:tcPr marL="64008" marR="64008" marT="64008" marB="64008" anchor="ctr" anchorCtr="0" horzOverflow="overflow">
+                    <a:solidFill>
+                      <a:srgbClr val="FFFFFF"/>
+                    </a:solidFill>
+                  </a:tcPr>
+                </a:tc>
+                <a:tc>
+                  <a:txBody>
+                    <a:bodyPr/>
+                    <a:lstStyle/>
+                    <a:p>
+                      <a:pPr>
+                        <a:defRPr sz="2200">
+                          <a:solidFill>
+                            <a:srgbClr val="586577"/>
+                          </a:solidFill>
+                        </a:defRPr>
+                      </a:pPr>
+                      <a:r>
+                        <a:t>前端刷新 </a:t>
+                      </a:r>
+                      <a:r>
+                        <a:rPr>
+                          <a:latin typeface="Microsoft YaHei"/>
+                          <a:ea typeface="Microsoft YaHei"/>
+                          <a:cs typeface="Microsoft YaHei"/>
+                          <a:sym typeface="Microsoft YaHei"/>
+                        </a:rPr>
+                        <a:t>+ API</a:t>
+                      </a:r>
+                      <a:r>
+                        <a:t>缓存</a:t>
                       </a:r>
                     </a:p>
                   </a:txBody>
@@ -13542,203 +13580,23 @@
                           <a:solidFill>
                             <a:srgbClr val="1F2937"/>
                           </a:solidFill>
+                        </a:defRPr>
+                      </a:pPr>
+                      <a:r>
+                        <a:t>前端每 </a:t>
+                      </a:r>
+                      <a:r>
+                        <a:rPr>
                           <a:latin typeface="Microsoft YaHei"/>
                           <a:ea typeface="Microsoft YaHei"/>
                           <a:cs typeface="Microsoft YaHei"/>
                           <a:sym typeface="Microsoft YaHei"/>
-                        </a:defRPr>
-                      </a:pPr>
-                      <a:r>
-                        <a:rPr>
-                          <a:latin typeface="+mj-lt"/>
-                          <a:ea typeface="+mj-ea"/>
-                          <a:cs typeface="+mj-cs"/>
-                          <a:sym typeface="Helvetica Neue"/>
                         </a:rPr>
-                        <a:t>第 </a:t>
-                      </a:r>
-                      <a:r>
-                        <a:t>1 </a:t>
-                      </a:r>
-                      <a:r>
-                        <a:rPr>
-                          <a:latin typeface="+mj-lt"/>
-                          <a:ea typeface="+mj-ea"/>
-                          <a:cs typeface="+mj-cs"/>
-                          <a:sym typeface="Helvetica Neue"/>
-                        </a:rPr>
-                        <a:t>个热点 </a:t>
-                      </a:r>
-                      <a:r>
-                        <a:t>intensity = 1</a:t>
-                      </a:r>
-                      <a:r>
-                        <a:rPr>
-                          <a:latin typeface="+mj-lt"/>
-                          <a:ea typeface="+mj-ea"/>
-                          <a:cs typeface="+mj-cs"/>
-                          <a:sym typeface="Helvetica Neue"/>
-                        </a:rPr>
-                        <a:t>；其他点 </a:t>
-                      </a:r>
-                      <a:r>
-                        <a:t>intensity = max(0.12, hotspot.intensity / 10)</a:t>
-                      </a:r>
-                      <a:r>
-                        <a:rPr>
-                          <a:latin typeface="+mj-lt"/>
-                          <a:ea typeface="+mj-ea"/>
-                          <a:cs typeface="+mj-cs"/>
-                          <a:sym typeface="Helvetica Neue"/>
-                        </a:rPr>
-                        <a:t>，保留 </a:t>
-                      </a:r>
-                      <a:r>
-                        <a:t>3 </a:t>
-                      </a:r>
-                      <a:r>
-                        <a:rPr>
-                          <a:latin typeface="+mj-lt"/>
-                          <a:ea typeface="+mj-ea"/>
-                          <a:cs typeface="+mj-cs"/>
-                          <a:sym typeface="Helvetica Neue"/>
-                        </a:rPr>
-                        <a:t>位小数。</a:t>
-                      </a:r>
-                    </a:p>
-                  </a:txBody>
-                  <a:tcPr marL="64008" marR="64008" marT="64008" marB="64008" anchor="ctr" anchorCtr="0" horzOverflow="overflow">
-                    <a:solidFill>
-                      <a:srgbClr val="FFFFFF"/>
-                    </a:solidFill>
-                  </a:tcPr>
-                </a:tc>
-              </a:tr>
-              <a:tr h="1337310">
-                <a:tc>
-                  <a:txBody>
-                    <a:bodyPr/>
-                    <a:lstStyle/>
-                    <a:p>
-                      <a:pPr>
-                        <a:defRPr b="1" sz="2200">
-                          <a:solidFill>
-                            <a:srgbClr val="1F2937"/>
-                          </a:solidFill>
-                          <a:latin typeface="Microsoft YaHei"/>
-                          <a:ea typeface="Microsoft YaHei"/>
-                          <a:cs typeface="Microsoft YaHei"/>
-                          <a:sym typeface="Microsoft YaHei"/>
-                        </a:defRPr>
-                      </a:pPr>
-                      <a:r>
-                        <a:rPr>
-                          <a:latin typeface="+mj-lt"/>
-                          <a:ea typeface="+mj-ea"/>
-                          <a:cs typeface="+mj-cs"/>
-                          <a:sym typeface="Helvetica Neue"/>
-                        </a:rPr>
-                        <a:t>地图边界</a:t>
-                      </a:r>
-                    </a:p>
-                  </a:txBody>
-                  <a:tcPr marL="64008" marR="64008" marT="64008" marB="64008" anchor="ctr" anchorCtr="0" horzOverflow="overflow">
-                    <a:solidFill>
-                      <a:srgbClr val="FAFCFE"/>
-                    </a:solidFill>
-                  </a:tcPr>
-                </a:tc>
-                <a:tc>
-                  <a:txBody>
-                    <a:bodyPr/>
-                    <a:lstStyle/>
-                    <a:p>
-                      <a:pPr>
-                        <a:defRPr sz="2200">
-                          <a:solidFill>
-                            <a:srgbClr val="586577"/>
-                          </a:solidFill>
-                          <a:latin typeface="Microsoft YaHei"/>
-                          <a:ea typeface="Microsoft YaHei"/>
-                          <a:cs typeface="Microsoft YaHei"/>
-                          <a:sym typeface="Microsoft YaHei"/>
-                        </a:defRPr>
-                      </a:pPr>
-                      <a:r>
-                        <a:rPr>
-                          <a:latin typeface="+mj-lt"/>
-                          <a:ea typeface="+mj-ea"/>
-                          <a:cs typeface="+mj-cs"/>
-                          <a:sym typeface="Helvetica Neue"/>
-                        </a:rPr>
-                        <a:t>热点坐标 </a:t>
-                      </a:r>
-                      <a:r>
-                        <a:t>+ </a:t>
-                      </a:r>
-                      <a:r>
-                        <a:rPr>
-                          <a:latin typeface="+mj-lt"/>
-                          <a:ea typeface="+mj-ea"/>
-                          <a:cs typeface="+mj-cs"/>
-                          <a:sym typeface="Helvetica Neue"/>
-                        </a:rPr>
-                        <a:t>轨迹点</a:t>
-                      </a:r>
-                    </a:p>
-                  </a:txBody>
-                  <a:tcPr marL="64008" marR="64008" marT="64008" marB="64008" anchor="ctr" anchorCtr="0" horzOverflow="overflow">
-                    <a:solidFill>
-                      <a:srgbClr val="FAFCFE"/>
-                    </a:solidFill>
-                  </a:tcPr>
-                </a:tc>
-                <a:tc>
-                  <a:txBody>
-                    <a:bodyPr/>
-                    <a:lstStyle/>
-                    <a:p>
-                      <a:pPr>
-                        <a:defRPr sz="2200">
-                          <a:solidFill>
-                            <a:srgbClr val="1F2937"/>
-                          </a:solidFill>
-                          <a:latin typeface="Microsoft YaHei"/>
-                          <a:ea typeface="Microsoft YaHei"/>
-                          <a:cs typeface="Microsoft YaHei"/>
-                          <a:sym typeface="Microsoft YaHei"/>
-                        </a:defRPr>
-                      </a:pPr>
-                      <a:r>
-                        <a:t>boundsFor(allPoints)</a:t>
-                      </a:r>
-                      <a:r>
-                        <a:rPr>
-                          <a:latin typeface="+mj-lt"/>
-                          <a:ea typeface="+mj-ea"/>
-                          <a:cs typeface="+mj-cs"/>
-                          <a:sym typeface="Helvetica Neue"/>
-                        </a:rPr>
-                        <a:t>：取所有点 </a:t>
-                      </a:r>
-                      <a:r>
-                        <a:t>min/max lat/lon</a:t>
-                      </a:r>
-                      <a:r>
-                        <a:rPr>
-                          <a:latin typeface="+mj-lt"/>
-                          <a:ea typeface="+mj-ea"/>
-                          <a:cs typeface="+mj-cs"/>
-                          <a:sym typeface="Helvetica Neue"/>
-                        </a:rPr>
-                        <a:t>。</a:t>
-                      </a:r>
-                      <a:endParaRPr>
-                        <a:latin typeface="+mj-lt"/>
-                        <a:ea typeface="+mj-ea"/>
-                        <a:cs typeface="+mj-cs"/>
-                        <a:sym typeface="Helvetica Neue"/>
-                      </a:endParaRPr>
+                        <a:t>60 </a:t>
+                      </a:r>
+                      <a:r>
+                        <a:t>秒刷新。</a:t>
+                      </a:r>
                     </a:p>
                     <a:p>
                       <a:pPr>
@@ -13753,203 +13611,65 @@
                         </a:defRPr>
                       </a:pPr>
                       <a:r>
+                        <a:t>API TTL</a:t>
+                      </a:r>
+                      <a:r>
                         <a:rPr>
-                          <a:latin typeface="+mj-lt"/>
-                          <a:ea typeface="+mj-ea"/>
-                          <a:cs typeface="+mj-cs"/>
+                          <a:latin typeface="+mn-lt"/>
+                          <a:ea typeface="+mn-ea"/>
+                          <a:cs typeface="+mn-cs"/>
                           <a:sym typeface="Helvetica Neue"/>
                         </a:rPr>
-                        <a:t>无点时使用哈尔滨默认边界。</a:t>
-                      </a:r>
-                    </a:p>
-                  </a:txBody>
-                  <a:tcPr marL="64008" marR="64008" marT="64008" marB="64008" anchor="ctr" anchorCtr="0" horzOverflow="overflow">
-                    <a:solidFill>
-                      <a:srgbClr val="FAFCFE"/>
-                    </a:solidFill>
-                  </a:tcPr>
-                </a:tc>
-              </a:tr>
-              <a:tr h="1337310">
-                <a:tc>
-                  <a:txBody>
-                    <a:bodyPr/>
-                    <a:lstStyle/>
-                    <a:p>
-                      <a:r>
-                        <a:t>复盘样本速度占比</a:t>
-                      </a:r>
-                    </a:p>
-                  </a:txBody>
-                  <a:tcPr marL="64008" marR="64008" marT="64008" marB="64008" anchor="ctr" anchorCtr="0" horzOverflow="overflow">
-                    <a:solidFill>
-                      <a:srgbClr val="FFFFFF"/>
-                    </a:solidFill>
-                  </a:tcPr>
-                </a:tc>
-                <a:tc>
-                  <a:txBody>
-                    <a:bodyPr/>
-                    <a:lstStyle/>
-                    <a:p>
-                      <a:pPr/>
-                      <a:r>
-                        <a:rPr sz="2200">
-                          <a:solidFill>
-                            <a:srgbClr val="586577"/>
-                          </a:solidFill>
-                          <a:latin typeface="Microsoft YaHei"/>
-                          <a:ea typeface="Microsoft YaHei"/>
-                          <a:cs typeface="Microsoft YaHei"/>
-                          <a:sym typeface="Microsoft YaHei"/>
-                        </a:rPr>
-                        <a:t>trips.avgSpeedKmh</a:t>
-                      </a:r>
-                    </a:p>
-                  </a:txBody>
-                  <a:tcPr marL="64008" marR="64008" marT="64008" marB="64008" anchor="ctr" anchorCtr="0" horzOverflow="overflow">
-                    <a:solidFill>
-                      <a:srgbClr val="FFFFFF"/>
-                    </a:solidFill>
-                  </a:tcPr>
-                </a:tc>
-                <a:tc>
-                  <a:txBody>
-                    <a:bodyPr/>
-                    <a:lstStyle/>
-                    <a:p>
-                      <a:r>
-                        <a:t>快速：avgSpeedKmh ≥ 35；慢速：avgSpeedKmh &lt; 18；中速：其余。</a:t>
-                      </a:r>
-                    </a:p>
-                    <a:p>
-                      <a:r>
-                        <a:t>用于“复盘样本”速度占比环图，不代表总采样轨迹。</a:t>
-                      </a:r>
-                    </a:p>
-                  </a:txBody>
-                  <a:tcPr marL="64008" marR="64008" marT="64008" marB="64008" anchor="ctr" anchorCtr="0" horzOverflow="overflow">
-                    <a:solidFill>
-                      <a:srgbClr val="FFFFFF"/>
-                    </a:solidFill>
-                  </a:tcPr>
-                </a:tc>
-              </a:tr>
-              <a:tr h="1337310">
-                <a:tc>
-                  <a:txBody>
-                    <a:bodyPr/>
-                    <a:lstStyle/>
-                    <a:p>
-                      <a:pPr>
-                        <a:defRPr b="1" sz="2200">
-                          <a:solidFill>
-                            <a:srgbClr val="1F2937"/>
-                          </a:solidFill>
-                          <a:latin typeface="Microsoft YaHei"/>
-                          <a:ea typeface="Microsoft YaHei"/>
-                          <a:cs typeface="Microsoft YaHei"/>
-                          <a:sym typeface="Microsoft YaHei"/>
-                        </a:defRPr>
-                      </a:pPr>
+                        <a:t>：</a:t>
+                      </a:r>
+                      <a:r>
+                        <a:t>overview 300s</a:t>
+                      </a:r>
                       <a:r>
                         <a:rPr>
-                          <a:latin typeface="+mj-lt"/>
-                          <a:ea typeface="+mj-ea"/>
-                          <a:cs typeface="+mj-cs"/>
+                          <a:latin typeface="+mn-lt"/>
+                          <a:ea typeface="+mn-ea"/>
+                          <a:cs typeface="+mn-cs"/>
                           <a:sym typeface="Helvetica Neue"/>
                         </a:rPr>
-                        <a:t>服务统计</a:t>
-                      </a:r>
-                    </a:p>
-                  </a:txBody>
-                  <a:tcPr marL="64008" marR="64008" marT="64008" marB="64008" anchor="ctr" anchorCtr="0" horzOverflow="overflow">
-                    <a:solidFill>
-                      <a:srgbClr val="FAFCFE"/>
-                    </a:solidFill>
-                  </a:tcPr>
-                </a:tc>
-                <a:tc>
-                  <a:txBody>
-                    <a:bodyPr/>
-                    <a:lstStyle/>
-                    <a:p>
-                      <a:pPr/>
-                      <a:r>
-                        <a:rPr sz="2200">
-                          <a:solidFill>
-                            <a:srgbClr val="586577"/>
-                          </a:solidFill>
-                          <a:latin typeface="Microsoft YaHei"/>
-                          <a:ea typeface="Microsoft YaHei"/>
-                          <a:cs typeface="Microsoft YaHei"/>
-                          <a:sym typeface="Microsoft YaHei"/>
-                        </a:rPr>
-                        <a:t>hotspots Top5</a:t>
-                      </a:r>
-                    </a:p>
-                  </a:txBody>
-                  <a:tcPr marL="64008" marR="64008" marT="64008" marB="64008" anchor="ctr" anchorCtr="0" horzOverflow="overflow">
-                    <a:solidFill>
-                      <a:srgbClr val="FAFCFE"/>
-                    </a:solidFill>
-                  </a:tcPr>
-                </a:tc>
-                <a:tc>
-                  <a:txBody>
-                    <a:bodyPr/>
-                    <a:lstStyle/>
-                    <a:p>
-                      <a:pPr>
-                        <a:defRPr sz="2200">
-                          <a:solidFill>
-                            <a:srgbClr val="1F2937"/>
-                          </a:solidFill>
-                          <a:latin typeface="Microsoft YaHei"/>
-                          <a:ea typeface="Microsoft YaHei"/>
-                          <a:cs typeface="Microsoft YaHei"/>
-                          <a:sym typeface="Microsoft YaHei"/>
-                        </a:defRPr>
-                      </a:pPr>
+                        <a:t>；</a:t>
+                      </a:r>
+                      <a:r>
+                        <a:t>timeline 600s</a:t>
+                      </a:r>
                       <a:r>
                         <a:rPr>
-                          <a:latin typeface="+mj-lt"/>
-                          <a:ea typeface="+mj-ea"/>
-                          <a:cs typeface="+mj-cs"/>
+                          <a:latin typeface="+mn-lt"/>
+                          <a:ea typeface="+mn-ea"/>
+                          <a:cs typeface="+mn-cs"/>
                           <a:sym typeface="Helvetica Neue"/>
                         </a:rPr>
-                        <a:t>服务数据条形图使用热点 </a:t>
-                      </a:r>
-                      <a:r>
-                        <a:t>Top5 </a:t>
+                        <a:t>；</a:t>
+                      </a:r>
+                      <a:r>
+                        <a:t>hotspots/congested/map 900s</a:t>
                       </a:r>
                       <a:r>
                         <a:rPr>
-                          <a:latin typeface="+mj-lt"/>
-                          <a:ea typeface="+mj-ea"/>
-                          <a:cs typeface="+mj-cs"/>
+                          <a:latin typeface="+mn-lt"/>
+                          <a:ea typeface="+mn-ea"/>
+                          <a:cs typeface="+mn-cs"/>
                           <a:sym typeface="Helvetica Neue"/>
                         </a:rPr>
-                        <a:t>的 </a:t>
-                      </a:r>
-                      <a:r>
-                        <a:t>intensity</a:t>
+                        <a:t>；</a:t>
+                      </a:r>
+                      <a:r>
+                        <a:t>roadClasses/trips 1800s</a:t>
                       </a:r>
                       <a:r>
                         <a:rPr>
-                          <a:latin typeface="+mj-lt"/>
-                          <a:ea typeface="+mj-ea"/>
-                          <a:cs typeface="+mj-cs"/>
+                          <a:latin typeface="+mn-lt"/>
+                          <a:ea typeface="+mn-ea"/>
+                          <a:cs typeface="+mn-cs"/>
                           <a:sym typeface="Helvetica Neue"/>
                         </a:rPr>
                         <a:t>。</a:t>
                       </a:r>
-                      <a:endParaRPr>
-                        <a:latin typeface="+mj-lt"/>
-                        <a:ea typeface="+mj-ea"/>
-                        <a:cs typeface="+mj-cs"/>
-                        <a:sym typeface="Helvetica Neue"/>
-                      </a:endParaRPr>
                     </a:p>
                     <a:p>
                       <a:pPr>
@@ -13957,299 +13677,21 @@
                           <a:solidFill>
                             <a:srgbClr val="1F2937"/>
                           </a:solidFill>
+                        </a:defRPr>
+                      </a:pPr>
+                      <a:r>
+                        <a:t>异常时返回 </a:t>
+                      </a:r>
+                      <a:r>
+                        <a:rPr>
                           <a:latin typeface="Microsoft YaHei"/>
                           <a:ea typeface="Microsoft YaHei"/>
                           <a:cs typeface="Microsoft YaHei"/>
                           <a:sym typeface="Microsoft YaHei"/>
-                        </a:defRPr>
-                      </a:pPr>
-                      <a:r>
-                        <a:rPr>
-                          <a:latin typeface="+mj-lt"/>
-                          <a:ea typeface="+mj-ea"/>
-                          <a:cs typeface="+mj-cs"/>
-                          <a:sym typeface="Helvetica Neue"/>
                         </a:rPr>
-                        <a:t>路段服务统计：频次</a:t>
-                      </a:r>
-                      <a:r>
-                        <a:t>=count</a:t>
-                      </a:r>
-                      <a:r>
-                        <a:rPr>
-                          <a:latin typeface="+mj-lt"/>
-                          <a:ea typeface="+mj-ea"/>
-                          <a:cs typeface="+mj-cs"/>
-                          <a:sym typeface="Helvetica Neue"/>
-                        </a:rPr>
-                        <a:t>，超速</a:t>
-                      </a:r>
-                      <a:r>
-                        <a:t>=round(count×0.62)</a:t>
-                      </a:r>
-                      <a:r>
-                        <a:rPr>
-                          <a:latin typeface="+mj-lt"/>
-                          <a:ea typeface="+mj-ea"/>
-                          <a:cs typeface="+mj-cs"/>
-                          <a:sym typeface="Helvetica Neue"/>
-                        </a:rPr>
-                        <a:t>，绕行</a:t>
-                      </a:r>
-                      <a:r>
-                        <a:t>=round(count×0.42)</a:t>
-                      </a:r>
-                      <a:r>
-                        <a:rPr>
-                          <a:latin typeface="+mj-lt"/>
-                          <a:ea typeface="+mj-ea"/>
-                          <a:cs typeface="+mj-cs"/>
-                          <a:sym typeface="Helvetica Neue"/>
-                        </a:rPr>
-                        <a:t>，为演示估算项。</a:t>
-                      </a:r>
-                    </a:p>
-                  </a:txBody>
-                  <a:tcPr marL="64008" marR="64008" marT="64008" marB="64008" anchor="ctr" anchorCtr="0" horzOverflow="overflow">
-                    <a:solidFill>
-                      <a:srgbClr val="FAFCFE"/>
-                    </a:solidFill>
-                  </a:tcPr>
-                </a:tc>
-              </a:tr>
-              <a:tr h="1337310">
-                <a:tc>
-                  <a:txBody>
-                    <a:bodyPr/>
-                    <a:lstStyle/>
-                    <a:p>
-                      <a:pPr>
-                        <a:defRPr b="1" sz="2200">
-                          <a:solidFill>
-                            <a:srgbClr val="1F2937"/>
-                          </a:solidFill>
-                          <a:latin typeface="Microsoft YaHei"/>
-                          <a:ea typeface="Microsoft YaHei"/>
-                          <a:cs typeface="Microsoft YaHei"/>
-                          <a:sym typeface="Microsoft YaHei"/>
-                        </a:defRPr>
-                      </a:pPr>
-                      <a:r>
-                        <a:rPr>
-                          <a:latin typeface="+mj-lt"/>
-                          <a:ea typeface="+mj-ea"/>
-                          <a:cs typeface="+mj-cs"/>
-                          <a:sym typeface="Helvetica Neue"/>
-                        </a:rPr>
-                        <a:t>数据新鲜度</a:t>
-                      </a:r>
-                    </a:p>
-                  </a:txBody>
-                  <a:tcPr marL="64008" marR="64008" marT="64008" marB="64008" anchor="ctr" anchorCtr="0" horzOverflow="overflow">
-                    <a:solidFill>
-                      <a:srgbClr val="FFFFFF"/>
-                    </a:solidFill>
-                  </a:tcPr>
-                </a:tc>
-                <a:tc>
-                  <a:txBody>
-                    <a:bodyPr/>
-                    <a:lstStyle/>
-                    <a:p>
-                      <a:pPr>
-                        <a:defRPr sz="2200">
-                          <a:solidFill>
-                            <a:srgbClr val="586577"/>
-                          </a:solidFill>
-                          <a:latin typeface="Microsoft YaHei"/>
-                          <a:ea typeface="Microsoft YaHei"/>
-                          <a:cs typeface="Microsoft YaHei"/>
-                          <a:sym typeface="Microsoft YaHei"/>
-                        </a:defRPr>
-                      </a:pPr>
-                      <a:r>
-                        <a:rPr>
-                          <a:latin typeface="+mj-lt"/>
-                          <a:ea typeface="+mj-ea"/>
-                          <a:cs typeface="+mj-cs"/>
-                          <a:sym typeface="Helvetica Neue"/>
-                        </a:rPr>
-                        <a:t>前端刷新 </a:t>
-                      </a:r>
-                      <a:r>
-                        <a:t>+ API</a:t>
-                      </a:r>
-                      <a:r>
-                        <a:rPr>
-                          <a:latin typeface="+mj-lt"/>
-                          <a:ea typeface="+mj-ea"/>
-                          <a:cs typeface="+mj-cs"/>
-                          <a:sym typeface="Helvetica Neue"/>
-                        </a:rPr>
-                        <a:t>缓存</a:t>
-                      </a:r>
-                    </a:p>
-                  </a:txBody>
-                  <a:tcPr marL="64008" marR="64008" marT="64008" marB="64008" anchor="ctr" anchorCtr="0" horzOverflow="overflow">
-                    <a:solidFill>
-                      <a:srgbClr val="FFFFFF"/>
-                    </a:solidFill>
-                  </a:tcPr>
-                </a:tc>
-                <a:tc>
-                  <a:txBody>
-                    <a:bodyPr/>
-                    <a:lstStyle/>
-                    <a:p>
-                      <a:pPr>
-                        <a:defRPr sz="2200">
-                          <a:solidFill>
-                            <a:srgbClr val="1F2937"/>
-                          </a:solidFill>
-                          <a:latin typeface="Microsoft YaHei"/>
-                          <a:ea typeface="Microsoft YaHei"/>
-                          <a:cs typeface="Microsoft YaHei"/>
-                          <a:sym typeface="Microsoft YaHei"/>
-                        </a:defRPr>
-                      </a:pPr>
-                      <a:r>
-                        <a:rPr>
-                          <a:latin typeface="+mj-lt"/>
-                          <a:ea typeface="+mj-ea"/>
-                          <a:cs typeface="+mj-cs"/>
-                          <a:sym typeface="Helvetica Neue"/>
-                        </a:rPr>
-                        <a:t>前端每 </a:t>
-                      </a:r>
-                      <a:r>
-                        <a:t>60 </a:t>
-                      </a:r>
-                      <a:r>
-                        <a:rPr>
-                          <a:latin typeface="+mj-lt"/>
-                          <a:ea typeface="+mj-ea"/>
-                          <a:cs typeface="+mj-cs"/>
-                          <a:sym typeface="Helvetica Neue"/>
-                        </a:rPr>
-                        <a:t>秒刷新。</a:t>
-                      </a:r>
-                      <a:endParaRPr>
-                        <a:latin typeface="+mj-lt"/>
-                        <a:ea typeface="+mj-ea"/>
-                        <a:cs typeface="+mj-cs"/>
-                        <a:sym typeface="Helvetica Neue"/>
-                      </a:endParaRPr>
-                    </a:p>
-                    <a:p>
-                      <a:pPr>
-                        <a:defRPr sz="2200">
-                          <a:solidFill>
-                            <a:srgbClr val="1F2937"/>
-                          </a:solidFill>
-                          <a:latin typeface="Microsoft YaHei"/>
-                          <a:ea typeface="Microsoft YaHei"/>
-                          <a:cs typeface="Microsoft YaHei"/>
-                          <a:sym typeface="Microsoft YaHei"/>
-                        </a:defRPr>
-                      </a:pPr>
-                      <a:r>
-                        <a:t>API TTL</a:t>
-                      </a:r>
-                      <a:r>
-                        <a:rPr>
-                          <a:latin typeface="+mj-lt"/>
-                          <a:ea typeface="+mj-ea"/>
-                          <a:cs typeface="+mj-cs"/>
-                          <a:sym typeface="Helvetica Neue"/>
-                        </a:rPr>
-                        <a:t>：</a:t>
-                      </a:r>
-                      <a:r>
-                        <a:t>overview 300s</a:t>
-                      </a:r>
-                      <a:r>
-                        <a:rPr>
-                          <a:latin typeface="+mj-lt"/>
-                          <a:ea typeface="+mj-ea"/>
-                          <a:cs typeface="+mj-cs"/>
-                          <a:sym typeface="Helvetica Neue"/>
-                        </a:rPr>
-                        <a:t>；</a:t>
-                      </a:r>
-                      <a:r>
-                        <a:t>timeline 600s</a:t>
-                      </a:r>
-                      <a:r>
-                        <a:rPr>
-                          <a:latin typeface="+mj-lt"/>
-                          <a:ea typeface="+mj-ea"/>
-                          <a:cs typeface="+mj-cs"/>
-                          <a:sym typeface="Helvetica Neue"/>
-                        </a:rPr>
-                        <a:t>；</a:t>
-                      </a:r>
-                      <a:r>
-                        <a:t>hotspots/congested/map 900s</a:t>
-                      </a:r>
-                      <a:r>
-                        <a:rPr>
-                          <a:latin typeface="+mj-lt"/>
-                          <a:ea typeface="+mj-ea"/>
-                          <a:cs typeface="+mj-cs"/>
-                          <a:sym typeface="Helvetica Neue"/>
-                        </a:rPr>
-                        <a:t>；</a:t>
-                      </a:r>
-                      <a:r>
-                        <a:t>roadClasses/trips 1800s</a:t>
-                      </a:r>
-                      <a:r>
-                        <a:rPr>
-                          <a:latin typeface="+mj-lt"/>
-                          <a:ea typeface="+mj-ea"/>
-                          <a:cs typeface="+mj-cs"/>
-                          <a:sym typeface="Helvetica Neue"/>
-                        </a:rPr>
-                        <a:t>。</a:t>
-                      </a:r>
-                      <a:endParaRPr>
-                        <a:latin typeface="+mj-lt"/>
-                        <a:ea typeface="+mj-ea"/>
-                        <a:cs typeface="+mj-cs"/>
-                        <a:sym typeface="Helvetica Neue"/>
-                      </a:endParaRPr>
-                    </a:p>
-                    <a:p>
-                      <a:pPr>
-                        <a:defRPr sz="2200">
-                          <a:solidFill>
-                            <a:srgbClr val="1F2937"/>
-                          </a:solidFill>
-                          <a:latin typeface="Microsoft YaHei"/>
-                          <a:ea typeface="Microsoft YaHei"/>
-                          <a:cs typeface="Microsoft YaHei"/>
-                          <a:sym typeface="Microsoft YaHei"/>
-                        </a:defRPr>
-                      </a:pPr>
-                      <a:r>
-                        <a:rPr>
-                          <a:latin typeface="+mj-lt"/>
-                          <a:ea typeface="+mj-ea"/>
-                          <a:cs typeface="+mj-cs"/>
-                          <a:sym typeface="Helvetica Neue"/>
-                        </a:rPr>
-                        <a:t>异常时返回 </a:t>
-                      </a:r>
-                      <a:r>
                         <a:t>fallback</a:t>
                       </a:r>
                       <a:r>
-                        <a:rPr>
-                          <a:latin typeface="+mj-lt"/>
-                          <a:ea typeface="+mj-ea"/>
-                          <a:cs typeface="+mj-cs"/>
-                          <a:sym typeface="Helvetica Neue"/>
-                        </a:rPr>
                         <a:t>。</a:t>
                       </a:r>
                     </a:p>
@@ -14304,7 +13746,7 @@
       </p:grpSpPr>
       <p:pic>
         <p:nvPicPr>
-          <p:cNvPr id="280" name="Image 0" descr="Image 0"/>
+          <p:cNvPr id="281" name="Image 0" descr="Image 0"/>
           <p:cNvPicPr>
             <a:picLocks noChangeAspect="1"/>
           </p:cNvPicPr>
@@ -14335,7 +13777,7 @@
       </p:pic>
       <p:sp>
         <p:nvSpPr>
-          <p:cNvPr id="281" name="Text 0"/>
+          <p:cNvPr id="282" name="Text 0"/>
           <p:cNvSpPr txBox="1"/>
           <p:nvPr/>
         </p:nvSpPr>
@@ -14389,7 +13831,7 @@
       </p:sp>
       <p:pic>
         <p:nvPicPr>
-          <p:cNvPr id="282" name="Image 1" descr="Image 1"/>
+          <p:cNvPr id="283" name="Image 1" descr="Image 1"/>
           <p:cNvPicPr>
             <a:picLocks noChangeAspect="1"/>
           </p:cNvPicPr>
@@ -14407,7 +13849,7 @@
         <p:spPr>
           <a:xfrm>
             <a:off x="2917188" y="3284220"/>
-            <a:ext cx="1376682" cy="1383033"/>
+            <a:ext cx="1376682" cy="1383034"/>
           </a:xfrm>
           <a:prstGeom prst="rect">
             <a:avLst/>
@@ -14419,7 +13861,7 @@
       </p:pic>
       <p:pic>
         <p:nvPicPr>
-          <p:cNvPr id="283" name="Image 2" descr="Image 2"/>
+          <p:cNvPr id="284" name="Image 2" descr="Image 2"/>
           <p:cNvPicPr>
             <a:picLocks noChangeAspect="1"/>
           </p:cNvPicPr>
@@ -14437,7 +13879,7 @@
         <p:spPr>
           <a:xfrm>
             <a:off x="1699259" y="6663690"/>
-            <a:ext cx="1376684" cy="1383033"/>
+            <a:ext cx="1376685" cy="1383034"/>
           </a:xfrm>
           <a:prstGeom prst="rect">
             <a:avLst/>
@@ -14449,7 +13891,7 @@
       </p:pic>
       <p:pic>
         <p:nvPicPr>
-          <p:cNvPr id="284" name="Image 3" descr="Image 3"/>
+          <p:cNvPr id="285" name="Image 3" descr="Image 3"/>
           <p:cNvPicPr>
             <a:picLocks noChangeAspect="1"/>
           </p:cNvPicPr>
@@ -14479,14 +13921,14 @@
       </p:pic>
       <p:sp>
         <p:nvSpPr>
-          <p:cNvPr id="285" name="Text 1"/>
+          <p:cNvPr id="286" name="Text 1"/>
           <p:cNvSpPr txBox="1"/>
           <p:nvPr/>
         </p:nvSpPr>
         <p:spPr>
           <a:xfrm>
             <a:off x="2926077" y="3464559"/>
-            <a:ext cx="1377954" cy="977901"/>
+            <a:ext cx="1377955" cy="977901"/>
           </a:xfrm>
           <a:prstGeom prst="rect">
             <a:avLst/>
@@ -14533,14 +13975,14 @@
       </p:sp>
       <p:sp>
         <p:nvSpPr>
-          <p:cNvPr id="286" name="Text 2"/>
+          <p:cNvPr id="287" name="Text 2"/>
           <p:cNvSpPr txBox="1"/>
           <p:nvPr/>
         </p:nvSpPr>
         <p:spPr>
           <a:xfrm>
             <a:off x="7042149" y="3442970"/>
-            <a:ext cx="13308333" cy="711201"/>
+            <a:ext cx="13308334" cy="711201"/>
           </a:xfrm>
           <a:prstGeom prst="rect">
             <a:avLst/>
@@ -14587,7 +14029,7 @@
       </p:sp>
       <p:sp>
         <p:nvSpPr>
-          <p:cNvPr id="287" name="Text 3"/>
+          <p:cNvPr id="288" name="Text 3"/>
           <p:cNvSpPr txBox="1"/>
           <p:nvPr/>
         </p:nvSpPr>
@@ -14641,14 +14083,14 @@
       </p:sp>
       <p:sp>
         <p:nvSpPr>
-          <p:cNvPr id="288" name="Text 4"/>
+          <p:cNvPr id="289" name="Text 4"/>
           <p:cNvSpPr txBox="1"/>
           <p:nvPr/>
         </p:nvSpPr>
         <p:spPr>
           <a:xfrm>
             <a:off x="1709420" y="6858000"/>
-            <a:ext cx="1377953" cy="977900"/>
+            <a:ext cx="1377954" cy="977900"/>
           </a:xfrm>
           <a:prstGeom prst="rect">
             <a:avLst/>
@@ -14695,7 +14137,7 @@
       </p:sp>
       <p:sp>
         <p:nvSpPr>
-          <p:cNvPr id="289" name="Text 5"/>
+          <p:cNvPr id="290" name="Text 5"/>
           <p:cNvSpPr txBox="1"/>
           <p:nvPr/>
         </p:nvSpPr>
@@ -14749,7 +14191,7 @@
       </p:sp>
       <p:sp>
         <p:nvSpPr>
-          <p:cNvPr id="290" name="Text 6"/>
+          <p:cNvPr id="291" name="Text 6"/>
           <p:cNvSpPr txBox="1"/>
           <p:nvPr/>
         </p:nvSpPr>
@@ -14803,14 +14245,14 @@
       </p:sp>
       <p:sp>
         <p:nvSpPr>
-          <p:cNvPr id="291" name="Text 7"/>
+          <p:cNvPr id="292" name="Text 7"/>
           <p:cNvSpPr txBox="1"/>
           <p:nvPr/>
         </p:nvSpPr>
         <p:spPr>
           <a:xfrm>
             <a:off x="3087370" y="10651490"/>
-            <a:ext cx="1377953" cy="977901"/>
+            <a:ext cx="1377954" cy="977901"/>
           </a:xfrm>
           <a:prstGeom prst="rect">
             <a:avLst/>
@@ -14857,14 +14299,14 @@
       </p:sp>
       <p:sp>
         <p:nvSpPr>
-          <p:cNvPr id="292" name="Text 8"/>
+          <p:cNvPr id="293" name="Text 8"/>
           <p:cNvSpPr txBox="1"/>
           <p:nvPr/>
         </p:nvSpPr>
         <p:spPr>
           <a:xfrm>
             <a:off x="6816089" y="9884409"/>
-            <a:ext cx="13140691" cy="711201"/>
+            <a:ext cx="13140692" cy="711201"/>
           </a:xfrm>
           <a:prstGeom prst="rect">
             <a:avLst/>
@@ -14911,7 +14353,7 @@
       </p:sp>
       <p:sp>
         <p:nvSpPr>
-          <p:cNvPr id="293" name="Text 9"/>
+          <p:cNvPr id="294" name="Text 9"/>
           <p:cNvSpPr txBox="1"/>
           <p:nvPr/>
         </p:nvSpPr>
@@ -14965,7 +14407,7 @@
       </p:sp>
       <p:sp>
         <p:nvSpPr>
-          <p:cNvPr id="294" name="文本框 15"/>
+          <p:cNvPr id="295" name="文本框 15"/>
           <p:cNvSpPr txBox="1"/>
           <p:nvPr>
             <p:ph type="sldNum" sz="quarter" idx="4294967295"/>
@@ -14974,7 +14416,7 @@
         <p:spPr>
           <a:xfrm>
             <a:off x="23164832" y="12861656"/>
-            <a:ext cx="449850" cy="728977"/>
+            <a:ext cx="449848" cy="728975"/>
           </a:xfrm>
           <a:prstGeom prst="rect">
             <a:avLst/>
@@ -14986,7 +14428,7 @@
           </a:extLst>
         </p:spPr>
         <p:txBody>
-          <a:bodyPr lIns="91437" tIns="91437" rIns="91437" bIns="91437" anchor="t"/>
+          <a:bodyPr lIns="91436" tIns="91436" rIns="91436" bIns="91436" anchor="t"/>
           <a:lstStyle>
             <a:lvl1pPr algn="l" defTabSz="1828800">
               <a:defRPr sz="3600">
@@ -15066,14 +14508,14 @@
     </a:clrScheme>
     <a:fontScheme name="21_BasicWhite">
       <a:majorFont>
+        <a:latin typeface="Helvetica"/>
+        <a:ea typeface="Helvetica"/>
+        <a:cs typeface="Helvetica"/>
+      </a:majorFont>
+      <a:minorFont>
         <a:latin typeface="Helvetica Neue"/>
         <a:ea typeface="Helvetica Neue"/>
         <a:cs typeface="Helvetica Neue"/>
-      </a:majorFont>
-      <a:minorFont>
-        <a:latin typeface="Helvetica"/>
-        <a:ea typeface="Helvetica"/>
-        <a:cs typeface="Helvetica"/>
       </a:minorFont>
     </a:fontScheme>
     <a:fmtScheme name="21_BasicWhite">
@@ -15257,7 +14699,7 @@
             <a:latin typeface="+mj-lt"/>
             <a:ea typeface="+mj-ea"/>
             <a:cs typeface="+mj-cs"/>
-            <a:sym typeface="Helvetica Neue"/>
+            <a:sym typeface="Helvetica"/>
           </a:defRPr>
         </a:defPPr>
         <a:lvl1pPr marL="0" marR="0" indent="0" algn="l" defTabSz="914400" rtl="0" fontAlgn="auto" latinLnBrk="1" hangingPunct="0">
@@ -15828,7 +15270,7 @@
             <a:latin typeface="+mj-lt"/>
             <a:ea typeface="+mj-ea"/>
             <a:cs typeface="+mj-cs"/>
-            <a:sym typeface="Helvetica Neue"/>
+            <a:sym typeface="Helvetica"/>
           </a:defRPr>
         </a:defPPr>
         <a:lvl1pPr marL="0" marR="0" indent="0" algn="l" defTabSz="914400" rtl="0" fontAlgn="auto" latinLnBrk="1" hangingPunct="0">
@@ -16120,14 +15562,14 @@
     </a:clrScheme>
     <a:fontScheme name="21_BasicWhite">
       <a:majorFont>
+        <a:latin typeface="Helvetica"/>
+        <a:ea typeface="Helvetica"/>
+        <a:cs typeface="Helvetica"/>
+      </a:majorFont>
+      <a:minorFont>
         <a:latin typeface="Helvetica Neue"/>
         <a:ea typeface="Helvetica Neue"/>
         <a:cs typeface="Helvetica Neue"/>
-      </a:majorFont>
-      <a:minorFont>
-        <a:latin typeface="Helvetica"/>
-        <a:ea typeface="Helvetica"/>
-        <a:cs typeface="Helvetica"/>
       </a:minorFont>
     </a:fontScheme>
     <a:fmtScheme name="21_BasicWhite">
@@ -16311,7 +15753,7 @@
             <a:latin typeface="+mj-lt"/>
             <a:ea typeface="+mj-ea"/>
             <a:cs typeface="+mj-cs"/>
-            <a:sym typeface="Helvetica Neue"/>
+            <a:sym typeface="Helvetica"/>
           </a:defRPr>
         </a:defPPr>
         <a:lvl1pPr marL="0" marR="0" indent="0" algn="l" defTabSz="914400" rtl="0" fontAlgn="auto" latinLnBrk="1" hangingPunct="0">
@@ -16882,7 +16324,7 @@
             <a:latin typeface="+mj-lt"/>
             <a:ea typeface="+mj-ea"/>
             <a:cs typeface="+mj-cs"/>
-            <a:sym typeface="Helvetica Neue"/>
+            <a:sym typeface="Helvetica"/>
           </a:defRPr>
         </a:defPPr>
         <a:lvl1pPr marL="0" marR="0" indent="0" algn="l" defTabSz="914400" rtl="0" fontAlgn="auto" latinLnBrk="1" hangingPunct="0">
